--- a/docs/test/stress/e2e-outputs/income_no_photos_pr09.pptx
+++ b/docs/test/stress/e2e-outputs/income_no_photos_pr09.pptx
@@ -1658,7 +1658,7 @@
     <p:bg>
       <p:bgPr>
         <a:solidFill>
-          <a:srgbClr val="0F172A"/>
+          <a:srgbClr val="10161F"/>
         </a:solidFill>
       </p:bgPr>
     </p:bg>
@@ -1753,7 +1753,7 @@
           <a:noFill/>
           <a:ln w="10160">
             <a:solidFill>
-              <a:srgbClr val="6B8E00"/>
+              <a:srgbClr val="B98A2E"/>
             </a:solidFill>
             <a:prstDash val="solid"/>
           </a:ln>
@@ -1767,14 +1767,14 @@
         </p:nvSpPr>
         <p:spPr>
           <a:xfrm>
-            <a:off x="7772400" y="0"/>
-            <a:ext cx="4419295" cy="6858000"/>
+            <a:off x="8275320" y="0"/>
+            <a:ext cx="1417320" cy="4041648"/>
           </a:xfrm>
           <a:prstGeom prst="rect">
             <a:avLst/>
           </a:prstGeom>
           <a:solidFill>
-            <a:srgbClr val="6B8E00"/>
+            <a:srgbClr val="1A2030"/>
           </a:solidFill>
           <a:ln/>
         </p:spPr>
@@ -1786,24 +1786,42 @@
           <p:nvPr/>
         </p:nvSpPr>
         <p:spPr>
-          <a:xfrm rot="120000">
-            <a:off x="8412480" y="548640"/>
-            <a:ext cx="3291840" cy="5760720"/>
+          <a:xfrm>
+            <a:off x="9784080" y="868680"/>
+            <a:ext cx="1143000" cy="3172968"/>
           </a:xfrm>
           <a:prstGeom prst="rect">
             <a:avLst/>
           </a:prstGeom>
           <a:solidFill>
-            <a:srgbClr val="0F172A">
-              <a:alpha val="12000"/>
-            </a:srgbClr>
+            <a:srgbClr val="161D2B"/>
           </a:solidFill>
           <a:ln/>
         </p:spPr>
       </p:sp>
       <p:sp>
         <p:nvSpPr>
-          <p:cNvPr id="8" name="Text 6"/>
+          <p:cNvPr id="8" name="Shape 6"/>
+          <p:cNvSpPr/>
+          <p:nvPr/>
+        </p:nvSpPr>
+        <p:spPr>
+          <a:xfrm>
+            <a:off x="11018520" y="1691640"/>
+            <a:ext cx="1170432" cy="2350008"/>
+          </a:xfrm>
+          <a:prstGeom prst="rect">
+            <a:avLst/>
+          </a:prstGeom>
+          <a:solidFill>
+            <a:srgbClr val="2E2718"/>
+          </a:solidFill>
+          <a:ln/>
+        </p:spPr>
+      </p:sp>
+      <p:sp>
+        <p:nvSpPr>
+          <p:cNvPr id="9" name="Text 7"/>
           <p:cNvSpPr/>
           <p:nvPr/>
         </p:nvSpPr>
@@ -1842,7 +1860,7 @@
             <a:r>
               <a:rPr lang="en-US" sz="1500" b="1" dirty="0">
                 <a:solidFill>
-                  <a:srgbClr val="6B8E00"/>
+                  <a:srgbClr val="B98A2E"/>
                 </a:solidFill>
                 <a:latin typeface="Arial" pitchFamily="34" charset="0"/>
                 <a:ea typeface="Arial" pitchFamily="34" charset="-122"/>
@@ -1856,115 +1874,76 @@
       </p:sp>
       <p:sp>
         <p:nvSpPr>
-          <p:cNvPr id="9" name="Text 7"/>
-          <p:cNvSpPr/>
-          <p:nvPr/>
-        </p:nvSpPr>
-        <p:spPr>
-          <a:xfrm>
-            <a:off x="8229600" y="5303520"/>
-            <a:ext cx="3474720" cy="365760"/>
-          </a:xfrm>
-          <a:prstGeom prst="rect">
-            <a:avLst/>
-          </a:prstGeom>
-          <a:noFill/>
-          <a:ln/>
-        </p:spPr>
-        <p:txBody>
-          <a:bodyPr wrap="square" lIns="0" tIns="0" rIns="0" bIns="0" rtlCol="0" anchor="ctr"/>
-          <a:lstStyle/>
-          <a:p>
-            <a:pPr algn="ctr" indent="0" marL="0">
-              <a:buNone/>
-            </a:pPr>
-            <a:r>
-              <a:rPr lang="en-US" sz="1000" dirty="0">
-                <a:solidFill>
-                  <a:srgbClr val="0F172A"/>
+          <p:cNvPr id="10" name="Text 8"/>
+          <p:cNvSpPr/>
+          <p:nvPr/>
+        </p:nvSpPr>
+        <p:spPr>
+          <a:xfrm>
+            <a:off x="566928" y="2029968"/>
+            <a:ext cx="7315200" cy="274320"/>
+          </a:xfrm>
+          <a:prstGeom prst="rect">
+            <a:avLst/>
+          </a:prstGeom>
+          <a:noFill/>
+          <a:ln/>
+        </p:spPr>
+        <p:txBody>
+          <a:bodyPr wrap="square" lIns="0" tIns="0" rIns="0" bIns="0" rtlCol="0" anchor="ctr"/>
+          <a:lstStyle/>
+          <a:p>
+            <a:pPr algn="l" indent="0" marL="0">
+              <a:buNone/>
+            </a:pPr>
+            <a:r>
+              <a:rPr lang="en-US" sz="1000" b="1" spc="250" kern="0" dirty="0">
+                <a:solidFill>
+                  <a:srgbClr val="B98A2E"/>
+                </a:solidFill>
+                <a:latin typeface="Arial" pitchFamily="34" charset="0"/>
+                <a:ea typeface="Arial" pitchFamily="34" charset="-122"/>
+                <a:cs typeface="Arial" pitchFamily="34" charset="-120"/>
+              </a:rPr>
+              <a:t>BASIC IM</a:t>
+            </a:r>
+            <a:endParaRPr lang="en-US" sz="1000" dirty="0"/>
+          </a:p>
+        </p:txBody>
+      </p:sp>
+      <p:sp>
+        <p:nvSpPr>
+          <p:cNvPr id="11" name="Text 9"/>
+          <p:cNvSpPr/>
+          <p:nvPr/>
+        </p:nvSpPr>
+        <p:spPr>
+          <a:xfrm>
+            <a:off x="566928" y="2304288"/>
+            <a:ext cx="7315200" cy="731520"/>
+          </a:xfrm>
+          <a:prstGeom prst="rect">
+            <a:avLst/>
+          </a:prstGeom>
+          <a:noFill/>
+          <a:ln/>
+        </p:spPr>
+        <p:txBody>
+          <a:bodyPr wrap="square" lIns="0" tIns="0" rIns="0" bIns="0" rtlCol="0" anchor="ctr"/>
+          <a:lstStyle/>
+          <a:p>
+            <a:pPr algn="l" indent="0" marL="0">
+              <a:buNone/>
+            </a:pPr>
+            <a:r>
+              <a:rPr lang="en-US" sz="4000" b="1" dirty="0">
+                <a:solidFill>
+                  <a:srgbClr val="FFFFFF"/>
                 </a:solidFill>
                 <a:latin typeface="Pretendard" pitchFamily="34" charset="0"/>
                 <a:ea typeface="Pretendard" pitchFamily="34" charset="-122"/>
                 <a:cs typeface="Pretendard" pitchFamily="34" charset="-120"/>
               </a:rPr>
-              <a:t>상업용 부동산 투자 플랫폼</a:t>
-            </a:r>
-            <a:endParaRPr lang="en-US" sz="1000" dirty="0"/>
-          </a:p>
-        </p:txBody>
-      </p:sp>
-      <p:sp>
-        <p:nvSpPr>
-          <p:cNvPr id="10" name="Text 8"/>
-          <p:cNvSpPr/>
-          <p:nvPr/>
-        </p:nvSpPr>
-        <p:spPr>
-          <a:xfrm>
-            <a:off x="566928" y="2029968"/>
-            <a:ext cx="7315200" cy="274320"/>
-          </a:xfrm>
-          <a:prstGeom prst="rect">
-            <a:avLst/>
-          </a:prstGeom>
-          <a:noFill/>
-          <a:ln/>
-        </p:spPr>
-        <p:txBody>
-          <a:bodyPr wrap="square" lIns="0" tIns="0" rIns="0" bIns="0" rtlCol="0" anchor="ctr"/>
-          <a:lstStyle/>
-          <a:p>
-            <a:pPr algn="l" indent="0" marL="0">
-              <a:buNone/>
-            </a:pPr>
-            <a:r>
-              <a:rPr lang="en-US" sz="1000" b="1" spc="250" kern="0" dirty="0">
-                <a:solidFill>
-                  <a:srgbClr val="6B8E00"/>
-                </a:solidFill>
-                <a:latin typeface="Arial" pitchFamily="34" charset="0"/>
-                <a:ea typeface="Arial" pitchFamily="34" charset="-122"/>
-                <a:cs typeface="Arial" pitchFamily="34" charset="-120"/>
-              </a:rPr>
-              <a:t>BASIC IM</a:t>
-            </a:r>
-            <a:endParaRPr lang="en-US" sz="1000" dirty="0"/>
-          </a:p>
-        </p:txBody>
-      </p:sp>
-      <p:sp>
-        <p:nvSpPr>
-          <p:cNvPr id="11" name="Text 9"/>
-          <p:cNvSpPr/>
-          <p:nvPr/>
-        </p:nvSpPr>
-        <p:spPr>
-          <a:xfrm>
-            <a:off x="566928" y="2304288"/>
-            <a:ext cx="7315200" cy="731520"/>
-          </a:xfrm>
-          <a:prstGeom prst="rect">
-            <a:avLst/>
-          </a:prstGeom>
-          <a:noFill/>
-          <a:ln/>
-        </p:spPr>
-        <p:txBody>
-          <a:bodyPr wrap="square" lIns="0" tIns="0" rIns="0" bIns="0" rtlCol="0" anchor="ctr"/>
-          <a:lstStyle/>
-          <a:p>
-            <a:pPr algn="l" indent="0" marL="0">
-              <a:buNone/>
-            </a:pPr>
-            <a:r>
-              <a:rPr lang="en-US" sz="4000" b="1" dirty="0">
-                <a:solidFill>
-                  <a:srgbClr val="FFFFFF"/>
-                </a:solidFill>
-                <a:latin typeface="Pretendard" pitchFamily="34" charset="0"/>
-                <a:ea typeface="Pretendard" pitchFamily="34" charset="-122"/>
-                <a:cs typeface="Pretendard" pitchFamily="34" charset="-120"/>
-              </a:rPr>
               <a:t>income 포스처 테스트 문서</a:t>
             </a:r>
             <a:endParaRPr lang="en-US" sz="4000" dirty="0"/>
@@ -1998,7 +1977,7 @@
             <a:r>
               <a:rPr lang="en-US" sz="1400" dirty="0">
                 <a:solidFill>
-                  <a:srgbClr val="F1F5F9"/>
+                  <a:srgbClr val="E2E8F0"/>
                 </a:solidFill>
                 <a:latin typeface="Pretendard" pitchFamily="34" charset="0"/>
                 <a:ea typeface="Pretendard" pitchFamily="34" charset="-122"/>
@@ -2027,7 +2006,7 @@
             </a:avLst>
           </a:prstGeom>
           <a:solidFill>
-            <a:srgbClr val="334155"/>
+            <a:srgbClr val="2D3748"/>
           </a:solidFill>
           <a:ln/>
         </p:spPr>
@@ -2088,7 +2067,7 @@
             </a:avLst>
           </a:prstGeom>
           <a:solidFill>
-            <a:srgbClr val="334155"/>
+            <a:srgbClr val="2D3748"/>
           </a:solidFill>
           <a:ln/>
         </p:spPr>
@@ -2149,11 +2128,11 @@
             </a:avLst>
           </a:prstGeom>
           <a:solidFill>
-            <a:srgbClr val="4F6A00"/>
+            <a:srgbClr val="977024"/>
           </a:solidFill>
           <a:ln w="12700">
             <a:solidFill>
-              <a:srgbClr val="6B8E00"/>
+              <a:srgbClr val="B98A2E"/>
             </a:solidFill>
             <a:prstDash val="solid"/>
           </a:ln>
@@ -2186,7 +2165,7 @@
             <a:r>
               <a:rPr lang="en-US" sz="2200" b="1" dirty="0">
                 <a:solidFill>
-                  <a:srgbClr val="E8F5CC"/>
+                  <a:srgbClr val="F3EBDA"/>
                 </a:solidFill>
                 <a:latin typeface="Pretendard" pitchFamily="34" charset="0"/>
                 <a:ea typeface="Pretendard" pitchFamily="34" charset="-122"/>
@@ -2234,59 +2213,75 @@
         </p:nvSpPr>
         <p:spPr>
           <a:xfrm>
-            <a:off x="566928" y="6419088"/>
-            <a:ext cx="11057839" cy="201168"/>
-          </a:xfrm>
-          <a:prstGeom prst="rect">
-            <a:avLst/>
-          </a:prstGeom>
-          <a:noFill/>
-          <a:ln/>
-        </p:spPr>
-        <p:txBody>
-          <a:bodyPr wrap="square" lIns="0" tIns="0" rIns="0" bIns="0" rtlCol="0" anchor="ctr"/>
-          <a:lstStyle/>
-          <a:p>
-            <a:pPr algn="ctr" indent="0" marL="0">
-              <a:buNone/>
-            </a:pPr>
-            <a:r>
-              <a:rPr lang="en-US" sz="750" dirty="0">
-                <a:solidFill>
-                  <a:srgbClr val="64748B"/>
+            <a:off x="566928" y="6382512"/>
+            <a:ext cx="7315200" cy="219456"/>
+          </a:xfrm>
+          <a:prstGeom prst="rect">
+            <a:avLst/>
+          </a:prstGeom>
+          <a:noFill/>
+          <a:ln/>
+        </p:spPr>
+        <p:txBody>
+          <a:bodyPr wrap="square" lIns="0" tIns="0" rIns="0" bIns="0" rtlCol="0" anchor="ctr"/>
+          <a:lstStyle/>
+          <a:p>
+            <a:pPr indent="0" marL="0">
+              <a:buNone/>
+            </a:pPr>
+            <a:r>
+              <a:rPr lang="en-US" sz="800" dirty="0">
+                <a:solidFill>
+                  <a:srgbClr val="718096"/>
                 </a:solidFill>
                 <a:latin typeface="Pretendard" pitchFamily="34" charset="0"/>
                 <a:ea typeface="Pretendard" pitchFamily="34" charset="-122"/>
                 <a:cs typeface="Pretendard" pitchFamily="34" charset="-120"/>
               </a:rPr>
-              <a:t>크리딜  ·    ·  1</a:t>
-            </a:r>
-            <a:endParaRPr lang="en-US" sz="750" dirty="0"/>
-          </a:p>
-        </p:txBody>
-      </p:sp>
-      <p:sp>
-        <p:nvSpPr>
-          <p:cNvPr id="21" name="Shape 19"/>
-          <p:cNvSpPr/>
-          <p:nvPr/>
-        </p:nvSpPr>
-        <p:spPr>
-          <a:xfrm>
-            <a:off x="4437172" y="6382512"/>
-            <a:ext cx="3317352" cy="0"/>
-          </a:xfrm>
-          <a:prstGeom prst="line">
-            <a:avLst/>
-          </a:prstGeom>
-          <a:noFill/>
-          <a:ln w="6350">
-            <a:solidFill>
-              <a:srgbClr val="6B8E00"/>
-            </a:solidFill>
-            <a:prstDash val="solid"/>
-          </a:ln>
-        </p:spPr>
+              <a:t>크리딜   |   </a:t>
+            </a:r>
+            <a:endParaRPr lang="en-US" sz="800" dirty="0"/>
+          </a:p>
+        </p:txBody>
+      </p:sp>
+      <p:sp>
+        <p:nvSpPr>
+          <p:cNvPr id="21" name="Text 19"/>
+          <p:cNvSpPr/>
+          <p:nvPr/>
+        </p:nvSpPr>
+        <p:spPr>
+          <a:xfrm>
+            <a:off x="10710367" y="6382512"/>
+            <a:ext cx="914400" cy="219456"/>
+          </a:xfrm>
+          <a:prstGeom prst="rect">
+            <a:avLst/>
+          </a:prstGeom>
+          <a:noFill/>
+          <a:ln/>
+        </p:spPr>
+        <p:txBody>
+          <a:bodyPr wrap="square" lIns="0" tIns="0" rIns="0" bIns="0" rtlCol="0" anchor="ctr"/>
+          <a:lstStyle/>
+          <a:p>
+            <a:pPr algn="r" indent="0" marL="0">
+              <a:buNone/>
+            </a:pPr>
+            <a:r>
+              <a:rPr lang="en-US" sz="900" b="1" dirty="0">
+                <a:solidFill>
+                  <a:srgbClr val="B98A2E"/>
+                </a:solidFill>
+                <a:latin typeface="Arial" pitchFamily="34" charset="0"/>
+                <a:ea typeface="Arial" pitchFamily="34" charset="-122"/>
+                <a:cs typeface="Arial" pitchFamily="34" charset="-120"/>
+              </a:rPr>
+              <a:t>1</a:t>
+            </a:r>
+            <a:endParaRPr lang="en-US" sz="900" dirty="0"/>
+          </a:p>
+        </p:txBody>
       </p:sp>
     </p:spTree>
   </p:cSld>
@@ -2302,7 +2297,7 @@
     <p:bg>
       <p:bgPr>
         <a:solidFill>
-          <a:srgbClr val="0F172A"/>
+          <a:srgbClr val="10161F"/>
         </a:solidFill>
       </p:bgPr>
     </p:bg>
@@ -2328,14 +2323,14 @@
         </p:nvSpPr>
         <p:spPr>
           <a:xfrm>
-            <a:off x="566928" y="384048"/>
-            <a:ext cx="45720" cy="566928"/>
-          </a:xfrm>
-          <a:prstGeom prst="rect">
+            <a:off x="566928" y="457200"/>
+            <a:ext cx="384048" cy="384048"/>
+          </a:xfrm>
+          <a:prstGeom prst="ellipse">
             <a:avLst/>
           </a:prstGeom>
           <a:solidFill>
-            <a:srgbClr val="6B8E00"/>
+            <a:srgbClr val="B98A2E"/>
           </a:solidFill>
           <a:ln/>
         </p:spPr>
@@ -2348,32 +2343,71 @@
         </p:nvSpPr>
         <p:spPr>
           <a:xfrm>
-            <a:off x="749808" y="384048"/>
-            <a:ext cx="10874959" cy="182880"/>
-          </a:xfrm>
-          <a:prstGeom prst="rect">
-            <a:avLst/>
-          </a:prstGeom>
-          <a:noFill/>
-          <a:ln/>
-        </p:spPr>
-        <p:txBody>
-          <a:bodyPr wrap="square" lIns="0" tIns="0" rIns="0" bIns="0" rtlCol="0" anchor="ctr"/>
-          <a:lstStyle/>
-          <a:p>
-            <a:pPr indent="0" marL="0">
-              <a:buNone/>
-            </a:pPr>
-            <a:r>
-              <a:rPr lang="en-US" sz="950" b="1" spc="200" kern="0" dirty="0">
-                <a:solidFill>
-                  <a:srgbClr val="6B8E00"/>
+            <a:off x="566928" y="457200"/>
+            <a:ext cx="384048" cy="384048"/>
+          </a:xfrm>
+          <a:prstGeom prst="rect">
+            <a:avLst/>
+          </a:prstGeom>
+          <a:noFill/>
+          <a:ln/>
+        </p:spPr>
+        <p:txBody>
+          <a:bodyPr wrap="square" lIns="0" tIns="0" rIns="0" bIns="0" rtlCol="0" anchor="ctr"/>
+          <a:lstStyle/>
+          <a:p>
+            <a:pPr algn="ctr" indent="0" marL="0">
+              <a:buNone/>
+            </a:pPr>
+            <a:r>
+              <a:rPr lang="en-US" sz="1300" b="1" dirty="0">
+                <a:solidFill>
+                  <a:srgbClr val="FFFFFF"/>
                 </a:solidFill>
                 <a:latin typeface="Arial" pitchFamily="34" charset="0"/>
                 <a:ea typeface="Arial" pitchFamily="34" charset="-122"/>
                 <a:cs typeface="Arial" pitchFamily="34" charset="-120"/>
               </a:rPr>
-              <a:t>10  Disclaimer</a:t>
+              <a:t>10</a:t>
+            </a:r>
+            <a:endParaRPr lang="en-US" sz="1300" dirty="0"/>
+          </a:p>
+        </p:txBody>
+      </p:sp>
+      <p:sp>
+        <p:nvSpPr>
+          <p:cNvPr id="4" name="Text 2"/>
+          <p:cNvSpPr/>
+          <p:nvPr/>
+        </p:nvSpPr>
+        <p:spPr>
+          <a:xfrm>
+            <a:off x="1133856" y="457200"/>
+            <a:ext cx="10490911" cy="182880"/>
+          </a:xfrm>
+          <a:prstGeom prst="rect">
+            <a:avLst/>
+          </a:prstGeom>
+          <a:noFill/>
+          <a:ln/>
+        </p:spPr>
+        <p:txBody>
+          <a:bodyPr wrap="square" lIns="0" tIns="0" rIns="0" bIns="0" rtlCol="0" anchor="ctr"/>
+          <a:lstStyle/>
+          <a:p>
+            <a:pPr indent="0" marL="0">
+              <a:buNone/>
+            </a:pPr>
+            <a:r>
+              <a:rPr lang="en-US" sz="950" b="1" spc="200" kern="0" dirty="0">
+                <a:solidFill>
+                  <a:srgbClr val="B98A2E"/>
+                </a:solidFill>
+                <a:latin typeface="Arial" pitchFamily="34" charset="0"/>
+                <a:ea typeface="Arial" pitchFamily="34" charset="-122"/>
+                <a:cs typeface="Arial" pitchFamily="34" charset="-120"/>
+              </a:rPr>
+              <a:t>Disclaimer</a:t>
             </a:r>
             <a:endParaRPr lang="en-US" sz="950" dirty="0"/>
           </a:p>
@@ -2381,14 +2415,14 @@
       </p:sp>
       <p:sp>
         <p:nvSpPr>
-          <p:cNvPr id="4" name="Text 2"/>
-          <p:cNvSpPr/>
-          <p:nvPr/>
-        </p:nvSpPr>
-        <p:spPr>
-          <a:xfrm>
-            <a:off x="749808" y="566928"/>
-            <a:ext cx="10874959" cy="384048"/>
+          <p:cNvPr id="5" name="Text 3"/>
+          <p:cNvSpPr/>
+          <p:nvPr/>
+        </p:nvSpPr>
+        <p:spPr>
+          <a:xfrm>
+            <a:off x="1133856" y="658368"/>
+            <a:ext cx="10490911" cy="420624"/>
           </a:xfrm>
           <a:prstGeom prst="rect">
             <a:avLst/>
@@ -2404,7 +2438,7 @@
               <a:buNone/>
             </a:pPr>
             <a:r>
-              <a:rPr lang="en-US" sz="2200" b="1" dirty="0">
+              <a:rPr lang="en-US" sz="2400" b="1" dirty="0">
                 <a:solidFill>
                   <a:srgbClr val="FFFFFF"/>
                 </a:solidFill>
@@ -2414,20 +2448,101 @@
               </a:rPr>
               <a:t>표기 기준 및 면책</a:t>
             </a:r>
-            <a:endParaRPr lang="en-US" sz="2200" dirty="0"/>
-          </a:p>
-        </p:txBody>
-      </p:sp>
-      <p:sp>
-        <p:nvSpPr>
-          <p:cNvPr id="5" name="Text 3"/>
-          <p:cNvSpPr/>
-          <p:nvPr/>
-        </p:nvSpPr>
-        <p:spPr>
-          <a:xfrm>
-            <a:off x="566928" y="1517904"/>
-            <a:ext cx="5486400" cy="237744"/>
+            <a:endParaRPr lang="en-US" sz="2400" dirty="0"/>
+          </a:p>
+        </p:txBody>
+      </p:sp>
+      <p:sp>
+        <p:nvSpPr>
+          <p:cNvPr id="6" name="Shape 4"/>
+          <p:cNvSpPr/>
+          <p:nvPr/>
+        </p:nvSpPr>
+        <p:spPr>
+          <a:xfrm>
+            <a:off x="566928" y="1463040"/>
+            <a:ext cx="3588410" cy="658368"/>
+          </a:xfrm>
+          <a:prstGeom prst="roundRect">
+            <a:avLst>
+              <a:gd name="adj" fmla="val 5556"/>
+            </a:avLst>
+          </a:prstGeom>
+          <a:solidFill>
+            <a:srgbClr val="2D3748"/>
+          </a:solidFill>
+          <a:ln/>
+        </p:spPr>
+      </p:sp>
+      <p:sp>
+        <p:nvSpPr>
+          <p:cNvPr id="7" name="Shape 5"/>
+          <p:cNvSpPr/>
+          <p:nvPr/>
+        </p:nvSpPr>
+        <p:spPr>
+          <a:xfrm>
+            <a:off x="676656" y="1572768"/>
+            <a:ext cx="438912" cy="438912"/>
+          </a:xfrm>
+          <a:prstGeom prst="ellipse">
+            <a:avLst/>
+          </a:prstGeom>
+          <a:solidFill>
+            <a:srgbClr val="B98A2E"/>
+          </a:solidFill>
+          <a:ln/>
+        </p:spPr>
+      </p:sp>
+      <p:sp>
+        <p:nvSpPr>
+          <p:cNvPr id="8" name="Text 6"/>
+          <p:cNvSpPr/>
+          <p:nvPr/>
+        </p:nvSpPr>
+        <p:spPr>
+          <a:xfrm>
+            <a:off x="676656" y="1572768"/>
+            <a:ext cx="438912" cy="438912"/>
+          </a:xfrm>
+          <a:prstGeom prst="rect">
+            <a:avLst/>
+          </a:prstGeom>
+          <a:noFill/>
+          <a:ln/>
+        </p:spPr>
+        <p:txBody>
+          <a:bodyPr wrap="square" lIns="0" tIns="0" rIns="0" bIns="0" rtlCol="0" anchor="ctr"/>
+          <a:lstStyle/>
+          <a:p>
+            <a:pPr algn="ctr" indent="0" marL="0">
+              <a:buNone/>
+            </a:pPr>
+            <a:r>
+              <a:rPr lang="en-US" sz="1400" b="1" dirty="0">
+                <a:solidFill>
+                  <a:srgbClr val="FFFFFF"/>
+                </a:solidFill>
+                <a:latin typeface="Arial" pitchFamily="34" charset="0"/>
+                <a:ea typeface="Arial" pitchFamily="34" charset="-122"/>
+                <a:cs typeface="Arial" pitchFamily="34" charset="-120"/>
+              </a:rPr>
+              <a:t>01</a:t>
+            </a:r>
+            <a:endParaRPr lang="en-US" sz="1400" dirty="0"/>
+          </a:p>
+        </p:txBody>
+      </p:sp>
+      <p:sp>
+        <p:nvSpPr>
+          <p:cNvPr id="9" name="Text 7"/>
+          <p:cNvSpPr/>
+          <p:nvPr/>
+        </p:nvSpPr>
+        <p:spPr>
+          <a:xfrm>
+            <a:off x="1225296" y="1554480"/>
+            <a:ext cx="2820314" cy="237744"/>
           </a:xfrm>
           <a:prstGeom prst="rect">
             <a:avLst/>
@@ -2451,7 +2566,7 @@
                 <a:ea typeface="Pretendard" pitchFamily="34" charset="-122"/>
                 <a:cs typeface="Pretendard" pitchFamily="34" charset="-120"/>
               </a:rPr>
-              <a:t>데이터 출처 표기</a:t>
+              <a:t>관심 표명</a:t>
             </a:r>
             <a:endParaRPr lang="en-US" sz="1100" dirty="0"/>
           </a:p>
@@ -2459,130 +2574,150 @@
       </p:sp>
       <p:sp>
         <p:nvSpPr>
-          <p:cNvPr id="6" name="Shape 4"/>
-          <p:cNvSpPr/>
-          <p:nvPr/>
-        </p:nvSpPr>
-        <p:spPr>
-          <a:xfrm>
-            <a:off x="566928" y="1847088"/>
-            <a:ext cx="1417320" cy="347472"/>
-          </a:xfrm>
-          <a:prstGeom prst="roundRect">
-            <a:avLst>
-              <a:gd name="adj" fmla="val 10526"/>
-            </a:avLst>
-          </a:prstGeom>
-          <a:solidFill>
-            <a:srgbClr val="334155"/>
-          </a:solidFill>
-          <a:ln/>
-        </p:spPr>
-      </p:sp>
-      <p:sp>
-        <p:nvSpPr>
-          <p:cNvPr id="7" name="Text 5"/>
-          <p:cNvSpPr/>
-          <p:nvPr/>
-        </p:nvSpPr>
-        <p:spPr>
-          <a:xfrm>
-            <a:off x="566928" y="1847088"/>
-            <a:ext cx="1417320" cy="347472"/>
-          </a:xfrm>
-          <a:prstGeom prst="rect">
-            <a:avLst/>
-          </a:prstGeom>
-          <a:noFill/>
-          <a:ln/>
-        </p:spPr>
-        <p:txBody>
-          <a:bodyPr wrap="square" lIns="0" tIns="0" rIns="0" bIns="0" rtlCol="0" anchor="ctr"/>
-          <a:lstStyle/>
-          <a:p>
-            <a:pPr algn="ctr" indent="0" marL="0">
-              <a:buNone/>
-            </a:pPr>
-            <a:r>
-              <a:rPr lang="en-US" sz="950" b="1" dirty="0">
-                <a:solidFill>
-                  <a:srgbClr val="FFFFFF"/>
+          <p:cNvPr id="10" name="Text 8"/>
+          <p:cNvSpPr/>
+          <p:nvPr/>
+        </p:nvSpPr>
+        <p:spPr>
+          <a:xfrm>
+            <a:off x="1225296" y="1792224"/>
+            <a:ext cx="2820314" cy="256032"/>
+          </a:xfrm>
+          <a:prstGeom prst="rect">
+            <a:avLst/>
+          </a:prstGeom>
+          <a:noFill/>
+          <a:ln/>
+        </p:spPr>
+        <p:txBody>
+          <a:bodyPr wrap="square" lIns="0" tIns="0" rIns="0" bIns="0" rtlCol="0" anchor="t"/>
+          <a:lstStyle/>
+          <a:p>
+            <a:pPr indent="0" marL="0">
+              <a:buNone/>
+            </a:pPr>
+            <a:r>
+              <a:rPr lang="en-US" sz="850" dirty="0">
+                <a:solidFill>
+                  <a:srgbClr val="A0AEC0"/>
                 </a:solidFill>
                 <a:latin typeface="Pretendard" pitchFamily="34" charset="0"/>
                 <a:ea typeface="Pretendard" pitchFamily="34" charset="-122"/>
                 <a:cs typeface="Pretendard" pitchFamily="34" charset="-120"/>
               </a:rPr>
-              <a:t>✓ 공부확인</a:t>
-            </a:r>
-            <a:endParaRPr lang="en-US" sz="950" dirty="0"/>
-          </a:p>
-        </p:txBody>
-      </p:sp>
-      <p:sp>
-        <p:nvSpPr>
-          <p:cNvPr id="8" name="Text 6"/>
-          <p:cNvSpPr/>
-          <p:nvPr/>
-        </p:nvSpPr>
-        <p:spPr>
-          <a:xfrm>
-            <a:off x="2139696" y="1828800"/>
-            <a:ext cx="3566160" cy="420624"/>
-          </a:xfrm>
-          <a:prstGeom prst="rect">
-            <a:avLst/>
-          </a:prstGeom>
-          <a:noFill/>
-          <a:ln/>
-        </p:spPr>
-        <p:txBody>
-          <a:bodyPr wrap="square" lIns="0" tIns="0" rIns="0" bIns="0" rtlCol="0" anchor="ctr"/>
-          <a:lstStyle/>
-          <a:p>
-            <a:pPr indent="0" marL="0">
-              <a:buNone/>
-            </a:pPr>
-            <a:r>
-              <a:rPr lang="en-US" sz="1000" dirty="0">
-                <a:solidFill>
-                  <a:srgbClr val="F1F5F9"/>
+              <a:t>담당 중개사에게 초기 관심 표명 및 상담 요청</a:t>
+            </a:r>
+            <a:endParaRPr lang="en-US" sz="850" dirty="0"/>
+          </a:p>
+        </p:txBody>
+      </p:sp>
+      <p:sp>
+        <p:nvSpPr>
+          <p:cNvPr id="11" name="Text 9"/>
+          <p:cNvSpPr/>
+          <p:nvPr/>
+        </p:nvSpPr>
+        <p:spPr>
+          <a:xfrm>
+            <a:off x="4155338" y="1600200"/>
+            <a:ext cx="146304" cy="384048"/>
+          </a:xfrm>
+          <a:prstGeom prst="rect">
+            <a:avLst/>
+          </a:prstGeom>
+          <a:noFill/>
+          <a:ln/>
+        </p:spPr>
+        <p:txBody>
+          <a:bodyPr wrap="square" lIns="0" tIns="0" rIns="0" bIns="0" rtlCol="0" anchor="ctr"/>
+          <a:lstStyle/>
+          <a:p>
+            <a:pPr algn="ctr" indent="0" marL="0">
+              <a:buNone/>
+            </a:pPr>
+            <a:r>
+              <a:rPr lang="en-US" sz="1600" dirty="0">
+                <a:solidFill>
+                  <a:srgbClr val="B98A2E"/>
                 </a:solidFill>
                 <a:latin typeface="Pretendard" pitchFamily="34" charset="0"/>
                 <a:ea typeface="Pretendard" pitchFamily="34" charset="-122"/>
                 <a:cs typeface="Pretendard" pitchFamily="34" charset="-120"/>
               </a:rPr>
-              <a:t>등기부·대장 등 공적 장부 직접 확인</a:t>
-            </a:r>
-            <a:endParaRPr lang="en-US" sz="1000" dirty="0"/>
-          </a:p>
-        </p:txBody>
-      </p:sp>
-      <p:sp>
-        <p:nvSpPr>
-          <p:cNvPr id="9" name="Text 7"/>
-          <p:cNvSpPr/>
-          <p:nvPr/>
-        </p:nvSpPr>
-        <p:spPr>
-          <a:xfrm>
-            <a:off x="5504688" y="1847088"/>
-            <a:ext cx="731520" cy="292608"/>
-          </a:xfrm>
-          <a:prstGeom prst="rect">
-            <a:avLst/>
-          </a:prstGeom>
-          <a:noFill/>
-          <a:ln/>
-        </p:spPr>
-        <p:txBody>
-          <a:bodyPr wrap="square" lIns="0" tIns="0" rIns="0" bIns="0" rtlCol="0" anchor="ctr"/>
-          <a:lstStyle/>
-          <a:p>
-            <a:pPr algn="r" indent="0" marL="0">
-              <a:buNone/>
-            </a:pPr>
-            <a:r>
-              <a:rPr lang="en-US" sz="1200" b="1" dirty="0">
+              <a:t>→</a:t>
+            </a:r>
+            <a:endParaRPr lang="en-US" sz="1600" dirty="0"/>
+          </a:p>
+        </p:txBody>
+      </p:sp>
+      <p:sp>
+        <p:nvSpPr>
+          <p:cNvPr id="12" name="Shape 10"/>
+          <p:cNvSpPr/>
+          <p:nvPr/>
+        </p:nvSpPr>
+        <p:spPr>
+          <a:xfrm>
+            <a:off x="4301642" y="1463040"/>
+            <a:ext cx="3588410" cy="658368"/>
+          </a:xfrm>
+          <a:prstGeom prst="roundRect">
+            <a:avLst>
+              <a:gd name="adj" fmla="val 5556"/>
+            </a:avLst>
+          </a:prstGeom>
+          <a:solidFill>
+            <a:srgbClr val="2D3748"/>
+          </a:solidFill>
+          <a:ln/>
+        </p:spPr>
+      </p:sp>
+      <p:sp>
+        <p:nvSpPr>
+          <p:cNvPr id="13" name="Shape 11"/>
+          <p:cNvSpPr/>
+          <p:nvPr/>
+        </p:nvSpPr>
+        <p:spPr>
+          <a:xfrm>
+            <a:off x="4411370" y="1572768"/>
+            <a:ext cx="438912" cy="438912"/>
+          </a:xfrm>
+          <a:prstGeom prst="ellipse">
+            <a:avLst/>
+          </a:prstGeom>
+          <a:solidFill>
+            <a:srgbClr val="B98A2E"/>
+          </a:solidFill>
+          <a:ln/>
+        </p:spPr>
+      </p:sp>
+      <p:sp>
+        <p:nvSpPr>
+          <p:cNvPr id="14" name="Text 12"/>
+          <p:cNvSpPr/>
+          <p:nvPr/>
+        </p:nvSpPr>
+        <p:spPr>
+          <a:xfrm>
+            <a:off x="4411370" y="1572768"/>
+            <a:ext cx="438912" cy="438912"/>
+          </a:xfrm>
+          <a:prstGeom prst="rect">
+            <a:avLst/>
+          </a:prstGeom>
+          <a:noFill/>
+          <a:ln/>
+        </p:spPr>
+        <p:txBody>
+          <a:bodyPr wrap="square" lIns="0" tIns="0" rIns="0" bIns="0" rtlCol="0" anchor="ctr"/>
+          <a:lstStyle/>
+          <a:p>
+            <a:pPr algn="ctr" indent="0" marL="0">
+              <a:buNone/>
+            </a:pPr>
+            <a:r>
+              <a:rPr lang="en-US" sz="1400" b="1" dirty="0">
                 <a:solidFill>
                   <a:srgbClr val="FFFFFF"/>
                 </a:solidFill>
@@ -2590,60 +2725,38 @@
                 <a:ea typeface="Arial" pitchFamily="34" charset="-122"/>
                 <a:cs typeface="Arial" pitchFamily="34" charset="-120"/>
               </a:rPr>
-              <a:t>1.00</a:t>
-            </a:r>
-            <a:endParaRPr lang="en-US" sz="1200" dirty="0"/>
-          </a:p>
-        </p:txBody>
-      </p:sp>
-      <p:sp>
-        <p:nvSpPr>
-          <p:cNvPr id="10" name="Shape 8"/>
-          <p:cNvSpPr/>
-          <p:nvPr/>
-        </p:nvSpPr>
-        <p:spPr>
-          <a:xfrm>
-            <a:off x="566928" y="2505456"/>
-            <a:ext cx="1417320" cy="347472"/>
-          </a:xfrm>
-          <a:prstGeom prst="roundRect">
-            <a:avLst>
-              <a:gd name="adj" fmla="val 10526"/>
-            </a:avLst>
-          </a:prstGeom>
-          <a:solidFill>
-            <a:srgbClr val="334155"/>
-          </a:solidFill>
-          <a:ln/>
-        </p:spPr>
-      </p:sp>
-      <p:sp>
-        <p:nvSpPr>
-          <p:cNvPr id="11" name="Text 9"/>
-          <p:cNvSpPr/>
-          <p:nvPr/>
-        </p:nvSpPr>
-        <p:spPr>
-          <a:xfrm>
-            <a:off x="566928" y="2505456"/>
-            <a:ext cx="1417320" cy="347472"/>
-          </a:xfrm>
-          <a:prstGeom prst="rect">
-            <a:avLst/>
-          </a:prstGeom>
-          <a:noFill/>
-          <a:ln/>
-        </p:spPr>
-        <p:txBody>
-          <a:bodyPr wrap="square" lIns="0" tIns="0" rIns="0" bIns="0" rtlCol="0" anchor="ctr"/>
-          <a:lstStyle/>
-          <a:p>
-            <a:pPr algn="ctr" indent="0" marL="0">
-              <a:buNone/>
-            </a:pPr>
-            <a:r>
-              <a:rPr lang="en-US" sz="950" b="1" dirty="0">
+              <a:t>02</a:t>
+            </a:r>
+            <a:endParaRPr lang="en-US" sz="1400" dirty="0"/>
+          </a:p>
+        </p:txBody>
+      </p:sp>
+      <p:sp>
+        <p:nvSpPr>
+          <p:cNvPr id="15" name="Text 13"/>
+          <p:cNvSpPr/>
+          <p:nvPr/>
+        </p:nvSpPr>
+        <p:spPr>
+          <a:xfrm>
+            <a:off x="4960010" y="1554480"/>
+            <a:ext cx="2820314" cy="237744"/>
+          </a:xfrm>
+          <a:prstGeom prst="rect">
+            <a:avLst/>
+          </a:prstGeom>
+          <a:noFill/>
+          <a:ln/>
+        </p:spPr>
+        <p:txBody>
+          <a:bodyPr wrap="square" lIns="0" tIns="0" rIns="0" bIns="0" rtlCol="0" anchor="ctr"/>
+          <a:lstStyle/>
+          <a:p>
+            <a:pPr indent="0" marL="0">
+              <a:buNone/>
+            </a:pPr>
+            <a:r>
+              <a:rPr lang="en-US" sz="1100" b="1" dirty="0">
                 <a:solidFill>
                   <a:srgbClr val="FFFFFF"/>
                 </a:solidFill>
@@ -2651,77 +2764,158 @@
                 <a:ea typeface="Pretendard" pitchFamily="34" charset="-122"/>
                 <a:cs typeface="Pretendard" pitchFamily="34" charset="-120"/>
               </a:rPr>
-              <a:t>★ 전문가검증</a:t>
-            </a:r>
-            <a:endParaRPr lang="en-US" sz="950" dirty="0"/>
-          </a:p>
-        </p:txBody>
-      </p:sp>
-      <p:sp>
-        <p:nvSpPr>
-          <p:cNvPr id="12" name="Text 10"/>
-          <p:cNvSpPr/>
-          <p:nvPr/>
-        </p:nvSpPr>
-        <p:spPr>
-          <a:xfrm>
-            <a:off x="2139696" y="2487168"/>
-            <a:ext cx="3566160" cy="420624"/>
-          </a:xfrm>
-          <a:prstGeom prst="rect">
-            <a:avLst/>
-          </a:prstGeom>
-          <a:noFill/>
-          <a:ln/>
-        </p:spPr>
-        <p:txBody>
-          <a:bodyPr wrap="square" lIns="0" tIns="0" rIns="0" bIns="0" rtlCol="0" anchor="ctr"/>
+              <a:t>NDA 체결</a:t>
+            </a:r>
+            <a:endParaRPr lang="en-US" sz="1100" dirty="0"/>
+          </a:p>
+        </p:txBody>
+      </p:sp>
+      <p:sp>
+        <p:nvSpPr>
+          <p:cNvPr id="16" name="Text 14"/>
+          <p:cNvSpPr/>
+          <p:nvPr/>
+        </p:nvSpPr>
+        <p:spPr>
+          <a:xfrm>
+            <a:off x="4960010" y="1792224"/>
+            <a:ext cx="2820314" cy="256032"/>
+          </a:xfrm>
+          <a:prstGeom prst="rect">
+            <a:avLst/>
+          </a:prstGeom>
+          <a:noFill/>
+          <a:ln/>
+        </p:spPr>
+        <p:txBody>
+          <a:bodyPr wrap="square" lIns="0" tIns="0" rIns="0" bIns="0" rtlCol="0" anchor="t"/>
           <a:lstStyle/>
           <a:p>
             <a:pPr indent="0" marL="0">
               <a:buNone/>
             </a:pPr>
             <a:r>
-              <a:rPr lang="en-US" sz="1000" dirty="0">
-                <a:solidFill>
-                  <a:srgbClr val="F1F5F9"/>
+              <a:rPr lang="en-US" sz="850" dirty="0">
+                <a:solidFill>
+                  <a:srgbClr val="A0AEC0"/>
                 </a:solidFill>
                 <a:latin typeface="Pretendard" pitchFamily="34" charset="0"/>
                 <a:ea typeface="Pretendard" pitchFamily="34" charset="-122"/>
                 <a:cs typeface="Pretendard" pitchFamily="34" charset="-120"/>
               </a:rPr>
-              <a:t>세무사·감정평가사 등 전문가 확인</a:t>
-            </a:r>
-            <a:endParaRPr lang="en-US" sz="1000" dirty="0"/>
-          </a:p>
-        </p:txBody>
-      </p:sp>
-      <p:sp>
-        <p:nvSpPr>
-          <p:cNvPr id="13" name="Text 11"/>
-          <p:cNvSpPr/>
-          <p:nvPr/>
-        </p:nvSpPr>
-        <p:spPr>
-          <a:xfrm>
-            <a:off x="5504688" y="2505456"/>
-            <a:ext cx="731520" cy="292608"/>
-          </a:xfrm>
-          <a:prstGeom prst="rect">
-            <a:avLst/>
-          </a:prstGeom>
-          <a:noFill/>
-          <a:ln/>
-        </p:spPr>
-        <p:txBody>
-          <a:bodyPr wrap="square" lIns="0" tIns="0" rIns="0" bIns="0" rtlCol="0" anchor="ctr"/>
-          <a:lstStyle/>
-          <a:p>
-            <a:pPr algn="r" indent="0" marL="0">
-              <a:buNone/>
-            </a:pPr>
-            <a:r>
-              <a:rPr lang="en-US" sz="1200" b="1" dirty="0">
+              <a:t>비밀유지계약 후 상세 임대차·재무 자료 제공</a:t>
+            </a:r>
+            <a:endParaRPr lang="en-US" sz="850" dirty="0"/>
+          </a:p>
+        </p:txBody>
+      </p:sp>
+      <p:sp>
+        <p:nvSpPr>
+          <p:cNvPr id="17" name="Text 15"/>
+          <p:cNvSpPr/>
+          <p:nvPr/>
+        </p:nvSpPr>
+        <p:spPr>
+          <a:xfrm>
+            <a:off x="7890053" y="1600200"/>
+            <a:ext cx="146304" cy="384048"/>
+          </a:xfrm>
+          <a:prstGeom prst="rect">
+            <a:avLst/>
+          </a:prstGeom>
+          <a:noFill/>
+          <a:ln/>
+        </p:spPr>
+        <p:txBody>
+          <a:bodyPr wrap="square" lIns="0" tIns="0" rIns="0" bIns="0" rtlCol="0" anchor="ctr"/>
+          <a:lstStyle/>
+          <a:p>
+            <a:pPr algn="ctr" indent="0" marL="0">
+              <a:buNone/>
+            </a:pPr>
+            <a:r>
+              <a:rPr lang="en-US" sz="1600" dirty="0">
+                <a:solidFill>
+                  <a:srgbClr val="B98A2E"/>
+                </a:solidFill>
+                <a:latin typeface="Pretendard" pitchFamily="34" charset="0"/>
+                <a:ea typeface="Pretendard" pitchFamily="34" charset="-122"/>
+                <a:cs typeface="Pretendard" pitchFamily="34" charset="-120"/>
+              </a:rPr>
+              <a:t>→</a:t>
+            </a:r>
+            <a:endParaRPr lang="en-US" sz="1600" dirty="0"/>
+          </a:p>
+        </p:txBody>
+      </p:sp>
+      <p:sp>
+        <p:nvSpPr>
+          <p:cNvPr id="18" name="Shape 16"/>
+          <p:cNvSpPr/>
+          <p:nvPr/>
+        </p:nvSpPr>
+        <p:spPr>
+          <a:xfrm>
+            <a:off x="8036357" y="1463040"/>
+            <a:ext cx="3588410" cy="658368"/>
+          </a:xfrm>
+          <a:prstGeom prst="roundRect">
+            <a:avLst>
+              <a:gd name="adj" fmla="val 5556"/>
+            </a:avLst>
+          </a:prstGeom>
+          <a:solidFill>
+            <a:srgbClr val="2D3748"/>
+          </a:solidFill>
+          <a:ln/>
+        </p:spPr>
+      </p:sp>
+      <p:sp>
+        <p:nvSpPr>
+          <p:cNvPr id="19" name="Shape 17"/>
+          <p:cNvSpPr/>
+          <p:nvPr/>
+        </p:nvSpPr>
+        <p:spPr>
+          <a:xfrm>
+            <a:off x="8146085" y="1572768"/>
+            <a:ext cx="438912" cy="438912"/>
+          </a:xfrm>
+          <a:prstGeom prst="ellipse">
+            <a:avLst/>
+          </a:prstGeom>
+          <a:solidFill>
+            <a:srgbClr val="B98A2E"/>
+          </a:solidFill>
+          <a:ln/>
+        </p:spPr>
+      </p:sp>
+      <p:sp>
+        <p:nvSpPr>
+          <p:cNvPr id="20" name="Text 18"/>
+          <p:cNvSpPr/>
+          <p:nvPr/>
+        </p:nvSpPr>
+        <p:spPr>
+          <a:xfrm>
+            <a:off x="8146085" y="1572768"/>
+            <a:ext cx="438912" cy="438912"/>
+          </a:xfrm>
+          <a:prstGeom prst="rect">
+            <a:avLst/>
+          </a:prstGeom>
+          <a:noFill/>
+          <a:ln/>
+        </p:spPr>
+        <p:txBody>
+          <a:bodyPr wrap="square" lIns="0" tIns="0" rIns="0" bIns="0" rtlCol="0" anchor="ctr"/>
+          <a:lstStyle/>
+          <a:p>
+            <a:pPr algn="ctr" indent="0" marL="0">
+              <a:buNone/>
+            </a:pPr>
+            <a:r>
+              <a:rPr lang="en-US" sz="1400" b="1" dirty="0">
                 <a:solidFill>
                   <a:srgbClr val="FFFFFF"/>
                 </a:solidFill>
@@ -2729,60 +2923,38 @@
                 <a:ea typeface="Arial" pitchFamily="34" charset="-122"/>
                 <a:cs typeface="Arial" pitchFamily="34" charset="-120"/>
               </a:rPr>
-              <a:t>0.95</a:t>
-            </a:r>
-            <a:endParaRPr lang="en-US" sz="1200" dirty="0"/>
-          </a:p>
-        </p:txBody>
-      </p:sp>
-      <p:sp>
-        <p:nvSpPr>
-          <p:cNvPr id="14" name="Shape 12"/>
-          <p:cNvSpPr/>
-          <p:nvPr/>
-        </p:nvSpPr>
-        <p:spPr>
-          <a:xfrm>
-            <a:off x="566928" y="3163824"/>
-            <a:ext cx="1417320" cy="347472"/>
-          </a:xfrm>
-          <a:prstGeom prst="roundRect">
-            <a:avLst>
-              <a:gd name="adj" fmla="val 10526"/>
-            </a:avLst>
-          </a:prstGeom>
-          <a:solidFill>
-            <a:srgbClr val="334155"/>
-          </a:solidFill>
-          <a:ln/>
-        </p:spPr>
-      </p:sp>
-      <p:sp>
-        <p:nvSpPr>
-          <p:cNvPr id="15" name="Text 13"/>
-          <p:cNvSpPr/>
-          <p:nvPr/>
-        </p:nvSpPr>
-        <p:spPr>
-          <a:xfrm>
-            <a:off x="566928" y="3163824"/>
-            <a:ext cx="1417320" cy="347472"/>
-          </a:xfrm>
-          <a:prstGeom prst="rect">
-            <a:avLst/>
-          </a:prstGeom>
-          <a:noFill/>
-          <a:ln/>
-        </p:spPr>
-        <p:txBody>
-          <a:bodyPr wrap="square" lIns="0" tIns="0" rIns="0" bIns="0" rtlCol="0" anchor="ctr"/>
-          <a:lstStyle/>
-          <a:p>
-            <a:pPr algn="ctr" indent="0" marL="0">
-              <a:buNone/>
-            </a:pPr>
-            <a:r>
-              <a:rPr lang="en-US" sz="950" b="1" dirty="0">
+              <a:t>03</a:t>
+            </a:r>
+            <a:endParaRPr lang="en-US" sz="1400" dirty="0"/>
+          </a:p>
+        </p:txBody>
+      </p:sp>
+      <p:sp>
+        <p:nvSpPr>
+          <p:cNvPr id="21" name="Text 19"/>
+          <p:cNvSpPr/>
+          <p:nvPr/>
+        </p:nvSpPr>
+        <p:spPr>
+          <a:xfrm>
+            <a:off x="8694725" y="1554480"/>
+            <a:ext cx="2820314" cy="237744"/>
+          </a:xfrm>
+          <a:prstGeom prst="rect">
+            <a:avLst/>
+          </a:prstGeom>
+          <a:noFill/>
+          <a:ln/>
+        </p:spPr>
+        <p:txBody>
+          <a:bodyPr wrap="square" lIns="0" tIns="0" rIns="0" bIns="0" rtlCol="0" anchor="ctr"/>
+          <a:lstStyle/>
+          <a:p>
+            <a:pPr indent="0" marL="0">
+              <a:buNone/>
+            </a:pPr>
+            <a:r>
+              <a:rPr lang="en-US" sz="1100" b="1" dirty="0">
                 <a:solidFill>
                   <a:srgbClr val="FFFFFF"/>
                 </a:solidFill>
@@ -2790,138 +2962,77 @@
                 <a:ea typeface="Pretendard" pitchFamily="34" charset="-122"/>
                 <a:cs typeface="Pretendard" pitchFamily="34" charset="-120"/>
               </a:rPr>
-              <a:t>▲ 매도인고지</a:t>
-            </a:r>
-            <a:endParaRPr lang="en-US" sz="950" dirty="0"/>
-          </a:p>
-        </p:txBody>
-      </p:sp>
-      <p:sp>
-        <p:nvSpPr>
-          <p:cNvPr id="16" name="Text 14"/>
-          <p:cNvSpPr/>
-          <p:nvPr/>
-        </p:nvSpPr>
-        <p:spPr>
-          <a:xfrm>
-            <a:off x="2139696" y="3145536"/>
-            <a:ext cx="3566160" cy="420624"/>
-          </a:xfrm>
-          <a:prstGeom prst="rect">
-            <a:avLst/>
-          </a:prstGeom>
-          <a:noFill/>
-          <a:ln/>
-        </p:spPr>
-        <p:txBody>
-          <a:bodyPr wrap="square" lIns="0" tIns="0" rIns="0" bIns="0" rtlCol="0" anchor="ctr"/>
+              <a:t>현장 실사</a:t>
+            </a:r>
+            <a:endParaRPr lang="en-US" sz="1100" dirty="0"/>
+          </a:p>
+        </p:txBody>
+      </p:sp>
+      <p:sp>
+        <p:nvSpPr>
+          <p:cNvPr id="22" name="Text 20"/>
+          <p:cNvSpPr/>
+          <p:nvPr/>
+        </p:nvSpPr>
+        <p:spPr>
+          <a:xfrm>
+            <a:off x="8694725" y="1792224"/>
+            <a:ext cx="2820314" cy="256032"/>
+          </a:xfrm>
+          <a:prstGeom prst="rect">
+            <a:avLst/>
+          </a:prstGeom>
+          <a:noFill/>
+          <a:ln/>
+        </p:spPr>
+        <p:txBody>
+          <a:bodyPr wrap="square" lIns="0" tIns="0" rIns="0" bIns="0" rtlCol="0" anchor="t"/>
           <a:lstStyle/>
           <a:p>
             <a:pPr indent="0" marL="0">
               <a:buNone/>
             </a:pPr>
             <a:r>
-              <a:rPr lang="en-US" sz="1000" dirty="0">
-                <a:solidFill>
-                  <a:srgbClr val="F1F5F9"/>
+              <a:rPr lang="en-US" sz="850" dirty="0">
+                <a:solidFill>
+                  <a:srgbClr val="A0AEC0"/>
                 </a:solidFill>
                 <a:latin typeface="Pretendard" pitchFamily="34" charset="0"/>
                 <a:ea typeface="Pretendard" pitchFamily="34" charset="-122"/>
                 <a:cs typeface="Pretendard" pitchFamily="34" charset="-120"/>
               </a:rPr>
-              <a:t>매도인이 구두 또는 서면으로 고지</a:t>
-            </a:r>
-            <a:endParaRPr lang="en-US" sz="1000" dirty="0"/>
-          </a:p>
-        </p:txBody>
-      </p:sp>
-      <p:sp>
-        <p:nvSpPr>
-          <p:cNvPr id="17" name="Text 15"/>
-          <p:cNvSpPr/>
-          <p:nvPr/>
-        </p:nvSpPr>
-        <p:spPr>
-          <a:xfrm>
-            <a:off x="5504688" y="3163824"/>
-            <a:ext cx="731520" cy="292608"/>
-          </a:xfrm>
-          <a:prstGeom prst="rect">
-            <a:avLst/>
-          </a:prstGeom>
-          <a:noFill/>
-          <a:ln/>
-        </p:spPr>
-        <p:txBody>
-          <a:bodyPr wrap="square" lIns="0" tIns="0" rIns="0" bIns="0" rtlCol="0" anchor="ctr"/>
-          <a:lstStyle/>
-          <a:p>
-            <a:pPr algn="r" indent="0" marL="0">
-              <a:buNone/>
-            </a:pPr>
-            <a:r>
-              <a:rPr lang="en-US" sz="1200" b="1" dirty="0">
-                <a:solidFill>
-                  <a:srgbClr val="FFFFFF"/>
-                </a:solidFill>
-                <a:latin typeface="Arial" pitchFamily="34" charset="0"/>
-                <a:ea typeface="Arial" pitchFamily="34" charset="-122"/>
-                <a:cs typeface="Arial" pitchFamily="34" charset="-120"/>
-              </a:rPr>
-              <a:t>0.65</a:t>
-            </a:r>
-            <a:endParaRPr lang="en-US" sz="1200" dirty="0"/>
-          </a:p>
-        </p:txBody>
-      </p:sp>
-      <p:sp>
-        <p:nvSpPr>
-          <p:cNvPr id="18" name="Shape 16"/>
-          <p:cNvSpPr/>
-          <p:nvPr/>
-        </p:nvSpPr>
-        <p:spPr>
-          <a:xfrm>
-            <a:off x="566928" y="3822192"/>
-            <a:ext cx="1417320" cy="347472"/>
-          </a:xfrm>
-          <a:prstGeom prst="roundRect">
-            <a:avLst>
-              <a:gd name="adj" fmla="val 10526"/>
-            </a:avLst>
-          </a:prstGeom>
-          <a:solidFill>
-            <a:srgbClr val="334155"/>
-          </a:solidFill>
-          <a:ln/>
-        </p:spPr>
-      </p:sp>
-      <p:sp>
-        <p:nvSpPr>
-          <p:cNvPr id="19" name="Text 17"/>
-          <p:cNvSpPr/>
-          <p:nvPr/>
-        </p:nvSpPr>
-        <p:spPr>
-          <a:xfrm>
-            <a:off x="566928" y="3822192"/>
-            <a:ext cx="1417320" cy="347472"/>
-          </a:xfrm>
-          <a:prstGeom prst="rect">
-            <a:avLst/>
-          </a:prstGeom>
-          <a:noFill/>
-          <a:ln/>
-        </p:spPr>
-        <p:txBody>
-          <a:bodyPr wrap="square" lIns="0" tIns="0" rIns="0" bIns="0" rtlCol="0" anchor="ctr"/>
-          <a:lstStyle/>
-          <a:p>
-            <a:pPr algn="ctr" indent="0" marL="0">
-              <a:buNone/>
-            </a:pPr>
-            <a:r>
-              <a:rPr lang="en-US" sz="950" b="1" dirty="0">
+              <a:t>건물 컨디션 및 설비 직접 확인 후 의향서(LOI) 제출</a:t>
+            </a:r>
+            <a:endParaRPr lang="en-US" sz="850" dirty="0"/>
+          </a:p>
+        </p:txBody>
+      </p:sp>
+      <p:sp>
+        <p:nvSpPr>
+          <p:cNvPr id="23" name="Text 21"/>
+          <p:cNvSpPr/>
+          <p:nvPr/>
+        </p:nvSpPr>
+        <p:spPr>
+          <a:xfrm>
+            <a:off x="566928" y="2395728"/>
+            <a:ext cx="5486400" cy="237744"/>
+          </a:xfrm>
+          <a:prstGeom prst="rect">
+            <a:avLst/>
+          </a:prstGeom>
+          <a:noFill/>
+          <a:ln/>
+        </p:spPr>
+        <p:txBody>
+          <a:bodyPr wrap="square" lIns="0" tIns="0" rIns="0" bIns="0" rtlCol="0" anchor="ctr"/>
+          <a:lstStyle/>
+          <a:p>
+            <a:pPr indent="0" marL="0">
+              <a:buNone/>
+            </a:pPr>
+            <a:r>
+              <a:rPr lang="en-US" sz="1100" b="1" dirty="0">
                 <a:solidFill>
                   <a:srgbClr val="FFFFFF"/>
                 </a:solidFill>
@@ -2929,239 +3040,183 @@
                 <a:ea typeface="Pretendard" pitchFamily="34" charset="-122"/>
                 <a:cs typeface="Pretendard" pitchFamily="34" charset="-120"/>
               </a:rPr>
-              <a:t>● 중개인입력</a:t>
-            </a:r>
-            <a:endParaRPr lang="en-US" sz="950" dirty="0"/>
-          </a:p>
-        </p:txBody>
-      </p:sp>
-      <p:sp>
-        <p:nvSpPr>
-          <p:cNvPr id="20" name="Text 18"/>
-          <p:cNvSpPr/>
-          <p:nvPr/>
-        </p:nvSpPr>
-        <p:spPr>
-          <a:xfrm>
-            <a:off x="2139696" y="3803904"/>
-            <a:ext cx="3566160" cy="420624"/>
-          </a:xfrm>
-          <a:prstGeom prst="rect">
-            <a:avLst/>
-          </a:prstGeom>
-          <a:noFill/>
-          <a:ln/>
-        </p:spPr>
-        <p:txBody>
-          <a:bodyPr wrap="square" lIns="0" tIns="0" rIns="0" bIns="0" rtlCol="0" anchor="ctr"/>
-          <a:lstStyle/>
-          <a:p>
-            <a:pPr indent="0" marL="0">
-              <a:buNone/>
-            </a:pPr>
-            <a:r>
-              <a:rPr lang="en-US" sz="1000" dirty="0">
-                <a:solidFill>
-                  <a:srgbClr val="F1F5F9"/>
+              <a:t>데이터 출처 표기</a:t>
+            </a:r>
+            <a:endParaRPr lang="en-US" sz="1100" dirty="0"/>
+          </a:p>
+        </p:txBody>
+      </p:sp>
+      <p:sp>
+        <p:nvSpPr>
+          <p:cNvPr id="24" name="Shape 22"/>
+          <p:cNvSpPr/>
+          <p:nvPr/>
+        </p:nvSpPr>
+        <p:spPr>
+          <a:xfrm>
+            <a:off x="566928" y="2724912"/>
+            <a:ext cx="1280160" cy="292608"/>
+          </a:xfrm>
+          <a:prstGeom prst="roundRect">
+            <a:avLst>
+              <a:gd name="adj" fmla="val 12500"/>
+            </a:avLst>
+          </a:prstGeom>
+          <a:solidFill>
+            <a:srgbClr val="2D3748"/>
+          </a:solidFill>
+          <a:ln/>
+        </p:spPr>
+      </p:sp>
+      <p:sp>
+        <p:nvSpPr>
+          <p:cNvPr id="25" name="Text 23"/>
+          <p:cNvSpPr/>
+          <p:nvPr/>
+        </p:nvSpPr>
+        <p:spPr>
+          <a:xfrm>
+            <a:off x="566928" y="2724912"/>
+            <a:ext cx="1280160" cy="292608"/>
+          </a:xfrm>
+          <a:prstGeom prst="rect">
+            <a:avLst/>
+          </a:prstGeom>
+          <a:noFill/>
+          <a:ln/>
+        </p:spPr>
+        <p:txBody>
+          <a:bodyPr wrap="square" lIns="0" tIns="0" rIns="0" bIns="0" rtlCol="0" anchor="ctr"/>
+          <a:lstStyle/>
+          <a:p>
+            <a:pPr algn="ctr" indent="0" marL="0">
+              <a:buNone/>
+            </a:pPr>
+            <a:r>
+              <a:rPr lang="en-US" sz="850" b="1" dirty="0">
+                <a:solidFill>
+                  <a:srgbClr val="FFFFFF"/>
                 </a:solidFill>
                 <a:latin typeface="Pretendard" pitchFamily="34" charset="0"/>
                 <a:ea typeface="Pretendard" pitchFamily="34" charset="-122"/>
                 <a:cs typeface="Pretendard" pitchFamily="34" charset="-120"/>
               </a:rPr>
-              <a:t>중개인 현장 조사 및 경험 기반 입력</a:t>
-            </a:r>
-            <a:endParaRPr lang="en-US" sz="1000" dirty="0"/>
-          </a:p>
-        </p:txBody>
-      </p:sp>
-      <p:sp>
-        <p:nvSpPr>
-          <p:cNvPr id="21" name="Text 19"/>
-          <p:cNvSpPr/>
-          <p:nvPr/>
-        </p:nvSpPr>
-        <p:spPr>
-          <a:xfrm>
-            <a:off x="5504688" y="3822192"/>
-            <a:ext cx="731520" cy="292608"/>
-          </a:xfrm>
-          <a:prstGeom prst="rect">
-            <a:avLst/>
-          </a:prstGeom>
-          <a:noFill/>
-          <a:ln/>
-        </p:spPr>
-        <p:txBody>
-          <a:bodyPr wrap="square" lIns="0" tIns="0" rIns="0" bIns="0" rtlCol="0" anchor="ctr"/>
-          <a:lstStyle/>
-          <a:p>
-            <a:pPr algn="r" indent="0" marL="0">
-              <a:buNone/>
-            </a:pPr>
-            <a:r>
-              <a:rPr lang="en-US" sz="1200" b="1" dirty="0">
-                <a:solidFill>
-                  <a:srgbClr val="FFFFFF"/>
-                </a:solidFill>
-                <a:latin typeface="Arial" pitchFamily="34" charset="0"/>
-                <a:ea typeface="Arial" pitchFamily="34" charset="-122"/>
-                <a:cs typeface="Arial" pitchFamily="34" charset="-120"/>
-              </a:rPr>
-              <a:t>0.60</a:t>
-            </a:r>
-            <a:endParaRPr lang="en-US" sz="1200" dirty="0"/>
-          </a:p>
-        </p:txBody>
-      </p:sp>
-      <p:sp>
-        <p:nvSpPr>
-          <p:cNvPr id="22" name="Shape 20"/>
-          <p:cNvSpPr/>
-          <p:nvPr/>
-        </p:nvSpPr>
-        <p:spPr>
-          <a:xfrm>
-            <a:off x="566928" y="4480560"/>
-            <a:ext cx="1417320" cy="347472"/>
-          </a:xfrm>
-          <a:prstGeom prst="roundRect">
-            <a:avLst>
-              <a:gd name="adj" fmla="val 10526"/>
-            </a:avLst>
-          </a:prstGeom>
-          <a:solidFill>
-            <a:srgbClr val="334155"/>
-          </a:solidFill>
-          <a:ln/>
-        </p:spPr>
-      </p:sp>
-      <p:sp>
-        <p:nvSpPr>
-          <p:cNvPr id="23" name="Text 21"/>
-          <p:cNvSpPr/>
-          <p:nvPr/>
-        </p:nvSpPr>
-        <p:spPr>
-          <a:xfrm>
-            <a:off x="566928" y="4480560"/>
-            <a:ext cx="1417320" cy="347472"/>
-          </a:xfrm>
-          <a:prstGeom prst="rect">
-            <a:avLst/>
-          </a:prstGeom>
-          <a:noFill/>
-          <a:ln/>
-        </p:spPr>
-        <p:txBody>
-          <a:bodyPr wrap="square" lIns="0" tIns="0" rIns="0" bIns="0" rtlCol="0" anchor="ctr"/>
-          <a:lstStyle/>
-          <a:p>
-            <a:pPr algn="ctr" indent="0" marL="0">
-              <a:buNone/>
-            </a:pPr>
-            <a:r>
-              <a:rPr lang="en-US" sz="950" b="1" dirty="0">
-                <a:solidFill>
-                  <a:srgbClr val="FFFFFF"/>
+              <a:t>✓ 공부확인</a:t>
+            </a:r>
+            <a:endParaRPr lang="en-US" sz="850" dirty="0"/>
+          </a:p>
+        </p:txBody>
+      </p:sp>
+      <p:sp>
+        <p:nvSpPr>
+          <p:cNvPr id="26" name="Text 24"/>
+          <p:cNvSpPr/>
+          <p:nvPr/>
+        </p:nvSpPr>
+        <p:spPr>
+          <a:xfrm>
+            <a:off x="1993392" y="2706624"/>
+            <a:ext cx="3840480" cy="329184"/>
+          </a:xfrm>
+          <a:prstGeom prst="rect">
+            <a:avLst/>
+          </a:prstGeom>
+          <a:noFill/>
+          <a:ln/>
+        </p:spPr>
+        <p:txBody>
+          <a:bodyPr wrap="square" lIns="0" tIns="0" rIns="0" bIns="0" rtlCol="0" anchor="ctr"/>
+          <a:lstStyle/>
+          <a:p>
+            <a:pPr indent="0" marL="0">
+              <a:buNone/>
+            </a:pPr>
+            <a:r>
+              <a:rPr lang="en-US" sz="900" dirty="0">
+                <a:solidFill>
+                  <a:srgbClr val="E2E8F0"/>
                 </a:solidFill>
                 <a:latin typeface="Pretendard" pitchFamily="34" charset="0"/>
                 <a:ea typeface="Pretendard" pitchFamily="34" charset="-122"/>
                 <a:cs typeface="Pretendard" pitchFamily="34" charset="-120"/>
               </a:rPr>
-              <a:t>◇ AI추정·가정</a:t>
-            </a:r>
-            <a:endParaRPr lang="en-US" sz="950" dirty="0"/>
-          </a:p>
-        </p:txBody>
-      </p:sp>
-      <p:sp>
-        <p:nvSpPr>
-          <p:cNvPr id="24" name="Text 22"/>
-          <p:cNvSpPr/>
-          <p:nvPr/>
-        </p:nvSpPr>
-        <p:spPr>
-          <a:xfrm>
-            <a:off x="2139696" y="4462272"/>
-            <a:ext cx="3566160" cy="420624"/>
-          </a:xfrm>
-          <a:prstGeom prst="rect">
-            <a:avLst/>
-          </a:prstGeom>
-          <a:noFill/>
-          <a:ln/>
-        </p:spPr>
-        <p:txBody>
-          <a:bodyPr wrap="square" lIns="0" tIns="0" rIns="0" bIns="0" rtlCol="0" anchor="ctr"/>
-          <a:lstStyle/>
-          <a:p>
-            <a:pPr indent="0" marL="0">
-              <a:buNone/>
-            </a:pPr>
-            <a:r>
-              <a:rPr lang="en-US" sz="1000" dirty="0">
-                <a:solidFill>
-                  <a:srgbClr val="F1F5F9"/>
+              <a:t>등기부·대장 등 공적 장부 직접 확인</a:t>
+            </a:r>
+            <a:endParaRPr lang="en-US" sz="900" dirty="0"/>
+          </a:p>
+        </p:txBody>
+      </p:sp>
+      <p:sp>
+        <p:nvSpPr>
+          <p:cNvPr id="27" name="Shape 25"/>
+          <p:cNvSpPr/>
+          <p:nvPr/>
+        </p:nvSpPr>
+        <p:spPr>
+          <a:xfrm>
+            <a:off x="566928" y="3200400"/>
+            <a:ext cx="1280160" cy="292608"/>
+          </a:xfrm>
+          <a:prstGeom prst="roundRect">
+            <a:avLst>
+              <a:gd name="adj" fmla="val 12500"/>
+            </a:avLst>
+          </a:prstGeom>
+          <a:solidFill>
+            <a:srgbClr val="2D3748"/>
+          </a:solidFill>
+          <a:ln/>
+        </p:spPr>
+      </p:sp>
+      <p:sp>
+        <p:nvSpPr>
+          <p:cNvPr id="28" name="Text 26"/>
+          <p:cNvSpPr/>
+          <p:nvPr/>
+        </p:nvSpPr>
+        <p:spPr>
+          <a:xfrm>
+            <a:off x="566928" y="3200400"/>
+            <a:ext cx="1280160" cy="292608"/>
+          </a:xfrm>
+          <a:prstGeom prst="rect">
+            <a:avLst/>
+          </a:prstGeom>
+          <a:noFill/>
+          <a:ln/>
+        </p:spPr>
+        <p:txBody>
+          <a:bodyPr wrap="square" lIns="0" tIns="0" rIns="0" bIns="0" rtlCol="0" anchor="ctr"/>
+          <a:lstStyle/>
+          <a:p>
+            <a:pPr algn="ctr" indent="0" marL="0">
+              <a:buNone/>
+            </a:pPr>
+            <a:r>
+              <a:rPr lang="en-US" sz="850" b="1" dirty="0">
+                <a:solidFill>
+                  <a:srgbClr val="FFFFFF"/>
                 </a:solidFill>
                 <a:latin typeface="Pretendard" pitchFamily="34" charset="0"/>
                 <a:ea typeface="Pretendard" pitchFamily="34" charset="-122"/>
                 <a:cs typeface="Pretendard" pitchFamily="34" charset="-120"/>
               </a:rPr>
-              <a:t>시나리오 분석 및 AI 모델 추정</a:t>
-            </a:r>
-            <a:endParaRPr lang="en-US" sz="1000" dirty="0"/>
-          </a:p>
-        </p:txBody>
-      </p:sp>
-      <p:sp>
-        <p:nvSpPr>
-          <p:cNvPr id="25" name="Text 23"/>
-          <p:cNvSpPr/>
-          <p:nvPr/>
-        </p:nvSpPr>
-        <p:spPr>
-          <a:xfrm>
-            <a:off x="5504688" y="4480560"/>
-            <a:ext cx="731520" cy="292608"/>
-          </a:xfrm>
-          <a:prstGeom prst="rect">
-            <a:avLst/>
-          </a:prstGeom>
-          <a:noFill/>
-          <a:ln/>
-        </p:spPr>
-        <p:txBody>
-          <a:bodyPr wrap="square" lIns="0" tIns="0" rIns="0" bIns="0" rtlCol="0" anchor="ctr"/>
-          <a:lstStyle/>
-          <a:p>
-            <a:pPr algn="r" indent="0" marL="0">
-              <a:buNone/>
-            </a:pPr>
-            <a:r>
-              <a:rPr lang="en-US" sz="1200" b="1" dirty="0">
-                <a:solidFill>
-                  <a:srgbClr val="FFFFFF"/>
-                </a:solidFill>
-                <a:latin typeface="Arial" pitchFamily="34" charset="0"/>
-                <a:ea typeface="Arial" pitchFamily="34" charset="-122"/>
-                <a:cs typeface="Arial" pitchFamily="34" charset="-120"/>
-              </a:rPr>
-              <a:t>0.30</a:t>
-            </a:r>
-            <a:endParaRPr lang="en-US" sz="1200" dirty="0"/>
-          </a:p>
-        </p:txBody>
-      </p:sp>
-      <p:sp>
-        <p:nvSpPr>
-          <p:cNvPr id="26" name="Text 24"/>
-          <p:cNvSpPr/>
-          <p:nvPr/>
-        </p:nvSpPr>
-        <p:spPr>
-          <a:xfrm>
-            <a:off x="6492240" y="1517904"/>
-            <a:ext cx="5129784" cy="237744"/>
+              <a:t>★ 전문가검증</a:t>
+            </a:r>
+            <a:endParaRPr lang="en-US" sz="850" dirty="0"/>
+          </a:p>
+        </p:txBody>
+      </p:sp>
+      <p:sp>
+        <p:nvSpPr>
+          <p:cNvPr id="29" name="Text 27"/>
+          <p:cNvSpPr/>
+          <p:nvPr/>
+        </p:nvSpPr>
+        <p:spPr>
+          <a:xfrm>
+            <a:off x="1993392" y="3182112"/>
+            <a:ext cx="3840480" cy="329184"/>
           </a:xfrm>
           <a:prstGeom prst="rect">
             <a:avLst/>
@@ -3177,52 +3232,391 @@
               <a:buNone/>
             </a:pPr>
             <a:r>
-              <a:rPr lang="en-US" sz="1100" b="1" dirty="0">
-                <a:solidFill>
-                  <a:srgbClr val="FFFFFF"/>
+              <a:rPr lang="en-US" sz="900" dirty="0">
+                <a:solidFill>
+                  <a:srgbClr val="E2E8F0"/>
                 </a:solidFill>
                 <a:latin typeface="Pretendard" pitchFamily="34" charset="0"/>
                 <a:ea typeface="Pretendard" pitchFamily="34" charset="-122"/>
                 <a:cs typeface="Pretendard" pitchFamily="34" charset="-120"/>
               </a:rPr>
-              <a:t>면책 조항</a:t>
-            </a:r>
-            <a:endParaRPr lang="en-US" sz="1100" dirty="0"/>
-          </a:p>
-        </p:txBody>
-      </p:sp>
-      <p:sp>
-        <p:nvSpPr>
-          <p:cNvPr id="27" name="Shape 25"/>
-          <p:cNvSpPr/>
-          <p:nvPr/>
-        </p:nvSpPr>
-        <p:spPr>
-          <a:xfrm>
-            <a:off x="6492240" y="1847088"/>
-            <a:ext cx="5129784" cy="2615184"/>
+              <a:t>세무사·감정평가사 등 전문가 확인</a:t>
+            </a:r>
+            <a:endParaRPr lang="en-US" sz="900" dirty="0"/>
+          </a:p>
+        </p:txBody>
+      </p:sp>
+      <p:sp>
+        <p:nvSpPr>
+          <p:cNvPr id="30" name="Shape 28"/>
+          <p:cNvSpPr/>
+          <p:nvPr/>
+        </p:nvSpPr>
+        <p:spPr>
+          <a:xfrm>
+            <a:off x="566928" y="3675888"/>
+            <a:ext cx="1280160" cy="292608"/>
           </a:xfrm>
           <a:prstGeom prst="roundRect">
             <a:avLst>
-              <a:gd name="adj" fmla="val 1399"/>
+              <a:gd name="adj" fmla="val 12500"/>
             </a:avLst>
           </a:prstGeom>
           <a:solidFill>
-            <a:srgbClr val="1E293B"/>
+            <a:srgbClr val="2D3748"/>
           </a:solidFill>
           <a:ln/>
         </p:spPr>
       </p:sp>
       <p:sp>
         <p:nvSpPr>
-          <p:cNvPr id="28" name="Text 26"/>
-          <p:cNvSpPr/>
-          <p:nvPr/>
-        </p:nvSpPr>
-        <p:spPr>
-          <a:xfrm>
-            <a:off x="6711696" y="2011680"/>
-            <a:ext cx="4690872" cy="2286000"/>
+          <p:cNvPr id="31" name="Text 29"/>
+          <p:cNvSpPr/>
+          <p:nvPr/>
+        </p:nvSpPr>
+        <p:spPr>
+          <a:xfrm>
+            <a:off x="566928" y="3675888"/>
+            <a:ext cx="1280160" cy="292608"/>
+          </a:xfrm>
+          <a:prstGeom prst="rect">
+            <a:avLst/>
+          </a:prstGeom>
+          <a:noFill/>
+          <a:ln/>
+        </p:spPr>
+        <p:txBody>
+          <a:bodyPr wrap="square" lIns="0" tIns="0" rIns="0" bIns="0" rtlCol="0" anchor="ctr"/>
+          <a:lstStyle/>
+          <a:p>
+            <a:pPr algn="ctr" indent="0" marL="0">
+              <a:buNone/>
+            </a:pPr>
+            <a:r>
+              <a:rPr lang="en-US" sz="850" b="1" dirty="0">
+                <a:solidFill>
+                  <a:srgbClr val="FFFFFF"/>
+                </a:solidFill>
+                <a:latin typeface="Pretendard" pitchFamily="34" charset="0"/>
+                <a:ea typeface="Pretendard" pitchFamily="34" charset="-122"/>
+                <a:cs typeface="Pretendard" pitchFamily="34" charset="-120"/>
+              </a:rPr>
+              <a:t>▲ 매도인고지</a:t>
+            </a:r>
+            <a:endParaRPr lang="en-US" sz="850" dirty="0"/>
+          </a:p>
+        </p:txBody>
+      </p:sp>
+      <p:sp>
+        <p:nvSpPr>
+          <p:cNvPr id="32" name="Text 30"/>
+          <p:cNvSpPr/>
+          <p:nvPr/>
+        </p:nvSpPr>
+        <p:spPr>
+          <a:xfrm>
+            <a:off x="1993392" y="3657600"/>
+            <a:ext cx="3840480" cy="329184"/>
+          </a:xfrm>
+          <a:prstGeom prst="rect">
+            <a:avLst/>
+          </a:prstGeom>
+          <a:noFill/>
+          <a:ln/>
+        </p:spPr>
+        <p:txBody>
+          <a:bodyPr wrap="square" lIns="0" tIns="0" rIns="0" bIns="0" rtlCol="0" anchor="ctr"/>
+          <a:lstStyle/>
+          <a:p>
+            <a:pPr indent="0" marL="0">
+              <a:buNone/>
+            </a:pPr>
+            <a:r>
+              <a:rPr lang="en-US" sz="900" dirty="0">
+                <a:solidFill>
+                  <a:srgbClr val="E2E8F0"/>
+                </a:solidFill>
+                <a:latin typeface="Pretendard" pitchFamily="34" charset="0"/>
+                <a:ea typeface="Pretendard" pitchFamily="34" charset="-122"/>
+                <a:cs typeface="Pretendard" pitchFamily="34" charset="-120"/>
+              </a:rPr>
+              <a:t>매도인이 구두 또는 서면으로 고지</a:t>
+            </a:r>
+            <a:endParaRPr lang="en-US" sz="900" dirty="0"/>
+          </a:p>
+        </p:txBody>
+      </p:sp>
+      <p:sp>
+        <p:nvSpPr>
+          <p:cNvPr id="33" name="Shape 31"/>
+          <p:cNvSpPr/>
+          <p:nvPr/>
+        </p:nvSpPr>
+        <p:spPr>
+          <a:xfrm>
+            <a:off x="566928" y="4151376"/>
+            <a:ext cx="1280160" cy="292608"/>
+          </a:xfrm>
+          <a:prstGeom prst="roundRect">
+            <a:avLst>
+              <a:gd name="adj" fmla="val 12500"/>
+            </a:avLst>
+          </a:prstGeom>
+          <a:solidFill>
+            <a:srgbClr val="2D3748"/>
+          </a:solidFill>
+          <a:ln/>
+        </p:spPr>
+      </p:sp>
+      <p:sp>
+        <p:nvSpPr>
+          <p:cNvPr id="34" name="Text 32"/>
+          <p:cNvSpPr/>
+          <p:nvPr/>
+        </p:nvSpPr>
+        <p:spPr>
+          <a:xfrm>
+            <a:off x="566928" y="4151376"/>
+            <a:ext cx="1280160" cy="292608"/>
+          </a:xfrm>
+          <a:prstGeom prst="rect">
+            <a:avLst/>
+          </a:prstGeom>
+          <a:noFill/>
+          <a:ln/>
+        </p:spPr>
+        <p:txBody>
+          <a:bodyPr wrap="square" lIns="0" tIns="0" rIns="0" bIns="0" rtlCol="0" anchor="ctr"/>
+          <a:lstStyle/>
+          <a:p>
+            <a:pPr algn="ctr" indent="0" marL="0">
+              <a:buNone/>
+            </a:pPr>
+            <a:r>
+              <a:rPr lang="en-US" sz="850" b="1" dirty="0">
+                <a:solidFill>
+                  <a:srgbClr val="FFFFFF"/>
+                </a:solidFill>
+                <a:latin typeface="Pretendard" pitchFamily="34" charset="0"/>
+                <a:ea typeface="Pretendard" pitchFamily="34" charset="-122"/>
+                <a:cs typeface="Pretendard" pitchFamily="34" charset="-120"/>
+              </a:rPr>
+              <a:t>● 중개인입력</a:t>
+            </a:r>
+            <a:endParaRPr lang="en-US" sz="850" dirty="0"/>
+          </a:p>
+        </p:txBody>
+      </p:sp>
+      <p:sp>
+        <p:nvSpPr>
+          <p:cNvPr id="35" name="Text 33"/>
+          <p:cNvSpPr/>
+          <p:nvPr/>
+        </p:nvSpPr>
+        <p:spPr>
+          <a:xfrm>
+            <a:off x="1993392" y="4133088"/>
+            <a:ext cx="3840480" cy="329184"/>
+          </a:xfrm>
+          <a:prstGeom prst="rect">
+            <a:avLst/>
+          </a:prstGeom>
+          <a:noFill/>
+          <a:ln/>
+        </p:spPr>
+        <p:txBody>
+          <a:bodyPr wrap="square" lIns="0" tIns="0" rIns="0" bIns="0" rtlCol="0" anchor="ctr"/>
+          <a:lstStyle/>
+          <a:p>
+            <a:pPr indent="0" marL="0">
+              <a:buNone/>
+            </a:pPr>
+            <a:r>
+              <a:rPr lang="en-US" sz="900" dirty="0">
+                <a:solidFill>
+                  <a:srgbClr val="E2E8F0"/>
+                </a:solidFill>
+                <a:latin typeface="Pretendard" pitchFamily="34" charset="0"/>
+                <a:ea typeface="Pretendard" pitchFamily="34" charset="-122"/>
+                <a:cs typeface="Pretendard" pitchFamily="34" charset="-120"/>
+              </a:rPr>
+              <a:t>중개인 현장 조사 및 경험 기반 입력</a:t>
+            </a:r>
+            <a:endParaRPr lang="en-US" sz="900" dirty="0"/>
+          </a:p>
+        </p:txBody>
+      </p:sp>
+      <p:sp>
+        <p:nvSpPr>
+          <p:cNvPr id="36" name="Shape 34"/>
+          <p:cNvSpPr/>
+          <p:nvPr/>
+        </p:nvSpPr>
+        <p:spPr>
+          <a:xfrm>
+            <a:off x="566928" y="4626864"/>
+            <a:ext cx="1280160" cy="292608"/>
+          </a:xfrm>
+          <a:prstGeom prst="roundRect">
+            <a:avLst>
+              <a:gd name="adj" fmla="val 12500"/>
+            </a:avLst>
+          </a:prstGeom>
+          <a:solidFill>
+            <a:srgbClr val="2D3748"/>
+          </a:solidFill>
+          <a:ln/>
+        </p:spPr>
+      </p:sp>
+      <p:sp>
+        <p:nvSpPr>
+          <p:cNvPr id="37" name="Text 35"/>
+          <p:cNvSpPr/>
+          <p:nvPr/>
+        </p:nvSpPr>
+        <p:spPr>
+          <a:xfrm>
+            <a:off x="566928" y="4626864"/>
+            <a:ext cx="1280160" cy="292608"/>
+          </a:xfrm>
+          <a:prstGeom prst="rect">
+            <a:avLst/>
+          </a:prstGeom>
+          <a:noFill/>
+          <a:ln/>
+        </p:spPr>
+        <p:txBody>
+          <a:bodyPr wrap="square" lIns="0" tIns="0" rIns="0" bIns="0" rtlCol="0" anchor="ctr"/>
+          <a:lstStyle/>
+          <a:p>
+            <a:pPr algn="ctr" indent="0" marL="0">
+              <a:buNone/>
+            </a:pPr>
+            <a:r>
+              <a:rPr lang="en-US" sz="850" b="1" dirty="0">
+                <a:solidFill>
+                  <a:srgbClr val="FFFFFF"/>
+                </a:solidFill>
+                <a:latin typeface="Pretendard" pitchFamily="34" charset="0"/>
+                <a:ea typeface="Pretendard" pitchFamily="34" charset="-122"/>
+                <a:cs typeface="Pretendard" pitchFamily="34" charset="-120"/>
+              </a:rPr>
+              <a:t>◇ AI추정·가정</a:t>
+            </a:r>
+            <a:endParaRPr lang="en-US" sz="850" dirty="0"/>
+          </a:p>
+        </p:txBody>
+      </p:sp>
+      <p:sp>
+        <p:nvSpPr>
+          <p:cNvPr id="38" name="Text 36"/>
+          <p:cNvSpPr/>
+          <p:nvPr/>
+        </p:nvSpPr>
+        <p:spPr>
+          <a:xfrm>
+            <a:off x="1993392" y="4608576"/>
+            <a:ext cx="3840480" cy="329184"/>
+          </a:xfrm>
+          <a:prstGeom prst="rect">
+            <a:avLst/>
+          </a:prstGeom>
+          <a:noFill/>
+          <a:ln/>
+        </p:spPr>
+        <p:txBody>
+          <a:bodyPr wrap="square" lIns="0" tIns="0" rIns="0" bIns="0" rtlCol="0" anchor="ctr"/>
+          <a:lstStyle/>
+          <a:p>
+            <a:pPr indent="0" marL="0">
+              <a:buNone/>
+            </a:pPr>
+            <a:r>
+              <a:rPr lang="en-US" sz="900" dirty="0">
+                <a:solidFill>
+                  <a:srgbClr val="E2E8F0"/>
+                </a:solidFill>
+                <a:latin typeface="Pretendard" pitchFamily="34" charset="0"/>
+                <a:ea typeface="Pretendard" pitchFamily="34" charset="-122"/>
+                <a:cs typeface="Pretendard" pitchFamily="34" charset="-120"/>
+              </a:rPr>
+              <a:t>시나리오 분석 및 AI 모델 추정</a:t>
+            </a:r>
+            <a:endParaRPr lang="en-US" sz="900" dirty="0"/>
+          </a:p>
+        </p:txBody>
+      </p:sp>
+      <p:sp>
+        <p:nvSpPr>
+          <p:cNvPr id="39" name="Text 37"/>
+          <p:cNvSpPr/>
+          <p:nvPr/>
+        </p:nvSpPr>
+        <p:spPr>
+          <a:xfrm>
+            <a:off x="6492240" y="2395728"/>
+            <a:ext cx="5129784" cy="237744"/>
+          </a:xfrm>
+          <a:prstGeom prst="rect">
+            <a:avLst/>
+          </a:prstGeom>
+          <a:noFill/>
+          <a:ln/>
+        </p:spPr>
+        <p:txBody>
+          <a:bodyPr wrap="square" lIns="0" tIns="0" rIns="0" bIns="0" rtlCol="0" anchor="ctr"/>
+          <a:lstStyle/>
+          <a:p>
+            <a:pPr indent="0" marL="0">
+              <a:buNone/>
+            </a:pPr>
+            <a:r>
+              <a:rPr lang="en-US" sz="1100" b="1" dirty="0">
+                <a:solidFill>
+                  <a:srgbClr val="FFFFFF"/>
+                </a:solidFill>
+                <a:latin typeface="Pretendard" pitchFamily="34" charset="0"/>
+                <a:ea typeface="Pretendard" pitchFamily="34" charset="-122"/>
+                <a:cs typeface="Pretendard" pitchFamily="34" charset="-120"/>
+              </a:rPr>
+              <a:t>면책 조항</a:t>
+            </a:r>
+            <a:endParaRPr lang="en-US" sz="1100" dirty="0"/>
+          </a:p>
+        </p:txBody>
+      </p:sp>
+      <p:sp>
+        <p:nvSpPr>
+          <p:cNvPr id="40" name="Shape 38"/>
+          <p:cNvSpPr/>
+          <p:nvPr/>
+        </p:nvSpPr>
+        <p:spPr>
+          <a:xfrm>
+            <a:off x="6492240" y="2724912"/>
+            <a:ext cx="5129784" cy="1645920"/>
+          </a:xfrm>
+          <a:prstGeom prst="roundRect">
+            <a:avLst>
+              <a:gd name="adj" fmla="val 2222"/>
+            </a:avLst>
+          </a:prstGeom>
+          <a:solidFill>
+            <a:srgbClr val="1C2433"/>
+          </a:solidFill>
+          <a:ln/>
+        </p:spPr>
+      </p:sp>
+      <p:sp>
+        <p:nvSpPr>
+          <p:cNvPr id="41" name="Text 39"/>
+          <p:cNvSpPr/>
+          <p:nvPr/>
+        </p:nvSpPr>
+        <p:spPr>
+          <a:xfrm>
+            <a:off x="6675120" y="2834640"/>
+            <a:ext cx="4764024" cy="1426464"/>
           </a:xfrm>
           <a:prstGeom prst="rect">
             <a:avLst/>
@@ -3241,9 +3635,9 @@
               <a:buNone/>
             </a:pPr>
             <a:r>
-              <a:rPr lang="en-US" sz="930" dirty="0">
-                <a:solidFill>
-                  <a:srgbClr val="94A3B8"/>
+              <a:rPr lang="en-US" sz="850" dirty="0">
+                <a:solidFill>
+                  <a:srgbClr val="A0AEC0"/>
                 </a:solidFill>
                 <a:latin typeface="Pretendard" pitchFamily="34" charset="0"/>
                 <a:ea typeface="Pretendard" pitchFamily="34" charset="-122"/>
@@ -3251,40 +3645,40 @@
               </a:rPr>
               <a:t>본 자료는 투자 권유가 아니며, 기재된 정보의 정확성을 보증하지 않습니다.</a:t>
             </a:r>
-            <a:endParaRPr lang="en-US" sz="930" dirty="0"/>
-          </a:p>
-        </p:txBody>
-      </p:sp>
-      <p:sp>
-        <p:nvSpPr>
-          <p:cNvPr id="29" name="Shape 27"/>
-          <p:cNvSpPr/>
-          <p:nvPr/>
-        </p:nvSpPr>
-        <p:spPr>
-          <a:xfrm>
-            <a:off x="566928" y="5230368"/>
-            <a:ext cx="11057839" cy="640080"/>
+            <a:endParaRPr lang="en-US" sz="850" dirty="0"/>
+          </a:p>
+        </p:txBody>
+      </p:sp>
+      <p:sp>
+        <p:nvSpPr>
+          <p:cNvPr id="42" name="Shape 40"/>
+          <p:cNvSpPr/>
+          <p:nvPr/>
+        </p:nvSpPr>
+        <p:spPr>
+          <a:xfrm>
+            <a:off x="566928" y="5760720"/>
+            <a:ext cx="11057839" cy="457200"/>
           </a:xfrm>
           <a:prstGeom prst="rect">
             <a:avLst/>
           </a:prstGeom>
           <a:solidFill>
-            <a:srgbClr val="4F6A00"/>
+            <a:srgbClr val="977024"/>
           </a:solidFill>
           <a:ln/>
         </p:spPr>
       </p:sp>
       <p:sp>
         <p:nvSpPr>
-          <p:cNvPr id="30" name="Text 28"/>
-          <p:cNvSpPr/>
-          <p:nvPr/>
-        </p:nvSpPr>
-        <p:spPr>
-          <a:xfrm>
-            <a:off x="786384" y="5321808"/>
-            <a:ext cx="10618927" cy="457200"/>
+          <p:cNvPr id="43" name="Text 41"/>
+          <p:cNvSpPr/>
+          <p:nvPr/>
+        </p:nvSpPr>
+        <p:spPr>
+          <a:xfrm>
+            <a:off x="749808" y="5806440"/>
+            <a:ext cx="10692079" cy="365760"/>
           </a:xfrm>
           <a:prstGeom prst="rect">
             <a:avLst/>
@@ -3300,81 +3694,97 @@
               <a:buNone/>
             </a:pPr>
             <a:r>
-              <a:rPr lang="en-US" sz="1000" dirty="0">
-                <a:solidFill>
-                  <a:srgbClr val="E8F5CC"/>
+              <a:rPr lang="en-US" sz="900" dirty="0">
+                <a:solidFill>
+                  <a:srgbClr val="F3EBDA"/>
                 </a:solidFill>
                 <a:latin typeface="Pretendard" pitchFamily="34" charset="0"/>
                 <a:ea typeface="Pretendard" pitchFamily="34" charset="-122"/>
                 <a:cs typeface="Pretendard" pitchFamily="34" charset="-120"/>
               </a:rPr>
-              <a:t>본 자료의 모든 수치는 예비 검토용이며, 상세 실사 자료(등기·임대차계약서) 및 1:1 비밀 상담은 담당 전문 중개사를 통해 제공됩니다.</a:t>
-            </a:r>
-            <a:endParaRPr lang="en-US" sz="1000" dirty="0"/>
-          </a:p>
-        </p:txBody>
-      </p:sp>
-      <p:sp>
-        <p:nvSpPr>
-          <p:cNvPr id="31" name="Text 29"/>
-          <p:cNvSpPr/>
-          <p:nvPr/>
-        </p:nvSpPr>
-        <p:spPr>
-          <a:xfrm>
-            <a:off x="566928" y="6419088"/>
-            <a:ext cx="11057839" cy="201168"/>
-          </a:xfrm>
-          <a:prstGeom prst="rect">
-            <a:avLst/>
-          </a:prstGeom>
-          <a:noFill/>
-          <a:ln/>
-        </p:spPr>
-        <p:txBody>
-          <a:bodyPr wrap="square" lIns="0" tIns="0" rIns="0" bIns="0" rtlCol="0" anchor="ctr"/>
-          <a:lstStyle/>
-          <a:p>
-            <a:pPr algn="ctr" indent="0" marL="0">
-              <a:buNone/>
-            </a:pPr>
-            <a:r>
-              <a:rPr lang="en-US" sz="750" dirty="0">
-                <a:solidFill>
-                  <a:srgbClr val="64748B"/>
+              <a:t>본 자료의 모든 수치는 예비 검토용이며, 상세 실사 자료 및 비밀 상담은 담당 전문 중개사를 통해 제공됩니다.</a:t>
+            </a:r>
+            <a:endParaRPr lang="en-US" sz="900" dirty="0"/>
+          </a:p>
+        </p:txBody>
+      </p:sp>
+      <p:sp>
+        <p:nvSpPr>
+          <p:cNvPr id="44" name="Text 42"/>
+          <p:cNvSpPr/>
+          <p:nvPr/>
+        </p:nvSpPr>
+        <p:spPr>
+          <a:xfrm>
+            <a:off x="566928" y="6382512"/>
+            <a:ext cx="7315200" cy="219456"/>
+          </a:xfrm>
+          <a:prstGeom prst="rect">
+            <a:avLst/>
+          </a:prstGeom>
+          <a:noFill/>
+          <a:ln/>
+        </p:spPr>
+        <p:txBody>
+          <a:bodyPr wrap="square" lIns="0" tIns="0" rIns="0" bIns="0" rtlCol="0" anchor="ctr"/>
+          <a:lstStyle/>
+          <a:p>
+            <a:pPr indent="0" marL="0">
+              <a:buNone/>
+            </a:pPr>
+            <a:r>
+              <a:rPr lang="en-US" sz="800" dirty="0">
+                <a:solidFill>
+                  <a:srgbClr val="718096"/>
                 </a:solidFill>
                 <a:latin typeface="Pretendard" pitchFamily="34" charset="0"/>
                 <a:ea typeface="Pretendard" pitchFamily="34" charset="-122"/>
                 <a:cs typeface="Pretendard" pitchFamily="34" charset="-120"/>
               </a:rPr>
-              <a:t>크리딜  ·    ·  10</a:t>
-            </a:r>
-            <a:endParaRPr lang="en-US" sz="750" dirty="0"/>
-          </a:p>
-        </p:txBody>
-      </p:sp>
-      <p:sp>
-        <p:nvSpPr>
-          <p:cNvPr id="32" name="Shape 30"/>
-          <p:cNvSpPr/>
-          <p:nvPr/>
-        </p:nvSpPr>
-        <p:spPr>
-          <a:xfrm>
-            <a:off x="4437172" y="6382512"/>
-            <a:ext cx="3317352" cy="0"/>
-          </a:xfrm>
-          <a:prstGeom prst="line">
-            <a:avLst/>
-          </a:prstGeom>
-          <a:noFill/>
-          <a:ln w="6350">
-            <a:solidFill>
-              <a:srgbClr val="6B8E00"/>
-            </a:solidFill>
-            <a:prstDash val="solid"/>
-          </a:ln>
-        </p:spPr>
+              <a:t>크리딜   |   </a:t>
+            </a:r>
+            <a:endParaRPr lang="en-US" sz="800" dirty="0"/>
+          </a:p>
+        </p:txBody>
+      </p:sp>
+      <p:sp>
+        <p:nvSpPr>
+          <p:cNvPr id="45" name="Text 43"/>
+          <p:cNvSpPr/>
+          <p:nvPr/>
+        </p:nvSpPr>
+        <p:spPr>
+          <a:xfrm>
+            <a:off x="10710367" y="6382512"/>
+            <a:ext cx="914400" cy="219456"/>
+          </a:xfrm>
+          <a:prstGeom prst="rect">
+            <a:avLst/>
+          </a:prstGeom>
+          <a:noFill/>
+          <a:ln/>
+        </p:spPr>
+        <p:txBody>
+          <a:bodyPr wrap="square" lIns="0" tIns="0" rIns="0" bIns="0" rtlCol="0" anchor="ctr"/>
+          <a:lstStyle/>
+          <a:p>
+            <a:pPr algn="r" indent="0" marL="0">
+              <a:buNone/>
+            </a:pPr>
+            <a:r>
+              <a:rPr lang="en-US" sz="900" b="1" dirty="0">
+                <a:solidFill>
+                  <a:srgbClr val="B98A2E"/>
+                </a:solidFill>
+                <a:latin typeface="Arial" pitchFamily="34" charset="0"/>
+                <a:ea typeface="Arial" pitchFamily="34" charset="-122"/>
+                <a:cs typeface="Arial" pitchFamily="34" charset="-120"/>
+              </a:rPr>
+              <a:t>10</a:t>
+            </a:r>
+            <a:endParaRPr lang="en-US" sz="900" dirty="0"/>
+          </a:p>
+        </p:txBody>
       </p:sp>
     </p:spTree>
   </p:cSld>
@@ -3416,14 +3826,14 @@
         </p:nvSpPr>
         <p:spPr>
           <a:xfrm>
-            <a:off x="566928" y="384048"/>
-            <a:ext cx="45720" cy="566928"/>
-          </a:xfrm>
-          <a:prstGeom prst="rect">
+            <a:off x="566928" y="457200"/>
+            <a:ext cx="384048" cy="384048"/>
+          </a:xfrm>
+          <a:prstGeom prst="ellipse">
             <a:avLst/>
           </a:prstGeom>
           <a:solidFill>
-            <a:srgbClr val="6B8E00"/>
+            <a:srgbClr val="B98A2E"/>
           </a:solidFill>
           <a:ln/>
         </p:spPr>
@@ -3436,32 +3846,71 @@
         </p:nvSpPr>
         <p:spPr>
           <a:xfrm>
-            <a:off x="749808" y="384048"/>
-            <a:ext cx="10874959" cy="182880"/>
-          </a:xfrm>
-          <a:prstGeom prst="rect">
-            <a:avLst/>
-          </a:prstGeom>
-          <a:noFill/>
-          <a:ln/>
-        </p:spPr>
-        <p:txBody>
-          <a:bodyPr wrap="square" lIns="0" tIns="0" rIns="0" bIns="0" rtlCol="0" anchor="ctr"/>
-          <a:lstStyle/>
-          <a:p>
-            <a:pPr indent="0" marL="0">
-              <a:buNone/>
-            </a:pPr>
-            <a:r>
-              <a:rPr lang="en-US" sz="950" b="1" spc="200" kern="0" dirty="0">
-                <a:solidFill>
-                  <a:srgbClr val="6B8E00"/>
+            <a:off x="566928" y="457200"/>
+            <a:ext cx="384048" cy="384048"/>
+          </a:xfrm>
+          <a:prstGeom prst="rect">
+            <a:avLst/>
+          </a:prstGeom>
+          <a:noFill/>
+          <a:ln/>
+        </p:spPr>
+        <p:txBody>
+          <a:bodyPr wrap="square" lIns="0" tIns="0" rIns="0" bIns="0" rtlCol="0" anchor="ctr"/>
+          <a:lstStyle/>
+          <a:p>
+            <a:pPr algn="ctr" indent="0" marL="0">
+              <a:buNone/>
+            </a:pPr>
+            <a:r>
+              <a:rPr lang="en-US" sz="1300" b="1" dirty="0">
+                <a:solidFill>
+                  <a:srgbClr val="FFFFFF"/>
                 </a:solidFill>
                 <a:latin typeface="Arial" pitchFamily="34" charset="0"/>
                 <a:ea typeface="Arial" pitchFamily="34" charset="-122"/>
                 <a:cs typeface="Arial" pitchFamily="34" charset="-120"/>
               </a:rPr>
-              <a:t>02  Summary</a:t>
+              <a:t>02</a:t>
+            </a:r>
+            <a:endParaRPr lang="en-US" sz="1300" dirty="0"/>
+          </a:p>
+        </p:txBody>
+      </p:sp>
+      <p:sp>
+        <p:nvSpPr>
+          <p:cNvPr id="4" name="Text 2"/>
+          <p:cNvSpPr/>
+          <p:nvPr/>
+        </p:nvSpPr>
+        <p:spPr>
+          <a:xfrm>
+            <a:off x="1133856" y="457200"/>
+            <a:ext cx="10490911" cy="182880"/>
+          </a:xfrm>
+          <a:prstGeom prst="rect">
+            <a:avLst/>
+          </a:prstGeom>
+          <a:noFill/>
+          <a:ln/>
+        </p:spPr>
+        <p:txBody>
+          <a:bodyPr wrap="square" lIns="0" tIns="0" rIns="0" bIns="0" rtlCol="0" anchor="ctr"/>
+          <a:lstStyle/>
+          <a:p>
+            <a:pPr indent="0" marL="0">
+              <a:buNone/>
+            </a:pPr>
+            <a:r>
+              <a:rPr lang="en-US" sz="950" b="1" spc="200" kern="0" dirty="0">
+                <a:solidFill>
+                  <a:srgbClr val="B98A2E"/>
+                </a:solidFill>
+                <a:latin typeface="Arial" pitchFamily="34" charset="0"/>
+                <a:ea typeface="Arial" pitchFamily="34" charset="-122"/>
+                <a:cs typeface="Arial" pitchFamily="34" charset="-120"/>
+              </a:rPr>
+              <a:t>Summary</a:t>
             </a:r>
             <a:endParaRPr lang="en-US" sz="950" dirty="0"/>
           </a:p>
@@ -3469,14 +3918,14 @@
       </p:sp>
       <p:sp>
         <p:nvSpPr>
-          <p:cNvPr id="4" name="Text 2"/>
-          <p:cNvSpPr/>
-          <p:nvPr/>
-        </p:nvSpPr>
-        <p:spPr>
-          <a:xfrm>
-            <a:off x="749808" y="566928"/>
-            <a:ext cx="10874959" cy="384048"/>
+          <p:cNvPr id="5" name="Text 3"/>
+          <p:cNvSpPr/>
+          <p:nvPr/>
+        </p:nvSpPr>
+        <p:spPr>
+          <a:xfrm>
+            <a:off x="1133856" y="640080"/>
+            <a:ext cx="10490911" cy="365760"/>
           </a:xfrm>
           <a:prstGeom prst="rect">
             <a:avLst/>
@@ -3492,9 +3941,9 @@
               <a:buNone/>
             </a:pPr>
             <a:r>
-              <a:rPr lang="en-US" sz="2200" b="1" dirty="0">
-                <a:solidFill>
-                  <a:srgbClr val="0F172A"/>
+              <a:rPr lang="en-US" sz="2300" b="1" dirty="0">
+                <a:solidFill>
+                  <a:srgbClr val="10161F"/>
                 </a:solidFill>
                 <a:latin typeface="Pretendard" pitchFamily="34" charset="0"/>
                 <a:ea typeface="Pretendard" pitchFamily="34" charset="-122"/>
@@ -3502,13 +3951,13 @@
               </a:rPr>
               <a:t>핵심요약</a:t>
             </a:r>
-            <a:endParaRPr lang="en-US" sz="2200" dirty="0"/>
-          </a:p>
-        </p:txBody>
-      </p:sp>
-      <p:sp>
-        <p:nvSpPr>
-          <p:cNvPr id="5" name="Text 3"/>
+            <a:endParaRPr lang="en-US" sz="2300" dirty="0"/>
+          </a:p>
+        </p:txBody>
+      </p:sp>
+      <p:sp>
+        <p:nvSpPr>
+          <p:cNvPr id="6" name="Text 4"/>
           <p:cNvSpPr/>
           <p:nvPr/>
         </p:nvSpPr>
@@ -3533,7 +3982,7 @@
             <a:r>
               <a:rPr lang="en-US" sz="1500" b="1" dirty="0">
                 <a:solidFill>
-                  <a:srgbClr val="0F172A"/>
+                  <a:srgbClr val="10161F"/>
                 </a:solidFill>
                 <a:latin typeface="Pretendard" pitchFamily="34" charset="0"/>
                 <a:ea typeface="Pretendard" pitchFamily="34" charset="-122"/>
@@ -3547,7 +3996,7 @@
       </p:sp>
       <p:sp>
         <p:nvSpPr>
-          <p:cNvPr id="6" name="Shape 4"/>
+          <p:cNvPr id="7" name="Shape 5"/>
           <p:cNvSpPr/>
           <p:nvPr/>
         </p:nvSpPr>
@@ -3562,7 +4011,7 @@
           <a:noFill/>
           <a:ln w="19050">
             <a:solidFill>
-              <a:srgbClr val="6B8E00"/>
+              <a:srgbClr val="B98A2E"/>
             </a:solidFill>
             <a:prstDash val="solid"/>
           </a:ln>
@@ -3570,7 +4019,7 @@
       </p:sp>
       <p:sp>
         <p:nvSpPr>
-          <p:cNvPr id="7" name="Shape 5"/>
+          <p:cNvPr id="8" name="Shape 6"/>
           <p:cNvSpPr/>
           <p:nvPr/>
         </p:nvSpPr>
@@ -3585,11 +4034,11 @@
             </a:avLst>
           </a:prstGeom>
           <a:solidFill>
-            <a:srgbClr val="F8FAFC"/>
+            <a:srgbClr val="F7FAFC"/>
           </a:solidFill>
           <a:ln w="6350">
             <a:solidFill>
-              <a:srgbClr val="CBD5E1"/>
+              <a:srgbClr val="CBD5E0"/>
             </a:solidFill>
             <a:prstDash val="solid"/>
           </a:ln>
@@ -3597,7 +4046,7 @@
       </p:sp>
       <p:sp>
         <p:nvSpPr>
-          <p:cNvPr id="8" name="Text 6"/>
+          <p:cNvPr id="9" name="Text 7"/>
           <p:cNvSpPr/>
           <p:nvPr/>
         </p:nvSpPr>
@@ -3622,7 +4071,7 @@
             <a:r>
               <a:rPr lang="en-US" sz="950" dirty="0">
                 <a:solidFill>
-                  <a:srgbClr val="64748B"/>
+                  <a:srgbClr val="718096"/>
                 </a:solidFill>
                 <a:latin typeface="Pretendard" pitchFamily="34" charset="0"/>
                 <a:ea typeface="Pretendard" pitchFamily="34" charset="-122"/>
@@ -3636,7 +4085,7 @@
       </p:sp>
       <p:sp>
         <p:nvSpPr>
-          <p:cNvPr id="9" name="Text 7"/>
+          <p:cNvPr id="10" name="Text 8"/>
           <p:cNvSpPr/>
           <p:nvPr/>
         </p:nvSpPr>
@@ -3663,7 +4112,7 @@
             <a:r>
               <a:rPr lang="en-US" sz="2000" b="1" dirty="0">
                 <a:solidFill>
-                  <a:srgbClr val="0F172A"/>
+                  <a:srgbClr val="10161F"/>
                 </a:solidFill>
                 <a:latin typeface="Pretendard" pitchFamily="34" charset="0"/>
                 <a:ea typeface="Pretendard" pitchFamily="34" charset="-122"/>
@@ -3677,7 +4126,7 @@
       </p:sp>
       <p:sp>
         <p:nvSpPr>
-          <p:cNvPr id="10" name="Shape 8"/>
+          <p:cNvPr id="11" name="Shape 9"/>
           <p:cNvSpPr/>
           <p:nvPr/>
         </p:nvSpPr>
@@ -3692,11 +4141,11 @@
             </a:avLst>
           </a:prstGeom>
           <a:solidFill>
-            <a:srgbClr val="F8FAFC"/>
+            <a:srgbClr val="F7FAFC"/>
           </a:solidFill>
           <a:ln w="6350">
             <a:solidFill>
-              <a:srgbClr val="CBD5E1"/>
+              <a:srgbClr val="CBD5E0"/>
             </a:solidFill>
             <a:prstDash val="solid"/>
           </a:ln>
@@ -3704,7 +4153,7 @@
       </p:sp>
       <p:sp>
         <p:nvSpPr>
-          <p:cNvPr id="11" name="Text 9"/>
+          <p:cNvPr id="12" name="Text 10"/>
           <p:cNvSpPr/>
           <p:nvPr/>
         </p:nvSpPr>
@@ -3729,7 +4178,7 @@
             <a:r>
               <a:rPr lang="en-US" sz="950" dirty="0">
                 <a:solidFill>
-                  <a:srgbClr val="64748B"/>
+                  <a:srgbClr val="718096"/>
                 </a:solidFill>
                 <a:latin typeface="Pretendard" pitchFamily="34" charset="0"/>
                 <a:ea typeface="Pretendard" pitchFamily="34" charset="-122"/>
@@ -3743,7 +4192,7 @@
       </p:sp>
       <p:sp>
         <p:nvSpPr>
-          <p:cNvPr id="12" name="Text 10"/>
+          <p:cNvPr id="13" name="Text 11"/>
           <p:cNvSpPr/>
           <p:nvPr/>
         </p:nvSpPr>
@@ -3770,7 +4219,7 @@
             <a:r>
               <a:rPr lang="en-US" sz="2000" b="1" dirty="0">
                 <a:solidFill>
-                  <a:srgbClr val="0F172A"/>
+                  <a:srgbClr val="10161F"/>
                 </a:solidFill>
                 <a:latin typeface="Pretendard" pitchFamily="34" charset="0"/>
                 <a:ea typeface="Pretendard" pitchFamily="34" charset="-122"/>
@@ -3784,7 +4233,7 @@
       </p:sp>
       <p:sp>
         <p:nvSpPr>
-          <p:cNvPr id="13" name="Shape 11"/>
+          <p:cNvPr id="14" name="Shape 12"/>
           <p:cNvSpPr/>
           <p:nvPr/>
         </p:nvSpPr>
@@ -3799,11 +4248,11 @@
             </a:avLst>
           </a:prstGeom>
           <a:solidFill>
-            <a:srgbClr val="F8FAFC"/>
+            <a:srgbClr val="F7FAFC"/>
           </a:solidFill>
           <a:ln w="6350">
             <a:solidFill>
-              <a:srgbClr val="CBD5E1"/>
+              <a:srgbClr val="CBD5E0"/>
             </a:solidFill>
             <a:prstDash val="solid"/>
           </a:ln>
@@ -3811,7 +4260,7 @@
       </p:sp>
       <p:sp>
         <p:nvSpPr>
-          <p:cNvPr id="14" name="Text 12"/>
+          <p:cNvPr id="15" name="Text 13"/>
           <p:cNvSpPr/>
           <p:nvPr/>
         </p:nvSpPr>
@@ -3836,7 +4285,7 @@
             <a:r>
               <a:rPr lang="en-US" sz="950" dirty="0">
                 <a:solidFill>
-                  <a:srgbClr val="64748B"/>
+                  <a:srgbClr val="718096"/>
                 </a:solidFill>
                 <a:latin typeface="Pretendard" pitchFamily="34" charset="0"/>
                 <a:ea typeface="Pretendard" pitchFamily="34" charset="-122"/>
@@ -3850,7 +4299,7 @@
       </p:sp>
       <p:sp>
         <p:nvSpPr>
-          <p:cNvPr id="15" name="Text 13"/>
+          <p:cNvPr id="16" name="Text 14"/>
           <p:cNvSpPr/>
           <p:nvPr/>
         </p:nvSpPr>
@@ -3877,7 +4326,7 @@
             <a:r>
               <a:rPr lang="en-US" sz="2000" b="1" dirty="0">
                 <a:solidFill>
-                  <a:srgbClr val="0F172A"/>
+                  <a:srgbClr val="10161F"/>
                 </a:solidFill>
                 <a:latin typeface="Pretendard" pitchFamily="34" charset="0"/>
                 <a:ea typeface="Pretendard" pitchFamily="34" charset="-122"/>
@@ -3891,7 +4340,7 @@
       </p:sp>
       <p:sp>
         <p:nvSpPr>
-          <p:cNvPr id="16" name="Shape 14"/>
+          <p:cNvPr id="17" name="Shape 15"/>
           <p:cNvSpPr/>
           <p:nvPr/>
         </p:nvSpPr>
@@ -3906,11 +4355,11 @@
             </a:avLst>
           </a:prstGeom>
           <a:solidFill>
-            <a:srgbClr val="F8FAFC"/>
+            <a:srgbClr val="F7FAFC"/>
           </a:solidFill>
           <a:ln w="6350">
             <a:solidFill>
-              <a:srgbClr val="CBD5E1"/>
+              <a:srgbClr val="CBD5E0"/>
             </a:solidFill>
             <a:prstDash val="solid"/>
           </a:ln>
@@ -3918,7 +4367,7 @@
       </p:sp>
       <p:sp>
         <p:nvSpPr>
-          <p:cNvPr id="17" name="Text 15"/>
+          <p:cNvPr id="18" name="Text 16"/>
           <p:cNvSpPr/>
           <p:nvPr/>
         </p:nvSpPr>
@@ -3943,7 +4392,7 @@
             <a:r>
               <a:rPr lang="en-US" sz="950" dirty="0">
                 <a:solidFill>
-                  <a:srgbClr val="64748B"/>
+                  <a:srgbClr val="718096"/>
                 </a:solidFill>
                 <a:latin typeface="Pretendard" pitchFamily="34" charset="0"/>
                 <a:ea typeface="Pretendard" pitchFamily="34" charset="-122"/>
@@ -3957,7 +4406,7 @@
       </p:sp>
       <p:sp>
         <p:nvSpPr>
-          <p:cNvPr id="18" name="Text 16"/>
+          <p:cNvPr id="19" name="Text 17"/>
           <p:cNvSpPr/>
           <p:nvPr/>
         </p:nvSpPr>
@@ -3984,7 +4433,7 @@
             <a:r>
               <a:rPr lang="en-US" sz="2000" b="1" dirty="0">
                 <a:solidFill>
-                  <a:srgbClr val="0F172A"/>
+                  <a:srgbClr val="10161F"/>
                 </a:solidFill>
                 <a:latin typeface="Pretendard" pitchFamily="34" charset="0"/>
                 <a:ea typeface="Pretendard" pitchFamily="34" charset="-122"/>
@@ -3998,65 +4447,516 @@
       </p:sp>
       <p:sp>
         <p:nvSpPr>
-          <p:cNvPr id="19" name="Text 17"/>
-          <p:cNvSpPr/>
-          <p:nvPr/>
-        </p:nvSpPr>
-        <p:spPr>
-          <a:xfrm>
-            <a:off x="566928" y="6419088"/>
-            <a:ext cx="11057839" cy="201168"/>
-          </a:xfrm>
-          <a:prstGeom prst="rect">
-            <a:avLst/>
-          </a:prstGeom>
-          <a:noFill/>
-          <a:ln/>
-        </p:spPr>
-        <p:txBody>
-          <a:bodyPr wrap="square" lIns="0" tIns="0" rIns="0" bIns="0" rtlCol="0" anchor="ctr"/>
-          <a:lstStyle/>
-          <a:p>
-            <a:pPr algn="ctr" indent="0" marL="0">
-              <a:buNone/>
-            </a:pPr>
-            <a:r>
-              <a:rPr lang="en-US" sz="750" dirty="0">
-                <a:solidFill>
-                  <a:srgbClr val="64748B"/>
+          <p:cNvPr id="20" name="Text 18"/>
+          <p:cNvSpPr/>
+          <p:nvPr/>
+        </p:nvSpPr>
+        <p:spPr>
+          <a:xfrm>
+            <a:off x="566928" y="3502152"/>
+            <a:ext cx="11057839" cy="274320"/>
+          </a:xfrm>
+          <a:prstGeom prst="rect">
+            <a:avLst/>
+          </a:prstGeom>
+          <a:noFill/>
+          <a:ln/>
+        </p:spPr>
+        <p:txBody>
+          <a:bodyPr wrap="square" lIns="0" tIns="0" rIns="0" bIns="0" rtlCol="0" anchor="ctr"/>
+          <a:lstStyle/>
+          <a:p>
+            <a:pPr indent="0" marL="0">
+              <a:buNone/>
+            </a:pPr>
+            <a:r>
+              <a:rPr lang="en-US" sz="1250" b="1" dirty="0">
+                <a:solidFill>
+                  <a:srgbClr val="977024"/>
                 </a:solidFill>
                 <a:latin typeface="Pretendard" pitchFamily="34" charset="0"/>
                 <a:ea typeface="Pretendard" pitchFamily="34" charset="-122"/>
                 <a:cs typeface="Pretendard" pitchFamily="34" charset="-120"/>
               </a:rPr>
-              <a:t>크리딜  ·    ·  2</a:t>
-            </a:r>
-            <a:endParaRPr lang="en-US" sz="750" dirty="0"/>
-          </a:p>
-        </p:txBody>
-      </p:sp>
-      <p:sp>
-        <p:nvSpPr>
-          <p:cNvPr id="20" name="Shape 18"/>
-          <p:cNvSpPr/>
-          <p:nvPr/>
-        </p:nvSpPr>
-        <p:spPr>
-          <a:xfrm>
-            <a:off x="4437172" y="6382512"/>
-            <a:ext cx="3317352" cy="0"/>
-          </a:xfrm>
-          <a:prstGeom prst="line">
-            <a:avLst/>
-          </a:prstGeom>
-          <a:noFill/>
-          <a:ln w="6350">
+              <a:t>3대 핵심 투자 포인트 (Investment Highlights)</a:t>
+            </a:r>
+            <a:endParaRPr lang="en-US" sz="1250" dirty="0"/>
+          </a:p>
+        </p:txBody>
+      </p:sp>
+      <p:sp>
+        <p:nvSpPr>
+          <p:cNvPr id="21" name="Shape 19"/>
+          <p:cNvSpPr/>
+          <p:nvPr/>
+        </p:nvSpPr>
+        <p:spPr>
+          <a:xfrm>
+            <a:off x="566928" y="3831336"/>
+            <a:ext cx="11057839" cy="585216"/>
+          </a:xfrm>
+          <a:prstGeom prst="roundRect">
+            <a:avLst>
+              <a:gd name="adj" fmla="val 7813"/>
+            </a:avLst>
+          </a:prstGeom>
+          <a:solidFill>
+            <a:srgbClr val="F8F9FA"/>
+          </a:solidFill>
+          <a:ln w="7620">
             <a:solidFill>
-              <a:srgbClr val="6B8E00"/>
+              <a:srgbClr val="E2E8F0"/>
             </a:solidFill>
             <a:prstDash val="solid"/>
           </a:ln>
         </p:spPr>
+      </p:sp>
+      <p:sp>
+        <p:nvSpPr>
+          <p:cNvPr id="22" name="Shape 20"/>
+          <p:cNvSpPr/>
+          <p:nvPr/>
+        </p:nvSpPr>
+        <p:spPr>
+          <a:xfrm>
+            <a:off x="676656" y="3941064"/>
+            <a:ext cx="411480" cy="365760"/>
+          </a:xfrm>
+          <a:prstGeom prst="roundRect">
+            <a:avLst>
+              <a:gd name="adj" fmla="val 10000"/>
+            </a:avLst>
+          </a:prstGeom>
+          <a:solidFill>
+            <a:srgbClr val="F3EBDA"/>
+          </a:solidFill>
+          <a:ln w="6350">
+            <a:solidFill>
+              <a:srgbClr val="D9B668"/>
+            </a:solidFill>
+            <a:prstDash val="solid"/>
+          </a:ln>
+        </p:spPr>
+      </p:sp>
+      <p:sp>
+        <p:nvSpPr>
+          <p:cNvPr id="23" name="Text 21"/>
+          <p:cNvSpPr/>
+          <p:nvPr/>
+        </p:nvSpPr>
+        <p:spPr>
+          <a:xfrm>
+            <a:off x="676656" y="3941064"/>
+            <a:ext cx="411480" cy="365760"/>
+          </a:xfrm>
+          <a:prstGeom prst="rect">
+            <a:avLst/>
+          </a:prstGeom>
+          <a:noFill/>
+          <a:ln/>
+        </p:spPr>
+        <p:txBody>
+          <a:bodyPr wrap="square" lIns="0" tIns="0" rIns="0" bIns="0" rtlCol="0" anchor="ctr"/>
+          <a:lstStyle/>
+          <a:p>
+            <a:pPr algn="ctr" indent="0" marL="0">
+              <a:buNone/>
+            </a:pPr>
+            <a:r>
+              <a:rPr lang="en-US" sz="1000" b="1" dirty="0">
+                <a:solidFill>
+                  <a:srgbClr val="977024"/>
+                </a:solidFill>
+                <a:latin typeface="Arial" pitchFamily="34" charset="0"/>
+                <a:ea typeface="Arial" pitchFamily="34" charset="-122"/>
+                <a:cs typeface="Arial" pitchFamily="34" charset="-120"/>
+              </a:rPr>
+              <a:t>01</a:t>
+            </a:r>
+            <a:endParaRPr lang="en-US" sz="1000" dirty="0"/>
+          </a:p>
+        </p:txBody>
+      </p:sp>
+      <p:sp>
+        <p:nvSpPr>
+          <p:cNvPr id="24" name="Text 22"/>
+          <p:cNvSpPr/>
+          <p:nvPr/>
+        </p:nvSpPr>
+        <p:spPr>
+          <a:xfrm>
+            <a:off x="1207008" y="3904488"/>
+            <a:ext cx="10280599" cy="438912"/>
+          </a:xfrm>
+          <a:prstGeom prst="rect">
+            <a:avLst/>
+          </a:prstGeom>
+          <a:noFill/>
+          <a:ln/>
+        </p:spPr>
+        <p:txBody>
+          <a:bodyPr wrap="square" lIns="0" tIns="0" rIns="0" bIns="0" rtlCol="0" anchor="ctr"/>
+          <a:lstStyle/>
+          <a:p>
+            <a:pPr indent="0" marL="0">
+              <a:buNone/>
+            </a:pPr>
+            <a:r>
+              <a:rPr lang="en-US" sz="1150" dirty="0">
+                <a:solidFill>
+                  <a:srgbClr val="10161F"/>
+                </a:solidFill>
+                <a:latin typeface="Pretendard" pitchFamily="34" charset="0"/>
+                <a:ea typeface="Pretendard" pitchFamily="34" charset="-122"/>
+                <a:cs typeface="Pretendard" pitchFamily="34" charset="-120"/>
+              </a:rPr>
+              <a:t>원금 안전판: 핵심권역 핵심 입지 및 우량 대지 지분 가치로 하방 경직성 확보</a:t>
+            </a:r>
+            <a:endParaRPr lang="en-US" sz="1150" dirty="0"/>
+          </a:p>
+        </p:txBody>
+      </p:sp>
+      <p:sp>
+        <p:nvSpPr>
+          <p:cNvPr id="25" name="Shape 23"/>
+          <p:cNvSpPr/>
+          <p:nvPr/>
+        </p:nvSpPr>
+        <p:spPr>
+          <a:xfrm>
+            <a:off x="566928" y="4526280"/>
+            <a:ext cx="11057839" cy="585216"/>
+          </a:xfrm>
+          <a:prstGeom prst="roundRect">
+            <a:avLst>
+              <a:gd name="adj" fmla="val 7813"/>
+            </a:avLst>
+          </a:prstGeom>
+          <a:solidFill>
+            <a:srgbClr val="F8F9FA"/>
+          </a:solidFill>
+          <a:ln w="7620">
+            <a:solidFill>
+              <a:srgbClr val="E2E8F0"/>
+            </a:solidFill>
+            <a:prstDash val="solid"/>
+          </a:ln>
+        </p:spPr>
+      </p:sp>
+      <p:sp>
+        <p:nvSpPr>
+          <p:cNvPr id="26" name="Shape 24"/>
+          <p:cNvSpPr/>
+          <p:nvPr/>
+        </p:nvSpPr>
+        <p:spPr>
+          <a:xfrm>
+            <a:off x="676656" y="4636008"/>
+            <a:ext cx="411480" cy="365760"/>
+          </a:xfrm>
+          <a:prstGeom prst="roundRect">
+            <a:avLst>
+              <a:gd name="adj" fmla="val 10000"/>
+            </a:avLst>
+          </a:prstGeom>
+          <a:solidFill>
+            <a:srgbClr val="F3EBDA"/>
+          </a:solidFill>
+          <a:ln w="6350">
+            <a:solidFill>
+              <a:srgbClr val="D9B668"/>
+            </a:solidFill>
+            <a:prstDash val="solid"/>
+          </a:ln>
+        </p:spPr>
+      </p:sp>
+      <p:sp>
+        <p:nvSpPr>
+          <p:cNvPr id="27" name="Text 25"/>
+          <p:cNvSpPr/>
+          <p:nvPr/>
+        </p:nvSpPr>
+        <p:spPr>
+          <a:xfrm>
+            <a:off x="676656" y="4636008"/>
+            <a:ext cx="411480" cy="365760"/>
+          </a:xfrm>
+          <a:prstGeom prst="rect">
+            <a:avLst/>
+          </a:prstGeom>
+          <a:noFill/>
+          <a:ln/>
+        </p:spPr>
+        <p:txBody>
+          <a:bodyPr wrap="square" lIns="0" tIns="0" rIns="0" bIns="0" rtlCol="0" anchor="ctr"/>
+          <a:lstStyle/>
+          <a:p>
+            <a:pPr algn="ctr" indent="0" marL="0">
+              <a:buNone/>
+            </a:pPr>
+            <a:r>
+              <a:rPr lang="en-US" sz="1000" b="1" dirty="0">
+                <a:solidFill>
+                  <a:srgbClr val="977024"/>
+                </a:solidFill>
+                <a:latin typeface="Arial" pitchFamily="34" charset="0"/>
+                <a:ea typeface="Arial" pitchFamily="34" charset="-122"/>
+                <a:cs typeface="Arial" pitchFamily="34" charset="-120"/>
+              </a:rPr>
+              <a:t>02</a:t>
+            </a:r>
+            <a:endParaRPr lang="en-US" sz="1000" dirty="0"/>
+          </a:p>
+        </p:txBody>
+      </p:sp>
+      <p:sp>
+        <p:nvSpPr>
+          <p:cNvPr id="28" name="Text 26"/>
+          <p:cNvSpPr/>
+          <p:nvPr/>
+        </p:nvSpPr>
+        <p:spPr>
+          <a:xfrm>
+            <a:off x="1207008" y="4599432"/>
+            <a:ext cx="10280599" cy="438912"/>
+          </a:xfrm>
+          <a:prstGeom prst="rect">
+            <a:avLst/>
+          </a:prstGeom>
+          <a:noFill/>
+          <a:ln/>
+        </p:spPr>
+        <p:txBody>
+          <a:bodyPr wrap="square" lIns="0" tIns="0" rIns="0" bIns="0" rtlCol="0" anchor="ctr"/>
+          <a:lstStyle/>
+          <a:p>
+            <a:pPr indent="0" marL="0">
+              <a:buNone/>
+            </a:pPr>
+            <a:r>
+              <a:rPr lang="en-US" sz="1150" dirty="0">
+                <a:solidFill>
+                  <a:srgbClr val="10161F"/>
+                </a:solidFill>
+                <a:latin typeface="Pretendard" pitchFamily="34" charset="0"/>
+                <a:ea typeface="Pretendard" pitchFamily="34" charset="-122"/>
+                <a:cs typeface="Pretendard" pitchFamily="34" charset="-120"/>
+              </a:rPr>
+              <a:t>수익 안정성: 매매 시장 적정가 수준 대비 안정적 월 임대수익 창출 기반</a:t>
+            </a:r>
+            <a:endParaRPr lang="en-US" sz="1150" dirty="0"/>
+          </a:p>
+        </p:txBody>
+      </p:sp>
+      <p:sp>
+        <p:nvSpPr>
+          <p:cNvPr id="29" name="Shape 27"/>
+          <p:cNvSpPr/>
+          <p:nvPr/>
+        </p:nvSpPr>
+        <p:spPr>
+          <a:xfrm>
+            <a:off x="566928" y="5221224"/>
+            <a:ext cx="11057839" cy="585216"/>
+          </a:xfrm>
+          <a:prstGeom prst="roundRect">
+            <a:avLst>
+              <a:gd name="adj" fmla="val 7813"/>
+            </a:avLst>
+          </a:prstGeom>
+          <a:solidFill>
+            <a:srgbClr val="F8F9FA"/>
+          </a:solidFill>
+          <a:ln w="7620">
+            <a:solidFill>
+              <a:srgbClr val="E2E8F0"/>
+            </a:solidFill>
+            <a:prstDash val="solid"/>
+          </a:ln>
+        </p:spPr>
+      </p:sp>
+      <p:sp>
+        <p:nvSpPr>
+          <p:cNvPr id="30" name="Shape 28"/>
+          <p:cNvSpPr/>
+          <p:nvPr/>
+        </p:nvSpPr>
+        <p:spPr>
+          <a:xfrm>
+            <a:off x="676656" y="5330952"/>
+            <a:ext cx="411480" cy="365760"/>
+          </a:xfrm>
+          <a:prstGeom prst="roundRect">
+            <a:avLst>
+              <a:gd name="adj" fmla="val 10000"/>
+            </a:avLst>
+          </a:prstGeom>
+          <a:solidFill>
+            <a:srgbClr val="F3EBDA"/>
+          </a:solidFill>
+          <a:ln w="6350">
+            <a:solidFill>
+              <a:srgbClr val="D9B668"/>
+            </a:solidFill>
+            <a:prstDash val="solid"/>
+          </a:ln>
+        </p:spPr>
+      </p:sp>
+      <p:sp>
+        <p:nvSpPr>
+          <p:cNvPr id="31" name="Text 29"/>
+          <p:cNvSpPr/>
+          <p:nvPr/>
+        </p:nvSpPr>
+        <p:spPr>
+          <a:xfrm>
+            <a:off x="676656" y="5330952"/>
+            <a:ext cx="411480" cy="365760"/>
+          </a:xfrm>
+          <a:prstGeom prst="rect">
+            <a:avLst/>
+          </a:prstGeom>
+          <a:noFill/>
+          <a:ln/>
+        </p:spPr>
+        <p:txBody>
+          <a:bodyPr wrap="square" lIns="0" tIns="0" rIns="0" bIns="0" rtlCol="0" anchor="ctr"/>
+          <a:lstStyle/>
+          <a:p>
+            <a:pPr algn="ctr" indent="0" marL="0">
+              <a:buNone/>
+            </a:pPr>
+            <a:r>
+              <a:rPr lang="en-US" sz="1000" b="1" dirty="0">
+                <a:solidFill>
+                  <a:srgbClr val="977024"/>
+                </a:solidFill>
+                <a:latin typeface="Arial" pitchFamily="34" charset="0"/>
+                <a:ea typeface="Arial" pitchFamily="34" charset="-122"/>
+                <a:cs typeface="Arial" pitchFamily="34" charset="-120"/>
+              </a:rPr>
+              <a:t>03</a:t>
+            </a:r>
+            <a:endParaRPr lang="en-US" sz="1000" dirty="0"/>
+          </a:p>
+        </p:txBody>
+      </p:sp>
+      <p:sp>
+        <p:nvSpPr>
+          <p:cNvPr id="32" name="Text 30"/>
+          <p:cNvSpPr/>
+          <p:nvPr/>
+        </p:nvSpPr>
+        <p:spPr>
+          <a:xfrm>
+            <a:off x="1207008" y="5294376"/>
+            <a:ext cx="10280599" cy="438912"/>
+          </a:xfrm>
+          <a:prstGeom prst="rect">
+            <a:avLst/>
+          </a:prstGeom>
+          <a:noFill/>
+          <a:ln/>
+        </p:spPr>
+        <p:txBody>
+          <a:bodyPr wrap="square" lIns="0" tIns="0" rIns="0" bIns="0" rtlCol="0" anchor="ctr"/>
+          <a:lstStyle/>
+          <a:p>
+            <a:pPr indent="0" marL="0">
+              <a:buNone/>
+            </a:pPr>
+            <a:r>
+              <a:rPr lang="en-US" sz="1150" dirty="0">
+                <a:solidFill>
+                  <a:srgbClr val="10161F"/>
+                </a:solidFill>
+                <a:latin typeface="Pretendard" pitchFamily="34" charset="0"/>
+                <a:ea typeface="Pretendard" pitchFamily="34" charset="-122"/>
+                <a:cs typeface="Pretendard" pitchFamily="34" charset="-120"/>
+              </a:rPr>
+              <a:t>미래 가치: 향후 권역 지가 상승 및 공법상 밸류업을 통한 자본이득 실현 가능</a:t>
+            </a:r>
+            <a:endParaRPr lang="en-US" sz="1150" dirty="0"/>
+          </a:p>
+        </p:txBody>
+      </p:sp>
+      <p:sp>
+        <p:nvSpPr>
+          <p:cNvPr id="33" name="Text 31"/>
+          <p:cNvSpPr/>
+          <p:nvPr/>
+        </p:nvSpPr>
+        <p:spPr>
+          <a:xfrm>
+            <a:off x="566928" y="6382512"/>
+            <a:ext cx="7315200" cy="219456"/>
+          </a:xfrm>
+          <a:prstGeom prst="rect">
+            <a:avLst/>
+          </a:prstGeom>
+          <a:noFill/>
+          <a:ln/>
+        </p:spPr>
+        <p:txBody>
+          <a:bodyPr wrap="square" lIns="0" tIns="0" rIns="0" bIns="0" rtlCol="0" anchor="ctr"/>
+          <a:lstStyle/>
+          <a:p>
+            <a:pPr indent="0" marL="0">
+              <a:buNone/>
+            </a:pPr>
+            <a:r>
+              <a:rPr lang="en-US" sz="800" dirty="0">
+                <a:solidFill>
+                  <a:srgbClr val="718096"/>
+                </a:solidFill>
+                <a:latin typeface="Pretendard" pitchFamily="34" charset="0"/>
+                <a:ea typeface="Pretendard" pitchFamily="34" charset="-122"/>
+                <a:cs typeface="Pretendard" pitchFamily="34" charset="-120"/>
+              </a:rPr>
+              <a:t>크리딜   |   </a:t>
+            </a:r>
+            <a:endParaRPr lang="en-US" sz="800" dirty="0"/>
+          </a:p>
+        </p:txBody>
+      </p:sp>
+      <p:sp>
+        <p:nvSpPr>
+          <p:cNvPr id="34" name="Text 32"/>
+          <p:cNvSpPr/>
+          <p:nvPr/>
+        </p:nvSpPr>
+        <p:spPr>
+          <a:xfrm>
+            <a:off x="10710367" y="6382512"/>
+            <a:ext cx="914400" cy="219456"/>
+          </a:xfrm>
+          <a:prstGeom prst="rect">
+            <a:avLst/>
+          </a:prstGeom>
+          <a:noFill/>
+          <a:ln/>
+        </p:spPr>
+        <p:txBody>
+          <a:bodyPr wrap="square" lIns="0" tIns="0" rIns="0" bIns="0" rtlCol="0" anchor="ctr"/>
+          <a:lstStyle/>
+          <a:p>
+            <a:pPr algn="r" indent="0" marL="0">
+              <a:buNone/>
+            </a:pPr>
+            <a:r>
+              <a:rPr lang="en-US" sz="900" b="1" dirty="0">
+                <a:solidFill>
+                  <a:srgbClr val="B98A2E"/>
+                </a:solidFill>
+                <a:latin typeface="Arial" pitchFamily="34" charset="0"/>
+                <a:ea typeface="Arial" pitchFamily="34" charset="-122"/>
+                <a:cs typeface="Arial" pitchFamily="34" charset="-120"/>
+              </a:rPr>
+              <a:t>2</a:t>
+            </a:r>
+            <a:endParaRPr lang="en-US" sz="900" dirty="0"/>
+          </a:p>
+        </p:txBody>
       </p:sp>
     </p:spTree>
   </p:cSld>
@@ -4098,14 +4998,14 @@
         </p:nvSpPr>
         <p:spPr>
           <a:xfrm>
-            <a:off x="566928" y="384048"/>
-            <a:ext cx="45720" cy="566928"/>
-          </a:xfrm>
-          <a:prstGeom prst="rect">
+            <a:off x="566928" y="457200"/>
+            <a:ext cx="384048" cy="384048"/>
+          </a:xfrm>
+          <a:prstGeom prst="ellipse">
             <a:avLst/>
           </a:prstGeom>
           <a:solidFill>
-            <a:srgbClr val="6B8E00"/>
+            <a:srgbClr val="B98A2E"/>
           </a:solidFill>
           <a:ln/>
         </p:spPr>
@@ -4118,32 +5018,71 @@
         </p:nvSpPr>
         <p:spPr>
           <a:xfrm>
-            <a:off x="749808" y="384048"/>
-            <a:ext cx="10874959" cy="182880"/>
-          </a:xfrm>
-          <a:prstGeom prst="rect">
-            <a:avLst/>
-          </a:prstGeom>
-          <a:noFill/>
-          <a:ln/>
-        </p:spPr>
-        <p:txBody>
-          <a:bodyPr wrap="square" lIns="0" tIns="0" rIns="0" bIns="0" rtlCol="0" anchor="ctr"/>
-          <a:lstStyle/>
-          <a:p>
-            <a:pPr indent="0" marL="0">
-              <a:buNone/>
-            </a:pPr>
-            <a:r>
-              <a:rPr lang="en-US" sz="950" b="1" spc="200" kern="0" dirty="0">
-                <a:solidFill>
-                  <a:srgbClr val="6B8E00"/>
+            <a:off x="566928" y="457200"/>
+            <a:ext cx="384048" cy="384048"/>
+          </a:xfrm>
+          <a:prstGeom prst="rect">
+            <a:avLst/>
+          </a:prstGeom>
+          <a:noFill/>
+          <a:ln/>
+        </p:spPr>
+        <p:txBody>
+          <a:bodyPr wrap="square" lIns="0" tIns="0" rIns="0" bIns="0" rtlCol="0" anchor="ctr"/>
+          <a:lstStyle/>
+          <a:p>
+            <a:pPr algn="ctr" indent="0" marL="0">
+              <a:buNone/>
+            </a:pPr>
+            <a:r>
+              <a:rPr lang="en-US" sz="1300" b="1" dirty="0">
+                <a:solidFill>
+                  <a:srgbClr val="FFFFFF"/>
                 </a:solidFill>
                 <a:latin typeface="Arial" pitchFamily="34" charset="0"/>
                 <a:ea typeface="Arial" pitchFamily="34" charset="-122"/>
                 <a:cs typeface="Arial" pitchFamily="34" charset="-120"/>
               </a:rPr>
-              <a:t>03  Location</a:t>
+              <a:t>03</a:t>
+            </a:r>
+            <a:endParaRPr lang="en-US" sz="1300" dirty="0"/>
+          </a:p>
+        </p:txBody>
+      </p:sp>
+      <p:sp>
+        <p:nvSpPr>
+          <p:cNvPr id="4" name="Text 2"/>
+          <p:cNvSpPr/>
+          <p:nvPr/>
+        </p:nvSpPr>
+        <p:spPr>
+          <a:xfrm>
+            <a:off x="1133856" y="457200"/>
+            <a:ext cx="10490911" cy="182880"/>
+          </a:xfrm>
+          <a:prstGeom prst="rect">
+            <a:avLst/>
+          </a:prstGeom>
+          <a:noFill/>
+          <a:ln/>
+        </p:spPr>
+        <p:txBody>
+          <a:bodyPr wrap="square" lIns="0" tIns="0" rIns="0" bIns="0" rtlCol="0" anchor="ctr"/>
+          <a:lstStyle/>
+          <a:p>
+            <a:pPr indent="0" marL="0">
+              <a:buNone/>
+            </a:pPr>
+            <a:r>
+              <a:rPr lang="en-US" sz="950" b="1" spc="200" kern="0" dirty="0">
+                <a:solidFill>
+                  <a:srgbClr val="B98A2E"/>
+                </a:solidFill>
+                <a:latin typeface="Arial" pitchFamily="34" charset="0"/>
+                <a:ea typeface="Arial" pitchFamily="34" charset="-122"/>
+                <a:cs typeface="Arial" pitchFamily="34" charset="-120"/>
+              </a:rPr>
+              <a:t>Location</a:t>
             </a:r>
             <a:endParaRPr lang="en-US" sz="950" dirty="0"/>
           </a:p>
@@ -4151,14 +5090,14 @@
       </p:sp>
       <p:sp>
         <p:nvSpPr>
-          <p:cNvPr id="4" name="Text 2"/>
-          <p:cNvSpPr/>
-          <p:nvPr/>
-        </p:nvSpPr>
-        <p:spPr>
-          <a:xfrm>
-            <a:off x="749808" y="566928"/>
-            <a:ext cx="10874959" cy="384048"/>
+          <p:cNvPr id="5" name="Text 3"/>
+          <p:cNvSpPr/>
+          <p:nvPr/>
+        </p:nvSpPr>
+        <p:spPr>
+          <a:xfrm>
+            <a:off x="1133856" y="640080"/>
+            <a:ext cx="10490911" cy="365760"/>
           </a:xfrm>
           <a:prstGeom prst="rect">
             <a:avLst/>
@@ -4174,9 +5113,9 @@
               <a:buNone/>
             </a:pPr>
             <a:r>
-              <a:rPr lang="en-US" sz="2200" b="1" dirty="0">
-                <a:solidFill>
-                  <a:srgbClr val="0F172A"/>
+              <a:rPr lang="en-US" sz="2300" b="1" dirty="0">
+                <a:solidFill>
+                  <a:srgbClr val="10161F"/>
                 </a:solidFill>
                 <a:latin typeface="Pretendard" pitchFamily="34" charset="0"/>
                 <a:ea typeface="Pretendard" pitchFamily="34" charset="-122"/>
@@ -4184,13 +5123,13 @@
               </a:rPr>
               <a:t>입지 및 교통</a:t>
             </a:r>
-            <a:endParaRPr lang="en-US" sz="2200" dirty="0"/>
+            <a:endParaRPr lang="en-US" sz="2300" dirty="0"/>
           </a:p>
         </p:txBody>
       </p:sp>
       <p:pic>
         <p:nvPicPr>
-          <p:cNvPr id="5" name="Image 0" descr="preencoded.png">    </p:cNvPr>
+          <p:cNvPr id="6" name="Image 0" descr="preencoded.png">    </p:cNvPr>
           <p:cNvPicPr>
             <a:picLocks noChangeAspect="1"/>
           </p:cNvPicPr>
@@ -4214,14 +5153,14 @@
       </p:pic>
       <p:sp>
         <p:nvSpPr>
-          <p:cNvPr id="6" name="Text 3"/>
+          <p:cNvPr id="7" name="Text 4"/>
           <p:cNvSpPr/>
           <p:nvPr/>
         </p:nvSpPr>
         <p:spPr>
           <a:xfrm>
             <a:off x="6053328" y="1481328"/>
-            <a:ext cx="2117147" cy="438912"/>
+            <a:ext cx="2117147" cy="493776"/>
           </a:xfrm>
           <a:prstGeom prst="rect">
             <a:avLst/>
@@ -4240,9 +5179,9 @@
               <a:buNone/>
             </a:pPr>
             <a:r>
-              <a:rPr lang="en-US" sz="1400" dirty="0">
-                <a:solidFill>
-                  <a:srgbClr val="64748B"/>
+              <a:rPr lang="en-US" sz="1300" dirty="0">
+                <a:solidFill>
+                  <a:srgbClr val="718096"/>
                 </a:solidFill>
                 <a:latin typeface="Pretendard" pitchFamily="34" charset="0"/>
                 <a:ea typeface="Pretendard" pitchFamily="34" charset="-122"/>
@@ -4250,20 +5189,20 @@
               </a:rPr>
               <a:t>교통 접근성</a:t>
             </a:r>
-            <a:endParaRPr lang="en-US" sz="1400" dirty="0"/>
-          </a:p>
-        </p:txBody>
-      </p:sp>
-      <p:sp>
-        <p:nvSpPr>
-          <p:cNvPr id="7" name="Text 4"/>
+            <a:endParaRPr lang="en-US" sz="1300" dirty="0"/>
+          </a:p>
+        </p:txBody>
+      </p:sp>
+      <p:sp>
+        <p:nvSpPr>
+          <p:cNvPr id="8" name="Text 5"/>
           <p:cNvSpPr/>
           <p:nvPr/>
         </p:nvSpPr>
         <p:spPr>
           <a:xfrm>
             <a:off x="8170475" y="1481328"/>
-            <a:ext cx="3454292" cy="438912"/>
+            <a:ext cx="3454292" cy="493776"/>
           </a:xfrm>
           <a:prstGeom prst="rect">
             <a:avLst/>
@@ -4282,9 +5221,9 @@
               <a:buNone/>
             </a:pPr>
             <a:r>
-              <a:rPr lang="en-US" sz="1400" b="1" dirty="0">
-                <a:solidFill>
-                  <a:srgbClr val="0F172A"/>
+              <a:rPr lang="en-US" sz="1300" b="1" dirty="0">
+                <a:solidFill>
+                  <a:srgbClr val="10161F"/>
                 </a:solidFill>
                 <a:latin typeface="Pretendard" pitchFamily="34" charset="0"/>
                 <a:ea typeface="Pretendard" pitchFamily="34" charset="-122"/>
@@ -4292,75 +5231,91 @@
               </a:rPr>
               <a:t>강남역·양재역 더블역세권 도보 4분 거리에 위치합니다.</a:t>
             </a:r>
-            <a:endParaRPr lang="en-US" sz="1400" dirty="0"/>
-          </a:p>
-        </p:txBody>
-      </p:sp>
-      <p:sp>
-        <p:nvSpPr>
-          <p:cNvPr id="8" name="Text 5"/>
-          <p:cNvSpPr/>
-          <p:nvPr/>
-        </p:nvSpPr>
-        <p:spPr>
-          <a:xfrm>
-            <a:off x="566928" y="6419088"/>
-            <a:ext cx="11057839" cy="201168"/>
-          </a:xfrm>
-          <a:prstGeom prst="rect">
-            <a:avLst/>
-          </a:prstGeom>
-          <a:noFill/>
-          <a:ln/>
-        </p:spPr>
-        <p:txBody>
-          <a:bodyPr wrap="square" lIns="0" tIns="0" rIns="0" bIns="0" rtlCol="0" anchor="ctr"/>
-          <a:lstStyle/>
-          <a:p>
-            <a:pPr algn="ctr" indent="0" marL="0">
-              <a:buNone/>
-            </a:pPr>
-            <a:r>
-              <a:rPr lang="en-US" sz="750" dirty="0">
-                <a:solidFill>
-                  <a:srgbClr val="64748B"/>
+            <a:endParaRPr lang="en-US" sz="1300" dirty="0"/>
+          </a:p>
+        </p:txBody>
+      </p:sp>
+      <p:sp>
+        <p:nvSpPr>
+          <p:cNvPr id="9" name="Text 6"/>
+          <p:cNvSpPr/>
+          <p:nvPr/>
+        </p:nvSpPr>
+        <p:spPr>
+          <a:xfrm>
+            <a:off x="566928" y="6382512"/>
+            <a:ext cx="7315200" cy="219456"/>
+          </a:xfrm>
+          <a:prstGeom prst="rect">
+            <a:avLst/>
+          </a:prstGeom>
+          <a:noFill/>
+          <a:ln/>
+        </p:spPr>
+        <p:txBody>
+          <a:bodyPr wrap="square" lIns="0" tIns="0" rIns="0" bIns="0" rtlCol="0" anchor="ctr"/>
+          <a:lstStyle/>
+          <a:p>
+            <a:pPr indent="0" marL="0">
+              <a:buNone/>
+            </a:pPr>
+            <a:r>
+              <a:rPr lang="en-US" sz="800" dirty="0">
+                <a:solidFill>
+                  <a:srgbClr val="718096"/>
                 </a:solidFill>
                 <a:latin typeface="Pretendard" pitchFamily="34" charset="0"/>
                 <a:ea typeface="Pretendard" pitchFamily="34" charset="-122"/>
                 <a:cs typeface="Pretendard" pitchFamily="34" charset="-120"/>
               </a:rPr>
-              <a:t>크리딜  ·    ·  3</a:t>
-            </a:r>
-            <a:endParaRPr lang="en-US" sz="750" dirty="0"/>
-          </a:p>
-        </p:txBody>
-      </p:sp>
-      <p:sp>
-        <p:nvSpPr>
-          <p:cNvPr id="9" name="Shape 6"/>
-          <p:cNvSpPr/>
-          <p:nvPr/>
-        </p:nvSpPr>
-        <p:spPr>
-          <a:xfrm>
-            <a:off x="4437172" y="6382512"/>
-            <a:ext cx="3317352" cy="0"/>
-          </a:xfrm>
-          <a:prstGeom prst="line">
-            <a:avLst/>
-          </a:prstGeom>
-          <a:noFill/>
-          <a:ln w="6350">
-            <a:solidFill>
-              <a:srgbClr val="6B8E00"/>
-            </a:solidFill>
-            <a:prstDash val="solid"/>
-          </a:ln>
-        </p:spPr>
+              <a:t>크리딜   |   </a:t>
+            </a:r>
+            <a:endParaRPr lang="en-US" sz="800" dirty="0"/>
+          </a:p>
+        </p:txBody>
       </p:sp>
       <p:sp>
         <p:nvSpPr>
           <p:cNvPr id="10" name="Text 7"/>
+          <p:cNvSpPr/>
+          <p:nvPr/>
+        </p:nvSpPr>
+        <p:spPr>
+          <a:xfrm>
+            <a:off x="10710367" y="6382512"/>
+            <a:ext cx="914400" cy="219456"/>
+          </a:xfrm>
+          <a:prstGeom prst="rect">
+            <a:avLst/>
+          </a:prstGeom>
+          <a:noFill/>
+          <a:ln/>
+        </p:spPr>
+        <p:txBody>
+          <a:bodyPr wrap="square" lIns="0" tIns="0" rIns="0" bIns="0" rtlCol="0" anchor="ctr"/>
+          <a:lstStyle/>
+          <a:p>
+            <a:pPr algn="r" indent="0" marL="0">
+              <a:buNone/>
+            </a:pPr>
+            <a:r>
+              <a:rPr lang="en-US" sz="900" b="1" dirty="0">
+                <a:solidFill>
+                  <a:srgbClr val="B98A2E"/>
+                </a:solidFill>
+                <a:latin typeface="Arial" pitchFamily="34" charset="0"/>
+                <a:ea typeface="Arial" pitchFamily="34" charset="-122"/>
+                <a:cs typeface="Arial" pitchFamily="34" charset="-120"/>
+              </a:rPr>
+              <a:t>3</a:t>
+            </a:r>
+            <a:endParaRPr lang="en-US" sz="900" dirty="0"/>
+          </a:p>
+        </p:txBody>
+      </p:sp>
+      <p:sp>
+        <p:nvSpPr>
+          <p:cNvPr id="11" name="Text 8"/>
           <p:cNvSpPr/>
           <p:nvPr/>
         </p:nvSpPr>
@@ -4385,7 +5340,7 @@
             <a:r>
               <a:rPr lang="en-US" sz="1000" dirty="0">
                 <a:solidFill>
-                  <a:srgbClr val="0F172A"/>
+                  <a:srgbClr val="10161F"/>
                 </a:solidFill>
                 <a:latin typeface="Pretendard" pitchFamily="34" charset="0"/>
                 <a:ea typeface="Pretendard" pitchFamily="34" charset="-122"/>
@@ -4437,14 +5392,14 @@
         </p:nvSpPr>
         <p:spPr>
           <a:xfrm>
-            <a:off x="566928" y="384048"/>
-            <a:ext cx="45720" cy="566928"/>
-          </a:xfrm>
-          <a:prstGeom prst="rect">
+            <a:off x="566928" y="457200"/>
+            <a:ext cx="384048" cy="384048"/>
+          </a:xfrm>
+          <a:prstGeom prst="ellipse">
             <a:avLst/>
           </a:prstGeom>
           <a:solidFill>
-            <a:srgbClr val="6B8E00"/>
+            <a:srgbClr val="B98A2E"/>
           </a:solidFill>
           <a:ln/>
         </p:spPr>
@@ -4457,32 +5412,71 @@
         </p:nvSpPr>
         <p:spPr>
           <a:xfrm>
-            <a:off x="749808" y="384048"/>
-            <a:ext cx="10874959" cy="182880"/>
-          </a:xfrm>
-          <a:prstGeom prst="rect">
-            <a:avLst/>
-          </a:prstGeom>
-          <a:noFill/>
-          <a:ln/>
-        </p:spPr>
-        <p:txBody>
-          <a:bodyPr wrap="square" lIns="0" tIns="0" rIns="0" bIns="0" rtlCol="0" anchor="ctr"/>
-          <a:lstStyle/>
-          <a:p>
-            <a:pPr indent="0" marL="0">
-              <a:buNone/>
-            </a:pPr>
-            <a:r>
-              <a:rPr lang="en-US" sz="950" b="1" spc="200" kern="0" dirty="0">
-                <a:solidFill>
-                  <a:srgbClr val="6B8E00"/>
+            <a:off x="566928" y="457200"/>
+            <a:ext cx="384048" cy="384048"/>
+          </a:xfrm>
+          <a:prstGeom prst="rect">
+            <a:avLst/>
+          </a:prstGeom>
+          <a:noFill/>
+          <a:ln/>
+        </p:spPr>
+        <p:txBody>
+          <a:bodyPr wrap="square" lIns="0" tIns="0" rIns="0" bIns="0" rtlCol="0" anchor="ctr"/>
+          <a:lstStyle/>
+          <a:p>
+            <a:pPr algn="ctr" indent="0" marL="0">
+              <a:buNone/>
+            </a:pPr>
+            <a:r>
+              <a:rPr lang="en-US" sz="1300" b="1" dirty="0">
+                <a:solidFill>
+                  <a:srgbClr val="FFFFFF"/>
                 </a:solidFill>
                 <a:latin typeface="Arial" pitchFamily="34" charset="0"/>
                 <a:ea typeface="Arial" pitchFamily="34" charset="-122"/>
                 <a:cs typeface="Arial" pitchFamily="34" charset="-120"/>
               </a:rPr>
-              <a:t>04  Building</a:t>
+              <a:t>04</a:t>
+            </a:r>
+            <a:endParaRPr lang="en-US" sz="1300" dirty="0"/>
+          </a:p>
+        </p:txBody>
+      </p:sp>
+      <p:sp>
+        <p:nvSpPr>
+          <p:cNvPr id="4" name="Text 2"/>
+          <p:cNvSpPr/>
+          <p:nvPr/>
+        </p:nvSpPr>
+        <p:spPr>
+          <a:xfrm>
+            <a:off x="1133856" y="457200"/>
+            <a:ext cx="10490911" cy="182880"/>
+          </a:xfrm>
+          <a:prstGeom prst="rect">
+            <a:avLst/>
+          </a:prstGeom>
+          <a:noFill/>
+          <a:ln/>
+        </p:spPr>
+        <p:txBody>
+          <a:bodyPr wrap="square" lIns="0" tIns="0" rIns="0" bIns="0" rtlCol="0" anchor="ctr"/>
+          <a:lstStyle/>
+          <a:p>
+            <a:pPr indent="0" marL="0">
+              <a:buNone/>
+            </a:pPr>
+            <a:r>
+              <a:rPr lang="en-US" sz="950" b="1" spc="200" kern="0" dirty="0">
+                <a:solidFill>
+                  <a:srgbClr val="B98A2E"/>
+                </a:solidFill>
+                <a:latin typeface="Arial" pitchFamily="34" charset="0"/>
+                <a:ea typeface="Arial" pitchFamily="34" charset="-122"/>
+                <a:cs typeface="Arial" pitchFamily="34" charset="-120"/>
+              </a:rPr>
+              <a:t>Building</a:t>
             </a:r>
             <a:endParaRPr lang="en-US" sz="950" dirty="0"/>
           </a:p>
@@ -4490,14 +5484,14 @@
       </p:sp>
       <p:sp>
         <p:nvSpPr>
-          <p:cNvPr id="4" name="Text 2"/>
-          <p:cNvSpPr/>
-          <p:nvPr/>
-        </p:nvSpPr>
-        <p:spPr>
-          <a:xfrm>
-            <a:off x="749808" y="566928"/>
-            <a:ext cx="10874959" cy="384048"/>
+          <p:cNvPr id="5" name="Text 3"/>
+          <p:cNvSpPr/>
+          <p:nvPr/>
+        </p:nvSpPr>
+        <p:spPr>
+          <a:xfrm>
+            <a:off x="1133856" y="640080"/>
+            <a:ext cx="10490911" cy="365760"/>
           </a:xfrm>
           <a:prstGeom prst="rect">
             <a:avLst/>
@@ -4513,9 +5507,9 @@
               <a:buNone/>
             </a:pPr>
             <a:r>
-              <a:rPr lang="en-US" sz="2200" b="1" dirty="0">
-                <a:solidFill>
-                  <a:srgbClr val="0F172A"/>
+              <a:rPr lang="en-US" sz="2300" b="1" dirty="0">
+                <a:solidFill>
+                  <a:srgbClr val="10161F"/>
                 </a:solidFill>
                 <a:latin typeface="Pretendard" pitchFamily="34" charset="0"/>
                 <a:ea typeface="Pretendard" pitchFamily="34" charset="-122"/>
@@ -4523,13 +5517,13 @@
               </a:rPr>
               <a:t>물건 개요</a:t>
             </a:r>
-            <a:endParaRPr lang="en-US" sz="2200" dirty="0"/>
-          </a:p>
-        </p:txBody>
-      </p:sp>
-      <p:sp>
-        <p:nvSpPr>
-          <p:cNvPr id="5" name="Text 3"/>
+            <a:endParaRPr lang="en-US" sz="2300" dirty="0"/>
+          </a:p>
+        </p:txBody>
+      </p:sp>
+      <p:sp>
+        <p:nvSpPr>
+          <p:cNvPr id="6" name="Text 4"/>
           <p:cNvSpPr/>
           <p:nvPr/>
         </p:nvSpPr>
@@ -4554,7 +5548,7 @@
             <a:r>
               <a:rPr lang="en-US" sz="1100" b="1" dirty="0">
                 <a:solidFill>
-                  <a:srgbClr val="0F172A"/>
+                  <a:srgbClr val="10161F"/>
                 </a:solidFill>
                 <a:latin typeface="Pretendard" pitchFamily="34" charset="0"/>
                 <a:ea typeface="Pretendard" pitchFamily="34" charset="-122"/>
@@ -4568,7 +5562,7 @@
       </p:sp>
       <p:sp>
         <p:nvSpPr>
-          <p:cNvPr id="6" name="Text 4"/>
+          <p:cNvPr id="7" name="Text 5"/>
           <p:cNvSpPr/>
           <p:nvPr/>
         </p:nvSpPr>
@@ -4596,7 +5590,7 @@
             <a:r>
               <a:rPr lang="en-US" sz="1400" dirty="0">
                 <a:solidFill>
-                  <a:srgbClr val="64748B"/>
+                  <a:srgbClr val="718096"/>
                 </a:solidFill>
                 <a:latin typeface="Pretendard" pitchFamily="34" charset="0"/>
                 <a:ea typeface="Pretendard" pitchFamily="34" charset="-122"/>
@@ -4610,7 +5604,7 @@
       </p:sp>
       <p:sp>
         <p:nvSpPr>
-          <p:cNvPr id="7" name="Text 5"/>
+          <p:cNvPr id="8" name="Text 6"/>
           <p:cNvSpPr/>
           <p:nvPr/>
         </p:nvSpPr>
@@ -4638,7 +5632,7 @@
             <a:r>
               <a:rPr lang="en-US" sz="1400" b="1" dirty="0">
                 <a:solidFill>
-                  <a:srgbClr val="0F172A"/>
+                  <a:srgbClr val="10161F"/>
                 </a:solidFill>
                 <a:latin typeface="Pretendard" pitchFamily="34" charset="0"/>
                 <a:ea typeface="Pretendard" pitchFamily="34" charset="-122"/>
@@ -4652,7 +5646,7 @@
       </p:sp>
       <p:sp>
         <p:nvSpPr>
-          <p:cNvPr id="8" name="Shape 6"/>
+          <p:cNvPr id="9" name="Shape 7"/>
           <p:cNvSpPr/>
           <p:nvPr/>
         </p:nvSpPr>
@@ -4667,7 +5661,7 @@
           <a:noFill/>
           <a:ln w="3810">
             <a:solidFill>
-              <a:srgbClr val="CBD5E1"/>
+              <a:srgbClr val="CBD5E0"/>
             </a:solidFill>
             <a:prstDash val="solid"/>
           </a:ln>
@@ -4675,7 +5669,7 @@
       </p:sp>
       <p:sp>
         <p:nvSpPr>
-          <p:cNvPr id="9" name="Text 7"/>
+          <p:cNvPr id="10" name="Text 8"/>
           <p:cNvSpPr/>
           <p:nvPr/>
         </p:nvSpPr>
@@ -4703,7 +5697,7 @@
             <a:r>
               <a:rPr lang="en-US" sz="1400" dirty="0">
                 <a:solidFill>
-                  <a:srgbClr val="64748B"/>
+                  <a:srgbClr val="718096"/>
                 </a:solidFill>
                 <a:latin typeface="Pretendard" pitchFamily="34" charset="0"/>
                 <a:ea typeface="Pretendard" pitchFamily="34" charset="-122"/>
@@ -4717,7 +5711,7 @@
       </p:sp>
       <p:sp>
         <p:nvSpPr>
-          <p:cNvPr id="10" name="Text 8"/>
+          <p:cNvPr id="11" name="Text 9"/>
           <p:cNvSpPr/>
           <p:nvPr/>
         </p:nvSpPr>
@@ -4745,7 +5739,7 @@
             <a:r>
               <a:rPr lang="en-US" sz="1400" b="1" dirty="0">
                 <a:solidFill>
-                  <a:srgbClr val="0F172A"/>
+                  <a:srgbClr val="10161F"/>
                 </a:solidFill>
                 <a:latin typeface="Pretendard" pitchFamily="34" charset="0"/>
                 <a:ea typeface="Pretendard" pitchFamily="34" charset="-122"/>
@@ -4759,7 +5753,7 @@
       </p:sp>
       <p:sp>
         <p:nvSpPr>
-          <p:cNvPr id="11" name="Shape 9"/>
+          <p:cNvPr id="12" name="Shape 10"/>
           <p:cNvSpPr/>
           <p:nvPr/>
         </p:nvSpPr>
@@ -4774,7 +5768,7 @@
           <a:noFill/>
           <a:ln w="3810">
             <a:solidFill>
-              <a:srgbClr val="CBD5E1"/>
+              <a:srgbClr val="CBD5E0"/>
             </a:solidFill>
             <a:prstDash val="solid"/>
           </a:ln>
@@ -4782,7 +5776,7 @@
       </p:sp>
       <p:sp>
         <p:nvSpPr>
-          <p:cNvPr id="12" name="Text 10"/>
+          <p:cNvPr id="13" name="Text 11"/>
           <p:cNvSpPr/>
           <p:nvPr/>
         </p:nvSpPr>
@@ -4810,7 +5804,7 @@
             <a:r>
               <a:rPr lang="en-US" sz="1400" dirty="0">
                 <a:solidFill>
-                  <a:srgbClr val="64748B"/>
+                  <a:srgbClr val="718096"/>
                 </a:solidFill>
                 <a:latin typeface="Pretendard" pitchFamily="34" charset="0"/>
                 <a:ea typeface="Pretendard" pitchFamily="34" charset="-122"/>
@@ -4824,7 +5818,7 @@
       </p:sp>
       <p:sp>
         <p:nvSpPr>
-          <p:cNvPr id="13" name="Text 11"/>
+          <p:cNvPr id="14" name="Text 12"/>
           <p:cNvSpPr/>
           <p:nvPr/>
         </p:nvSpPr>
@@ -4852,7 +5846,7 @@
             <a:r>
               <a:rPr lang="en-US" sz="1400" b="1" dirty="0">
                 <a:solidFill>
-                  <a:srgbClr val="0F172A"/>
+                  <a:srgbClr val="10161F"/>
                 </a:solidFill>
                 <a:latin typeface="Pretendard" pitchFamily="34" charset="0"/>
                 <a:ea typeface="Pretendard" pitchFamily="34" charset="-122"/>
@@ -4866,7 +5860,7 @@
       </p:sp>
       <p:sp>
         <p:nvSpPr>
-          <p:cNvPr id="14" name="Shape 12"/>
+          <p:cNvPr id="15" name="Shape 13"/>
           <p:cNvSpPr/>
           <p:nvPr/>
         </p:nvSpPr>
@@ -4881,7 +5875,7 @@
           <a:noFill/>
           <a:ln w="8890">
             <a:solidFill>
-              <a:srgbClr val="6B8E00"/>
+              <a:srgbClr val="B98A2E"/>
             </a:solidFill>
             <a:prstDash val="solid"/>
           </a:ln>
@@ -4889,49 +5883,49 @@
       </p:sp>
       <p:sp>
         <p:nvSpPr>
-          <p:cNvPr id="15" name="Shape 13"/>
+          <p:cNvPr id="16" name="Shape 14"/>
           <p:cNvSpPr/>
           <p:nvPr/>
         </p:nvSpPr>
         <p:spPr>
           <a:xfrm>
             <a:off x="7784287" y="1645920"/>
-            <a:ext cx="3840480" cy="2103120"/>
+            <a:ext cx="3840480" cy="1645920"/>
           </a:xfrm>
           <a:prstGeom prst="roundRect">
             <a:avLst>
-              <a:gd name="adj" fmla="val 2609"/>
+              <a:gd name="adj" fmla="val 3333"/>
             </a:avLst>
           </a:prstGeom>
           <a:solidFill>
-            <a:srgbClr val="DBEAFE"/>
+            <a:srgbClr val="F3EBDA"/>
           </a:solidFill>
           <a:ln/>
         </p:spPr>
       </p:sp>
       <p:sp>
         <p:nvSpPr>
-          <p:cNvPr id="16" name="Shape 14"/>
+          <p:cNvPr id="17" name="Shape 15"/>
           <p:cNvSpPr/>
           <p:nvPr/>
         </p:nvSpPr>
         <p:spPr>
           <a:xfrm>
             <a:off x="7784287" y="1700784"/>
-            <a:ext cx="36576" cy="1993392"/>
+            <a:ext cx="36576" cy="1536192"/>
           </a:xfrm>
           <a:prstGeom prst="rect">
             <a:avLst/>
           </a:prstGeom>
           <a:solidFill>
-            <a:srgbClr val="1D4ED8"/>
+            <a:srgbClr val="977024"/>
           </a:solidFill>
           <a:ln/>
         </p:spPr>
       </p:sp>
       <p:sp>
         <p:nvSpPr>
-          <p:cNvPr id="17" name="Text 15"/>
+          <p:cNvPr id="18" name="Text 16"/>
           <p:cNvSpPr/>
           <p:nvPr/>
         </p:nvSpPr>
@@ -4953,147 +5947,90 @@
             <a:pPr indent="0" marL="0">
               <a:buNone/>
             </a:pPr>
-            <a:r>
-              <a:rPr lang="en-US" sz="1050" b="1" dirty="0">
-                <a:solidFill>
-                  <a:srgbClr val="1D4ED8"/>
+            <a:endParaRPr lang="en-US" sz="1050" dirty="0"/>
+          </a:p>
+        </p:txBody>
+      </p:sp>
+      <p:sp>
+        <p:nvSpPr>
+          <p:cNvPr id="19" name="Text 17"/>
+          <p:cNvSpPr/>
+          <p:nvPr/>
+        </p:nvSpPr>
+        <p:spPr>
+          <a:xfrm>
+            <a:off x="7967167" y="1975104"/>
+            <a:ext cx="3511296" cy="1243584"/>
+          </a:xfrm>
+          <a:prstGeom prst="rect">
+            <a:avLst/>
+          </a:prstGeom>
+          <a:noFill/>
+          <a:ln/>
+        </p:spPr>
+        <p:txBody>
+          <a:bodyPr wrap="square" lIns="0" tIns="0" rIns="0" bIns="0" rtlCol="0" anchor="t"/>
+          <a:lstStyle/>
+          <a:p>
+            <a:pPr indent="0" marL="0">
+              <a:lnSpc>
+                <a:spcPct val="120000"/>
+              </a:lnSpc>
+              <a:buNone/>
+            </a:pPr>
+            <a:r>
+              <a:rPr lang="en-US" sz="930" dirty="0">
+                <a:solidFill>
+                  <a:srgbClr val="10161F"/>
                 </a:solidFill>
                 <a:latin typeface="Pretendard" pitchFamily="34" charset="0"/>
                 <a:ea typeface="Pretendard" pitchFamily="34" charset="-122"/>
                 <a:cs typeface="Pretendard" pitchFamily="34" charset="-120"/>
               </a:rPr>
-              <a:t>토지 및 건물 분석 포인트</a:t>
-            </a:r>
-            <a:endParaRPr lang="en-US" sz="1050" dirty="0"/>
-          </a:p>
-        </p:txBody>
-      </p:sp>
-      <p:sp>
-        <p:nvSpPr>
-          <p:cNvPr id="18" name="Text 16"/>
-          <p:cNvSpPr/>
-          <p:nvPr/>
-        </p:nvSpPr>
-        <p:spPr>
-          <a:xfrm>
-            <a:off x="7967167" y="1975104"/>
-            <a:ext cx="3511296" cy="1700784"/>
-          </a:xfrm>
-          <a:prstGeom prst="rect">
-            <a:avLst/>
-          </a:prstGeom>
-          <a:noFill/>
-          <a:ln/>
-        </p:spPr>
-        <p:txBody>
-          <a:bodyPr wrap="square" lIns="0" tIns="0" rIns="0" bIns="0" rtlCol="0" anchor="t"/>
-          <a:lstStyle/>
-          <a:p>
-            <a:pPr marL="342900" indent="-342900">
-              <a:lnSpc>
-                <a:spcPct val="120000"/>
-              </a:lnSpc>
-              <a:buSzPct val="100000"/>
-              <a:buChar char="•"/>
-            </a:pPr>
-            <a:r>
-              <a:rPr lang="en-US" sz="930" dirty="0">
-                <a:solidFill>
-                  <a:srgbClr val="0F172A"/>
+              <a:t>서초 메디컬 빌딩은 지하2층~지상7층 규모의 올근생 빌딩입니다.</a:t>
+            </a:r>
+            <a:endParaRPr lang="en-US" sz="930" dirty="0"/>
+          </a:p>
+        </p:txBody>
+      </p:sp>
+      <p:sp>
+        <p:nvSpPr>
+          <p:cNvPr id="20" name="Text 18"/>
+          <p:cNvSpPr/>
+          <p:nvPr/>
+        </p:nvSpPr>
+        <p:spPr>
+          <a:xfrm>
+            <a:off x="566928" y="6382512"/>
+            <a:ext cx="7315200" cy="219456"/>
+          </a:xfrm>
+          <a:prstGeom prst="rect">
+            <a:avLst/>
+          </a:prstGeom>
+          <a:noFill/>
+          <a:ln/>
+        </p:spPr>
+        <p:txBody>
+          <a:bodyPr wrap="square" lIns="0" tIns="0" rIns="0" bIns="0" rtlCol="0" anchor="ctr"/>
+          <a:lstStyle/>
+          <a:p>
+            <a:pPr indent="0" marL="0">
+              <a:buNone/>
+            </a:pPr>
+            <a:r>
+              <a:rPr lang="en-US" sz="800" dirty="0">
+                <a:solidFill>
+                  <a:srgbClr val="718096"/>
                 </a:solidFill>
                 <a:latin typeface="Pretendard" pitchFamily="34" charset="0"/>
                 <a:ea typeface="Pretendard" pitchFamily="34" charset="-122"/>
                 <a:cs typeface="Pretendard" pitchFamily="34" charset="-120"/>
               </a:rPr>
-              <a:t>서초대로 25m 메인 도로변 우수한 가시성 확보</a:t>
-            </a:r>
-            <a:endParaRPr lang="en-US" sz="930" dirty="0"/>
-          </a:p>
-          <a:p>
-            <a:pPr marL="342900" indent="-342900">
-              <a:lnSpc>
-                <a:spcPct val="120000"/>
-              </a:lnSpc>
-              <a:buSzPct val="100000"/>
-              <a:buChar char="•"/>
-            </a:pPr>
-            <a:r>
-              <a:rPr lang="en-US" sz="930" dirty="0">
-                <a:solidFill>
-                  <a:srgbClr val="0F172A"/>
-                </a:solidFill>
-                <a:latin typeface="Pretendard" pitchFamily="34" charset="0"/>
-                <a:ea typeface="Pretendard" pitchFamily="34" charset="-122"/>
-                <a:cs typeface="Pretendard" pitchFamily="34" charset="-120"/>
-              </a:rPr>
-              <a:t>제3종일반주거지역 법정 용적률 완비 자산</a:t>
-            </a:r>
-            <a:endParaRPr lang="en-US" sz="930" dirty="0"/>
-          </a:p>
-          <a:p>
-            <a:pPr marL="342900" indent="-342900">
-              <a:lnSpc>
-                <a:spcPct val="120000"/>
-              </a:lnSpc>
-              <a:buSzPct val="100000"/>
-              <a:buChar char="•"/>
-            </a:pPr>
-            <a:r>
-              <a:rPr lang="en-US" sz="930" dirty="0">
-                <a:solidFill>
-                  <a:srgbClr val="0F172A"/>
-                </a:solidFill>
-                <a:latin typeface="Pretendard" pitchFamily="34" charset="0"/>
-                <a:ea typeface="Pretendard" pitchFamily="34" charset="-122"/>
-                <a:cs typeface="Pretendard" pitchFamily="34" charset="-120"/>
-              </a:rPr>
-              <a:t>침대용 승강기 완비로 병의원 입점 최적화 구조</a:t>
-            </a:r>
-            <a:endParaRPr lang="en-US" sz="930" dirty="0"/>
-          </a:p>
-        </p:txBody>
-      </p:sp>
-      <p:sp>
-        <p:nvSpPr>
-          <p:cNvPr id="19" name="Shape 17"/>
-          <p:cNvSpPr/>
-          <p:nvPr/>
-        </p:nvSpPr>
-        <p:spPr>
-          <a:xfrm>
-            <a:off x="7784287" y="3977640"/>
-            <a:ext cx="3840480" cy="2148840"/>
-          </a:xfrm>
-          <a:prstGeom prst="roundRect">
-            <a:avLst>
-              <a:gd name="adj" fmla="val 2553"/>
-            </a:avLst>
-          </a:prstGeom>
-          <a:solidFill>
-            <a:srgbClr val="DBEAFE"/>
-          </a:solidFill>
-          <a:ln/>
-        </p:spPr>
-      </p:sp>
-      <p:sp>
-        <p:nvSpPr>
-          <p:cNvPr id="20" name="Shape 18"/>
-          <p:cNvSpPr/>
-          <p:nvPr/>
-        </p:nvSpPr>
-        <p:spPr>
-          <a:xfrm>
-            <a:off x="7784287" y="4032504"/>
-            <a:ext cx="36576" cy="2039112"/>
-          </a:xfrm>
-          <a:prstGeom prst="rect">
-            <a:avLst/>
-          </a:prstGeom>
-          <a:solidFill>
-            <a:srgbClr val="1D4ED8"/>
-          </a:solidFill>
-          <a:ln/>
-        </p:spPr>
+              <a:t>크리딜   |   </a:t>
+            </a:r>
+            <a:endParaRPr lang="en-US" sz="800" dirty="0"/>
+          </a:p>
+        </p:txBody>
       </p:sp>
       <p:sp>
         <p:nvSpPr>
@@ -5103,183 +6040,36 @@
         </p:nvSpPr>
         <p:spPr>
           <a:xfrm>
-            <a:off x="7967167" y="4087368"/>
-            <a:ext cx="3511296" cy="201168"/>
-          </a:xfrm>
-          <a:prstGeom prst="rect">
-            <a:avLst/>
-          </a:prstGeom>
-          <a:noFill/>
-          <a:ln/>
-        </p:spPr>
-        <p:txBody>
-          <a:bodyPr wrap="square" lIns="0" tIns="0" rIns="0" bIns="0" rtlCol="0" anchor="ctr"/>
-          <a:lstStyle/>
-          <a:p>
-            <a:pPr indent="0" marL="0">
-              <a:buNone/>
-            </a:pPr>
-            <a:r>
-              <a:rPr lang="en-US" sz="1050" b="1" dirty="0">
-                <a:solidFill>
-                  <a:srgbClr val="1D4ED8"/>
-                </a:solidFill>
-                <a:latin typeface="Pretendard" pitchFamily="34" charset="0"/>
-                <a:ea typeface="Pretendard" pitchFamily="34" charset="-122"/>
-                <a:cs typeface="Pretendard" pitchFamily="34" charset="-120"/>
-              </a:rPr>
-              <a:t>물건 실사 및 관리 상태</a:t>
-            </a:r>
-            <a:endParaRPr lang="en-US" sz="1050" dirty="0"/>
-          </a:p>
-        </p:txBody>
-      </p:sp>
-      <p:sp>
-        <p:nvSpPr>
-          <p:cNvPr id="22" name="Text 20"/>
-          <p:cNvSpPr/>
-          <p:nvPr/>
-        </p:nvSpPr>
-        <p:spPr>
-          <a:xfrm>
-            <a:off x="7967167" y="4306824"/>
-            <a:ext cx="3511296" cy="1746504"/>
-          </a:xfrm>
-          <a:prstGeom prst="rect">
-            <a:avLst/>
-          </a:prstGeom>
-          <a:noFill/>
-          <a:ln/>
-        </p:spPr>
-        <p:txBody>
-          <a:bodyPr wrap="square" lIns="0" tIns="0" rIns="0" bIns="0" rtlCol="0" anchor="t"/>
-          <a:lstStyle/>
-          <a:p>
-            <a:pPr marL="342900" indent="-342900">
-              <a:lnSpc>
-                <a:spcPct val="120000"/>
-              </a:lnSpc>
-              <a:buSzPct val="100000"/>
-              <a:buChar char="•"/>
-            </a:pPr>
-            <a:r>
-              <a:rPr lang="en-US" sz="930" dirty="0">
-                <a:solidFill>
-                  <a:srgbClr val="0F172A"/>
-                </a:solidFill>
-                <a:latin typeface="Pretendard" pitchFamily="34" charset="0"/>
-                <a:ea typeface="Pretendard" pitchFamily="34" charset="-122"/>
-                <a:cs typeface="Pretendard" pitchFamily="34" charset="-120"/>
-              </a:rPr>
-              <a:t>2017년 준공 신축급 상태로 누수·균열 0건</a:t>
-            </a:r>
-            <a:endParaRPr lang="en-US" sz="930" dirty="0"/>
-          </a:p>
-          <a:p>
-            <a:pPr marL="342900" indent="-342900">
-              <a:lnSpc>
-                <a:spcPct val="120000"/>
-              </a:lnSpc>
-              <a:buSzPct val="100000"/>
-              <a:buChar char="•"/>
-            </a:pPr>
-            <a:r>
-              <a:rPr lang="en-US" sz="930" dirty="0">
-                <a:solidFill>
-                  <a:srgbClr val="0F172A"/>
-                </a:solidFill>
-                <a:latin typeface="Pretendard" pitchFamily="34" charset="0"/>
-                <a:ea typeface="Pretendard" pitchFamily="34" charset="-122"/>
-                <a:cs typeface="Pretendard" pitchFamily="34" charset="-120"/>
-              </a:rPr>
-              <a:t>단독 법인 소유로 권리관계 투명</a:t>
-            </a:r>
-            <a:endParaRPr lang="en-US" sz="930" dirty="0"/>
-          </a:p>
-          <a:p>
-            <a:pPr marL="342900" indent="-342900">
-              <a:lnSpc>
-                <a:spcPct val="120000"/>
-              </a:lnSpc>
-              <a:buSzPct val="100000"/>
-              <a:buChar char="•"/>
-            </a:pPr>
-            <a:r>
-              <a:rPr lang="en-US" sz="930" dirty="0">
-                <a:solidFill>
-                  <a:srgbClr val="0F172A"/>
-                </a:solidFill>
-                <a:latin typeface="Pretendard" pitchFamily="34" charset="0"/>
-                <a:ea typeface="Pretendard" pitchFamily="34" charset="-122"/>
-                <a:cs typeface="Pretendard" pitchFamily="34" charset="-120"/>
-              </a:rPr>
-              <a:t>1금융권 담보대출 85억 원 승계 적격</a:t>
-            </a:r>
-            <a:endParaRPr lang="en-US" sz="930" dirty="0"/>
-          </a:p>
-        </p:txBody>
-      </p:sp>
-      <p:sp>
-        <p:nvSpPr>
-          <p:cNvPr id="23" name="Text 21"/>
-          <p:cNvSpPr/>
-          <p:nvPr/>
-        </p:nvSpPr>
-        <p:spPr>
-          <a:xfrm>
-            <a:off x="566928" y="6419088"/>
-            <a:ext cx="11057839" cy="201168"/>
-          </a:xfrm>
-          <a:prstGeom prst="rect">
-            <a:avLst/>
-          </a:prstGeom>
-          <a:noFill/>
-          <a:ln/>
-        </p:spPr>
-        <p:txBody>
-          <a:bodyPr wrap="square" lIns="0" tIns="0" rIns="0" bIns="0" rtlCol="0" anchor="ctr"/>
-          <a:lstStyle/>
-          <a:p>
-            <a:pPr algn="ctr" indent="0" marL="0">
-              <a:buNone/>
-            </a:pPr>
-            <a:r>
-              <a:rPr lang="en-US" sz="750" dirty="0">
-                <a:solidFill>
-                  <a:srgbClr val="64748B"/>
-                </a:solidFill>
-                <a:latin typeface="Pretendard" pitchFamily="34" charset="0"/>
-                <a:ea typeface="Pretendard" pitchFamily="34" charset="-122"/>
-                <a:cs typeface="Pretendard" pitchFamily="34" charset="-120"/>
-              </a:rPr>
-              <a:t>크리딜  ·    ·  4</a:t>
-            </a:r>
-            <a:endParaRPr lang="en-US" sz="750" dirty="0"/>
-          </a:p>
-        </p:txBody>
-      </p:sp>
-      <p:sp>
-        <p:nvSpPr>
-          <p:cNvPr id="24" name="Shape 22"/>
-          <p:cNvSpPr/>
-          <p:nvPr/>
-        </p:nvSpPr>
-        <p:spPr>
-          <a:xfrm>
-            <a:off x="4437172" y="6382512"/>
-            <a:ext cx="3317352" cy="0"/>
-          </a:xfrm>
-          <a:prstGeom prst="line">
-            <a:avLst/>
-          </a:prstGeom>
-          <a:noFill/>
-          <a:ln w="6350">
-            <a:solidFill>
-              <a:srgbClr val="6B8E00"/>
-            </a:solidFill>
-            <a:prstDash val="solid"/>
-          </a:ln>
-        </p:spPr>
+            <a:off x="10710367" y="6382512"/>
+            <a:ext cx="914400" cy="219456"/>
+          </a:xfrm>
+          <a:prstGeom prst="rect">
+            <a:avLst/>
+          </a:prstGeom>
+          <a:noFill/>
+          <a:ln/>
+        </p:spPr>
+        <p:txBody>
+          <a:bodyPr wrap="square" lIns="0" tIns="0" rIns="0" bIns="0" rtlCol="0" anchor="ctr"/>
+          <a:lstStyle/>
+          <a:p>
+            <a:pPr algn="r" indent="0" marL="0">
+              <a:buNone/>
+            </a:pPr>
+            <a:r>
+              <a:rPr lang="en-US" sz="900" b="1" dirty="0">
+                <a:solidFill>
+                  <a:srgbClr val="B98A2E"/>
+                </a:solidFill>
+                <a:latin typeface="Arial" pitchFamily="34" charset="0"/>
+                <a:ea typeface="Arial" pitchFamily="34" charset="-122"/>
+                <a:cs typeface="Arial" pitchFamily="34" charset="-120"/>
+              </a:rPr>
+              <a:t>4</a:t>
+            </a:r>
+            <a:endParaRPr lang="en-US" sz="900" dirty="0"/>
+          </a:p>
+        </p:txBody>
       </p:sp>
     </p:spTree>
   </p:cSld>
@@ -5321,14 +6111,14 @@
         </p:nvSpPr>
         <p:spPr>
           <a:xfrm>
-            <a:off x="566928" y="384048"/>
-            <a:ext cx="45720" cy="566928"/>
-          </a:xfrm>
-          <a:prstGeom prst="rect">
+            <a:off x="566928" y="457200"/>
+            <a:ext cx="384048" cy="384048"/>
+          </a:xfrm>
+          <a:prstGeom prst="ellipse">
             <a:avLst/>
           </a:prstGeom>
           <a:solidFill>
-            <a:srgbClr val="6B8E00"/>
+            <a:srgbClr val="B98A2E"/>
           </a:solidFill>
           <a:ln/>
         </p:spPr>
@@ -5341,32 +6131,71 @@
         </p:nvSpPr>
         <p:spPr>
           <a:xfrm>
-            <a:off x="749808" y="384048"/>
-            <a:ext cx="10874959" cy="182880"/>
-          </a:xfrm>
-          <a:prstGeom prst="rect">
-            <a:avLst/>
-          </a:prstGeom>
-          <a:noFill/>
-          <a:ln/>
-        </p:spPr>
-        <p:txBody>
-          <a:bodyPr wrap="square" lIns="0" tIns="0" rIns="0" bIns="0" rtlCol="0" anchor="ctr"/>
-          <a:lstStyle/>
-          <a:p>
-            <a:pPr indent="0" marL="0">
-              <a:buNone/>
-            </a:pPr>
-            <a:r>
-              <a:rPr lang="en-US" sz="950" b="1" spc="200" kern="0" dirty="0">
-                <a:solidFill>
-                  <a:srgbClr val="6B8E00"/>
+            <a:off x="566928" y="457200"/>
+            <a:ext cx="384048" cy="384048"/>
+          </a:xfrm>
+          <a:prstGeom prst="rect">
+            <a:avLst/>
+          </a:prstGeom>
+          <a:noFill/>
+          <a:ln/>
+        </p:spPr>
+        <p:txBody>
+          <a:bodyPr wrap="square" lIns="0" tIns="0" rIns="0" bIns="0" rtlCol="0" anchor="ctr"/>
+          <a:lstStyle/>
+          <a:p>
+            <a:pPr algn="ctr" indent="0" marL="0">
+              <a:buNone/>
+            </a:pPr>
+            <a:r>
+              <a:rPr lang="en-US" sz="1300" b="1" dirty="0">
+                <a:solidFill>
+                  <a:srgbClr val="FFFFFF"/>
                 </a:solidFill>
                 <a:latin typeface="Arial" pitchFamily="34" charset="0"/>
                 <a:ea typeface="Arial" pitchFamily="34" charset="-122"/>
                 <a:cs typeface="Arial" pitchFamily="34" charset="-120"/>
               </a:rPr>
-              <a:t>05  Rent Roll</a:t>
+              <a:t>05</a:t>
+            </a:r>
+            <a:endParaRPr lang="en-US" sz="1300" dirty="0"/>
+          </a:p>
+        </p:txBody>
+      </p:sp>
+      <p:sp>
+        <p:nvSpPr>
+          <p:cNvPr id="4" name="Text 2"/>
+          <p:cNvSpPr/>
+          <p:nvPr/>
+        </p:nvSpPr>
+        <p:spPr>
+          <a:xfrm>
+            <a:off x="1133856" y="457200"/>
+            <a:ext cx="10490911" cy="182880"/>
+          </a:xfrm>
+          <a:prstGeom prst="rect">
+            <a:avLst/>
+          </a:prstGeom>
+          <a:noFill/>
+          <a:ln/>
+        </p:spPr>
+        <p:txBody>
+          <a:bodyPr wrap="square" lIns="0" tIns="0" rIns="0" bIns="0" rtlCol="0" anchor="ctr"/>
+          <a:lstStyle/>
+          <a:p>
+            <a:pPr indent="0" marL="0">
+              <a:buNone/>
+            </a:pPr>
+            <a:r>
+              <a:rPr lang="en-US" sz="950" b="1" spc="200" kern="0" dirty="0">
+                <a:solidFill>
+                  <a:srgbClr val="B98A2E"/>
+                </a:solidFill>
+                <a:latin typeface="Arial" pitchFamily="34" charset="0"/>
+                <a:ea typeface="Arial" pitchFamily="34" charset="-122"/>
+                <a:cs typeface="Arial" pitchFamily="34" charset="-120"/>
+              </a:rPr>
+              <a:t>Rent Roll</a:t>
             </a:r>
             <a:endParaRPr lang="en-US" sz="950" dirty="0"/>
           </a:p>
@@ -5374,14 +6203,14 @@
       </p:sp>
       <p:sp>
         <p:nvSpPr>
-          <p:cNvPr id="4" name="Text 2"/>
-          <p:cNvSpPr/>
-          <p:nvPr/>
-        </p:nvSpPr>
-        <p:spPr>
-          <a:xfrm>
-            <a:off x="749808" y="566928"/>
-            <a:ext cx="10874959" cy="384048"/>
+          <p:cNvPr id="5" name="Text 3"/>
+          <p:cNvSpPr/>
+          <p:nvPr/>
+        </p:nvSpPr>
+        <p:spPr>
+          <a:xfrm>
+            <a:off x="1133856" y="640080"/>
+            <a:ext cx="10490911" cy="365760"/>
           </a:xfrm>
           <a:prstGeom prst="rect">
             <a:avLst/>
@@ -5397,9 +6226,9 @@
               <a:buNone/>
             </a:pPr>
             <a:r>
-              <a:rPr lang="en-US" sz="2200" b="1" dirty="0">
-                <a:solidFill>
-                  <a:srgbClr val="0F172A"/>
+              <a:rPr lang="en-US" sz="2300" b="1" dirty="0">
+                <a:solidFill>
+                  <a:srgbClr val="10161F"/>
                 </a:solidFill>
                 <a:latin typeface="Pretendard" pitchFamily="34" charset="0"/>
                 <a:ea typeface="Pretendard" pitchFamily="34" charset="-122"/>
@@ -5407,7 +6236,7 @@
               </a:rPr>
               <a:t>임대차 현황</a:t>
             </a:r>
-            <a:endParaRPr lang="en-US" sz="2200" dirty="0"/>
+            <a:endParaRPr lang="en-US" sz="2300" dirty="0"/>
           </a:p>
         </p:txBody>
       </p:sp>
@@ -5451,7 +6280,7 @@
                       <a:r>
                         <a:rPr lang="en-US" sz="1300" b="1" dirty="0">
                           <a:solidFill>
-                            <a:srgbClr val="64748B"/>
+                            <a:srgbClr val="718096"/>
                           </a:solidFill>
                           <a:latin typeface="Pretendard" pitchFamily="34" charset="0"/>
                           <a:ea typeface="Pretendard" pitchFamily="34" charset="-122"/>
@@ -5469,7 +6298,7 @@
                   <a:tcPr marL="50800" marR="50800" marT="25400" marB="25400" anchor="ctr">
                     <a:lnL w="3810" cap="flat" cmpd="sng" algn="ctr">
                       <a:solidFill>
-                        <a:srgbClr val="CBD5E1"/>
+                        <a:srgbClr val="CBD5E0"/>
                       </a:solidFill>
                       <a:prstDash val="solid"/>
                       <a:round/>
@@ -5478,7 +6307,7 @@
                     </a:lnL>
                     <a:lnR w="3810" cap="flat" cmpd="sng" algn="ctr">
                       <a:solidFill>
-                        <a:srgbClr val="CBD5E1"/>
+                        <a:srgbClr val="CBD5E0"/>
                       </a:solidFill>
                       <a:prstDash val="solid"/>
                       <a:round/>
@@ -5487,7 +6316,7 @@
                     </a:lnR>
                     <a:lnT w="3810" cap="flat" cmpd="sng" algn="ctr">
                       <a:solidFill>
-                        <a:srgbClr val="CBD5E1"/>
+                        <a:srgbClr val="CBD5E0"/>
                       </a:solidFill>
                       <a:prstDash val="solid"/>
                       <a:round/>
@@ -5496,7 +6325,7 @@
                     </a:lnT>
                     <a:lnB w="3810" cap="flat" cmpd="sng" algn="ctr">
                       <a:solidFill>
-                        <a:srgbClr val="CBD5E1"/>
+                        <a:srgbClr val="CBD5E0"/>
                       </a:solidFill>
                       <a:prstDash val="solid"/>
                       <a:round/>
@@ -5504,7 +6333,7 @@
                       <a:tailEnd type="none" w="med" len="med"/>
                     </a:lnB>
                     <a:solidFill>
-                      <a:srgbClr val="F8FAFC"/>
+                      <a:srgbClr val="F7FAFC"/>
                     </a:solidFill>
                   </a:tcPr>
                 </a:tc>
@@ -5519,7 +6348,7 @@
                       <a:r>
                         <a:rPr lang="en-US" sz="1300" b="1" dirty="0">
                           <a:solidFill>
-                            <a:srgbClr val="64748B"/>
+                            <a:srgbClr val="718096"/>
                           </a:solidFill>
                           <a:latin typeface="Pretendard" pitchFamily="34" charset="0"/>
                           <a:ea typeface="Pretendard" pitchFamily="34" charset="-122"/>
@@ -5537,7 +6366,7 @@
                   <a:tcPr marL="50800" marR="50800" marT="25400" marB="25400" anchor="ctr">
                     <a:lnL w="3810" cap="flat" cmpd="sng" algn="ctr">
                       <a:solidFill>
-                        <a:srgbClr val="CBD5E1"/>
+                        <a:srgbClr val="CBD5E0"/>
                       </a:solidFill>
                       <a:prstDash val="solid"/>
                       <a:round/>
@@ -5546,7 +6375,7 @@
                     </a:lnL>
                     <a:lnR w="3810" cap="flat" cmpd="sng" algn="ctr">
                       <a:solidFill>
-                        <a:srgbClr val="CBD5E1"/>
+                        <a:srgbClr val="CBD5E0"/>
                       </a:solidFill>
                       <a:prstDash val="solid"/>
                       <a:round/>
@@ -5555,7 +6384,7 @@
                     </a:lnR>
                     <a:lnT w="3810" cap="flat" cmpd="sng" algn="ctr">
                       <a:solidFill>
-                        <a:srgbClr val="CBD5E1"/>
+                        <a:srgbClr val="CBD5E0"/>
                       </a:solidFill>
                       <a:prstDash val="solid"/>
                       <a:round/>
@@ -5564,7 +6393,7 @@
                     </a:lnT>
                     <a:lnB w="3810" cap="flat" cmpd="sng" algn="ctr">
                       <a:solidFill>
-                        <a:srgbClr val="CBD5E1"/>
+                        <a:srgbClr val="CBD5E0"/>
                       </a:solidFill>
                       <a:prstDash val="solid"/>
                       <a:round/>
@@ -5572,7 +6401,7 @@
                       <a:tailEnd type="none" w="med" len="med"/>
                     </a:lnB>
                     <a:solidFill>
-                      <a:srgbClr val="F8FAFC"/>
+                      <a:srgbClr val="F7FAFC"/>
                     </a:solidFill>
                   </a:tcPr>
                 </a:tc>
@@ -5587,7 +6416,7 @@
                       <a:r>
                         <a:rPr lang="en-US" sz="1300" b="1" dirty="0">
                           <a:solidFill>
-                            <a:srgbClr val="64748B"/>
+                            <a:srgbClr val="718096"/>
                           </a:solidFill>
                           <a:latin typeface="Pretendard" pitchFamily="34" charset="0"/>
                           <a:ea typeface="Pretendard" pitchFamily="34" charset="-122"/>
@@ -5605,7 +6434,7 @@
                   <a:tcPr marL="50800" marR="50800" marT="25400" marB="25400" anchor="ctr">
                     <a:lnL w="3810" cap="flat" cmpd="sng" algn="ctr">
                       <a:solidFill>
-                        <a:srgbClr val="CBD5E1"/>
+                        <a:srgbClr val="CBD5E0"/>
                       </a:solidFill>
                       <a:prstDash val="solid"/>
                       <a:round/>
@@ -5614,7 +6443,7 @@
                     </a:lnL>
                     <a:lnR w="3810" cap="flat" cmpd="sng" algn="ctr">
                       <a:solidFill>
-                        <a:srgbClr val="CBD5E1"/>
+                        <a:srgbClr val="CBD5E0"/>
                       </a:solidFill>
                       <a:prstDash val="solid"/>
                       <a:round/>
@@ -5623,7 +6452,7 @@
                     </a:lnR>
                     <a:lnT w="3810" cap="flat" cmpd="sng" algn="ctr">
                       <a:solidFill>
-                        <a:srgbClr val="CBD5E1"/>
+                        <a:srgbClr val="CBD5E0"/>
                       </a:solidFill>
                       <a:prstDash val="solid"/>
                       <a:round/>
@@ -5632,7 +6461,7 @@
                     </a:lnT>
                     <a:lnB w="3810" cap="flat" cmpd="sng" algn="ctr">
                       <a:solidFill>
-                        <a:srgbClr val="CBD5E1"/>
+                        <a:srgbClr val="CBD5E0"/>
                       </a:solidFill>
                       <a:prstDash val="solid"/>
                       <a:round/>
@@ -5640,7 +6469,7 @@
                       <a:tailEnd type="none" w="med" len="med"/>
                     </a:lnB>
                     <a:solidFill>
-                      <a:srgbClr val="F8FAFC"/>
+                      <a:srgbClr val="F7FAFC"/>
                     </a:solidFill>
                   </a:tcPr>
                 </a:tc>
@@ -5655,7 +6484,7 @@
                       <a:r>
                         <a:rPr lang="en-US" sz="1300" b="1" dirty="0">
                           <a:solidFill>
-                            <a:srgbClr val="64748B"/>
+                            <a:srgbClr val="718096"/>
                           </a:solidFill>
                           <a:latin typeface="Pretendard" pitchFamily="34" charset="0"/>
                           <a:ea typeface="Pretendard" pitchFamily="34" charset="-122"/>
@@ -5673,7 +6502,7 @@
                   <a:tcPr marL="50800" marR="50800" marT="25400" marB="25400" anchor="ctr">
                     <a:lnL w="3810" cap="flat" cmpd="sng" algn="ctr">
                       <a:solidFill>
-                        <a:srgbClr val="CBD5E1"/>
+                        <a:srgbClr val="CBD5E0"/>
                       </a:solidFill>
                       <a:prstDash val="solid"/>
                       <a:round/>
@@ -5682,7 +6511,7 @@
                     </a:lnL>
                     <a:lnR w="3810" cap="flat" cmpd="sng" algn="ctr">
                       <a:solidFill>
-                        <a:srgbClr val="CBD5E1"/>
+                        <a:srgbClr val="CBD5E0"/>
                       </a:solidFill>
                       <a:prstDash val="solid"/>
                       <a:round/>
@@ -5691,7 +6520,7 @@
                     </a:lnR>
                     <a:lnT w="3810" cap="flat" cmpd="sng" algn="ctr">
                       <a:solidFill>
-                        <a:srgbClr val="CBD5E1"/>
+                        <a:srgbClr val="CBD5E0"/>
                       </a:solidFill>
                       <a:prstDash val="solid"/>
                       <a:round/>
@@ -5700,7 +6529,7 @@
                     </a:lnT>
                     <a:lnB w="3810" cap="flat" cmpd="sng" algn="ctr">
                       <a:solidFill>
-                        <a:srgbClr val="CBD5E1"/>
+                        <a:srgbClr val="CBD5E0"/>
                       </a:solidFill>
                       <a:prstDash val="solid"/>
                       <a:round/>
@@ -5708,7 +6537,7 @@
                       <a:tailEnd type="none" w="med" len="med"/>
                     </a:lnB>
                     <a:solidFill>
-                      <a:srgbClr val="F8FAFC"/>
+                      <a:srgbClr val="F7FAFC"/>
                     </a:solidFill>
                   </a:tcPr>
                 </a:tc>
@@ -5725,7 +6554,7 @@
                       <a:r>
                         <a:rPr lang="en-US" sz="1300" b="1" dirty="0">
                           <a:solidFill>
-                            <a:srgbClr val="0F172A"/>
+                            <a:srgbClr val="10161F"/>
                           </a:solidFill>
                           <a:latin typeface="Pretendard" pitchFamily="34" charset="0"/>
                           <a:ea typeface="Pretendard" pitchFamily="34" charset="-122"/>
@@ -5743,7 +6572,7 @@
                   <a:tcPr marL="50800" marR="50800" marT="25400" marB="25400" anchor="ctr">
                     <a:lnL w="3810" cap="flat" cmpd="sng" algn="ctr">
                       <a:solidFill>
-                        <a:srgbClr val="CBD5E1"/>
+                        <a:srgbClr val="CBD5E0"/>
                       </a:solidFill>
                       <a:prstDash val="solid"/>
                       <a:round/>
@@ -5752,7 +6581,7 @@
                     </a:lnL>
                     <a:lnR w="3810" cap="flat" cmpd="sng" algn="ctr">
                       <a:solidFill>
-                        <a:srgbClr val="CBD5E1"/>
+                        <a:srgbClr val="CBD5E0"/>
                       </a:solidFill>
                       <a:prstDash val="solid"/>
                       <a:round/>
@@ -5761,7 +6590,7 @@
                     </a:lnR>
                     <a:lnT w="3810" cap="flat" cmpd="sng" algn="ctr">
                       <a:solidFill>
-                        <a:srgbClr val="CBD5E1"/>
+                        <a:srgbClr val="CBD5E0"/>
                       </a:solidFill>
                       <a:prstDash val="solid"/>
                       <a:round/>
@@ -5770,7 +6599,7 @@
                     </a:lnT>
                     <a:lnB w="3810" cap="flat" cmpd="sng" algn="ctr">
                       <a:solidFill>
-                        <a:srgbClr val="CBD5E1"/>
+                        <a:srgbClr val="CBD5E0"/>
                       </a:solidFill>
                       <a:prstDash val="solid"/>
                       <a:round/>
@@ -5793,7 +6622,7 @@
                       <a:r>
                         <a:rPr lang="en-US" sz="1300" dirty="0">
                           <a:solidFill>
-                            <a:srgbClr val="0F172A"/>
+                            <a:srgbClr val="10161F"/>
                           </a:solidFill>
                           <a:latin typeface="Pretendard" pitchFamily="34" charset="0"/>
                           <a:ea typeface="Pretendard" pitchFamily="34" charset="-122"/>
@@ -5811,7 +6640,7 @@
                   <a:tcPr marL="50800" marR="50800" marT="25400" marB="25400" anchor="ctr">
                     <a:lnL w="3810" cap="flat" cmpd="sng" algn="ctr">
                       <a:solidFill>
-                        <a:srgbClr val="CBD5E1"/>
+                        <a:srgbClr val="CBD5E0"/>
                       </a:solidFill>
                       <a:prstDash val="solid"/>
                       <a:round/>
@@ -5820,7 +6649,7 @@
                     </a:lnL>
                     <a:lnR w="3810" cap="flat" cmpd="sng" algn="ctr">
                       <a:solidFill>
-                        <a:srgbClr val="CBD5E1"/>
+                        <a:srgbClr val="CBD5E0"/>
                       </a:solidFill>
                       <a:prstDash val="solid"/>
                       <a:round/>
@@ -5829,7 +6658,7 @@
                     </a:lnR>
                     <a:lnT w="3810" cap="flat" cmpd="sng" algn="ctr">
                       <a:solidFill>
-                        <a:srgbClr val="CBD5E1"/>
+                        <a:srgbClr val="CBD5E0"/>
                       </a:solidFill>
                       <a:prstDash val="solid"/>
                       <a:round/>
@@ -5838,7 +6667,7 @@
                     </a:lnT>
                     <a:lnB w="3810" cap="flat" cmpd="sng" algn="ctr">
                       <a:solidFill>
-                        <a:srgbClr val="CBD5E1"/>
+                        <a:srgbClr val="CBD5E0"/>
                       </a:solidFill>
                       <a:prstDash val="solid"/>
                       <a:round/>
@@ -5861,7 +6690,7 @@
                       <a:r>
                         <a:rPr lang="en-US" sz="1300" dirty="0">
                           <a:solidFill>
-                            <a:srgbClr val="0F172A"/>
+                            <a:srgbClr val="10161F"/>
                           </a:solidFill>
                           <a:latin typeface="Pretendard" pitchFamily="34" charset="0"/>
                           <a:ea typeface="Pretendard" pitchFamily="34" charset="-122"/>
@@ -5879,7 +6708,7 @@
                   <a:tcPr marL="50800" marR="50800" marT="25400" marB="25400" anchor="ctr">
                     <a:lnL w="3810" cap="flat" cmpd="sng" algn="ctr">
                       <a:solidFill>
-                        <a:srgbClr val="CBD5E1"/>
+                        <a:srgbClr val="CBD5E0"/>
                       </a:solidFill>
                       <a:prstDash val="solid"/>
                       <a:round/>
@@ -5888,7 +6717,7 @@
                     </a:lnL>
                     <a:lnR w="3810" cap="flat" cmpd="sng" algn="ctr">
                       <a:solidFill>
-                        <a:srgbClr val="CBD5E1"/>
+                        <a:srgbClr val="CBD5E0"/>
                       </a:solidFill>
                       <a:prstDash val="solid"/>
                       <a:round/>
@@ -5897,7 +6726,7 @@
                     </a:lnR>
                     <a:lnT w="3810" cap="flat" cmpd="sng" algn="ctr">
                       <a:solidFill>
-                        <a:srgbClr val="CBD5E1"/>
+                        <a:srgbClr val="CBD5E0"/>
                       </a:solidFill>
                       <a:prstDash val="solid"/>
                       <a:round/>
@@ -5906,7 +6735,7 @@
                     </a:lnT>
                     <a:lnB w="3810" cap="flat" cmpd="sng" algn="ctr">
                       <a:solidFill>
-                        <a:srgbClr val="CBD5E1"/>
+                        <a:srgbClr val="CBD5E0"/>
                       </a:solidFill>
                       <a:prstDash val="solid"/>
                       <a:round/>
@@ -5929,7 +6758,7 @@
                       <a:r>
                         <a:rPr lang="en-US" sz="1300" dirty="0">
                           <a:solidFill>
-                            <a:srgbClr val="0F172A"/>
+                            <a:srgbClr val="10161F"/>
                           </a:solidFill>
                           <a:latin typeface="Pretendard" pitchFamily="34" charset="0"/>
                           <a:ea typeface="Pretendard" pitchFamily="34" charset="-122"/>
@@ -5947,7 +6776,7 @@
                   <a:tcPr marL="50800" marR="50800" marT="25400" marB="25400" anchor="ctr">
                     <a:lnL w="3810" cap="flat" cmpd="sng" algn="ctr">
                       <a:solidFill>
-                        <a:srgbClr val="CBD5E1"/>
+                        <a:srgbClr val="CBD5E0"/>
                       </a:solidFill>
                       <a:prstDash val="solid"/>
                       <a:round/>
@@ -5956,7 +6785,7 @@
                     </a:lnL>
                     <a:lnR w="3810" cap="flat" cmpd="sng" algn="ctr">
                       <a:solidFill>
-                        <a:srgbClr val="CBD5E1"/>
+                        <a:srgbClr val="CBD5E0"/>
                       </a:solidFill>
                       <a:prstDash val="solid"/>
                       <a:round/>
@@ -5965,7 +6794,7 @@
                     </a:lnR>
                     <a:lnT w="3810" cap="flat" cmpd="sng" algn="ctr">
                       <a:solidFill>
-                        <a:srgbClr val="CBD5E1"/>
+                        <a:srgbClr val="CBD5E0"/>
                       </a:solidFill>
                       <a:prstDash val="solid"/>
                       <a:round/>
@@ -5974,7 +6803,7 @@
                     </a:lnT>
                     <a:lnB w="3810" cap="flat" cmpd="sng" algn="ctr">
                       <a:solidFill>
-                        <a:srgbClr val="CBD5E1"/>
+                        <a:srgbClr val="CBD5E0"/>
                       </a:solidFill>
                       <a:prstDash val="solid"/>
                       <a:round/>
@@ -5999,7 +6828,7 @@
                       <a:r>
                         <a:rPr lang="en-US" sz="1300" b="1" dirty="0">
                           <a:solidFill>
-                            <a:srgbClr val="0F172A"/>
+                            <a:srgbClr val="10161F"/>
                           </a:solidFill>
                           <a:latin typeface="Pretendard" pitchFamily="34" charset="0"/>
                           <a:ea typeface="Pretendard" pitchFamily="34" charset="-122"/>
@@ -6017,7 +6846,7 @@
                   <a:tcPr marL="50800" marR="50800" marT="25400" marB="25400" anchor="ctr">
                     <a:lnL w="3810" cap="flat" cmpd="sng" algn="ctr">
                       <a:solidFill>
-                        <a:srgbClr val="CBD5E1"/>
+                        <a:srgbClr val="CBD5E0"/>
                       </a:solidFill>
                       <a:prstDash val="solid"/>
                       <a:round/>
@@ -6026,7 +6855,7 @@
                     </a:lnL>
                     <a:lnR w="3810" cap="flat" cmpd="sng" algn="ctr">
                       <a:solidFill>
-                        <a:srgbClr val="CBD5E1"/>
+                        <a:srgbClr val="CBD5E0"/>
                       </a:solidFill>
                       <a:prstDash val="solid"/>
                       <a:round/>
@@ -6035,7 +6864,7 @@
                     </a:lnR>
                     <a:lnT w="3810" cap="flat" cmpd="sng" algn="ctr">
                       <a:solidFill>
-                        <a:srgbClr val="CBD5E1"/>
+                        <a:srgbClr val="CBD5E0"/>
                       </a:solidFill>
                       <a:prstDash val="solid"/>
                       <a:round/>
@@ -6044,7 +6873,7 @@
                     </a:lnT>
                     <a:lnB w="3810" cap="flat" cmpd="sng" algn="ctr">
                       <a:solidFill>
-                        <a:srgbClr val="CBD5E1"/>
+                        <a:srgbClr val="CBD5E0"/>
                       </a:solidFill>
                       <a:prstDash val="solid"/>
                       <a:round/>
@@ -6052,7 +6881,7 @@
                       <a:tailEnd type="none" w="med" len="med"/>
                     </a:lnB>
                     <a:solidFill>
-                      <a:srgbClr val="F8FAFC"/>
+                      <a:srgbClr val="F7FAFC"/>
                     </a:solidFill>
                   </a:tcPr>
                 </a:tc>
@@ -6067,7 +6896,7 @@
                       <a:r>
                         <a:rPr lang="en-US" sz="1300" dirty="0">
                           <a:solidFill>
-                            <a:srgbClr val="0F172A"/>
+                            <a:srgbClr val="10161F"/>
                           </a:solidFill>
                           <a:latin typeface="Pretendard" pitchFamily="34" charset="0"/>
                           <a:ea typeface="Pretendard" pitchFamily="34" charset="-122"/>
@@ -6085,7 +6914,7 @@
                   <a:tcPr marL="50800" marR="50800" marT="25400" marB="25400" anchor="ctr">
                     <a:lnL w="3810" cap="flat" cmpd="sng" algn="ctr">
                       <a:solidFill>
-                        <a:srgbClr val="CBD5E1"/>
+                        <a:srgbClr val="CBD5E0"/>
                       </a:solidFill>
                       <a:prstDash val="solid"/>
                       <a:round/>
@@ -6094,7 +6923,7 @@
                     </a:lnL>
                     <a:lnR w="3810" cap="flat" cmpd="sng" algn="ctr">
                       <a:solidFill>
-                        <a:srgbClr val="CBD5E1"/>
+                        <a:srgbClr val="CBD5E0"/>
                       </a:solidFill>
                       <a:prstDash val="solid"/>
                       <a:round/>
@@ -6103,7 +6932,7 @@
                     </a:lnR>
                     <a:lnT w="3810" cap="flat" cmpd="sng" algn="ctr">
                       <a:solidFill>
-                        <a:srgbClr val="CBD5E1"/>
+                        <a:srgbClr val="CBD5E0"/>
                       </a:solidFill>
                       <a:prstDash val="solid"/>
                       <a:round/>
@@ -6112,7 +6941,7 @@
                     </a:lnT>
                     <a:lnB w="3810" cap="flat" cmpd="sng" algn="ctr">
                       <a:solidFill>
-                        <a:srgbClr val="CBD5E1"/>
+                        <a:srgbClr val="CBD5E0"/>
                       </a:solidFill>
                       <a:prstDash val="solid"/>
                       <a:round/>
@@ -6120,7 +6949,7 @@
                       <a:tailEnd type="none" w="med" len="med"/>
                     </a:lnB>
                     <a:solidFill>
-                      <a:srgbClr val="F8FAFC"/>
+                      <a:srgbClr val="F7FAFC"/>
                     </a:solidFill>
                   </a:tcPr>
                 </a:tc>
@@ -6135,7 +6964,7 @@
                       <a:r>
                         <a:rPr lang="en-US" sz="1300" dirty="0">
                           <a:solidFill>
-                            <a:srgbClr val="0F172A"/>
+                            <a:srgbClr val="10161F"/>
                           </a:solidFill>
                           <a:latin typeface="Pretendard" pitchFamily="34" charset="0"/>
                           <a:ea typeface="Pretendard" pitchFamily="34" charset="-122"/>
@@ -6153,7 +6982,7 @@
                   <a:tcPr marL="50800" marR="50800" marT="25400" marB="25400" anchor="ctr">
                     <a:lnL w="3810" cap="flat" cmpd="sng" algn="ctr">
                       <a:solidFill>
-                        <a:srgbClr val="CBD5E1"/>
+                        <a:srgbClr val="CBD5E0"/>
                       </a:solidFill>
                       <a:prstDash val="solid"/>
                       <a:round/>
@@ -6162,7 +6991,7 @@
                     </a:lnL>
                     <a:lnR w="3810" cap="flat" cmpd="sng" algn="ctr">
                       <a:solidFill>
-                        <a:srgbClr val="CBD5E1"/>
+                        <a:srgbClr val="CBD5E0"/>
                       </a:solidFill>
                       <a:prstDash val="solid"/>
                       <a:round/>
@@ -6171,7 +7000,7 @@
                     </a:lnR>
                     <a:lnT w="3810" cap="flat" cmpd="sng" algn="ctr">
                       <a:solidFill>
-                        <a:srgbClr val="CBD5E1"/>
+                        <a:srgbClr val="CBD5E0"/>
                       </a:solidFill>
                       <a:prstDash val="solid"/>
                       <a:round/>
@@ -6180,7 +7009,7 @@
                     </a:lnT>
                     <a:lnB w="3810" cap="flat" cmpd="sng" algn="ctr">
                       <a:solidFill>
-                        <a:srgbClr val="CBD5E1"/>
+                        <a:srgbClr val="CBD5E0"/>
                       </a:solidFill>
                       <a:prstDash val="solid"/>
                       <a:round/>
@@ -6188,7 +7017,7 @@
                       <a:tailEnd type="none" w="med" len="med"/>
                     </a:lnB>
                     <a:solidFill>
-                      <a:srgbClr val="F8FAFC"/>
+                      <a:srgbClr val="F7FAFC"/>
                     </a:solidFill>
                   </a:tcPr>
                 </a:tc>
@@ -6203,7 +7032,7 @@
                       <a:r>
                         <a:rPr lang="en-US" sz="1300" dirty="0">
                           <a:solidFill>
-                            <a:srgbClr val="0F172A"/>
+                            <a:srgbClr val="10161F"/>
                           </a:solidFill>
                           <a:latin typeface="Pretendard" pitchFamily="34" charset="0"/>
                           <a:ea typeface="Pretendard" pitchFamily="34" charset="-122"/>
@@ -6221,7 +7050,7 @@
                   <a:tcPr marL="50800" marR="50800" marT="25400" marB="25400" anchor="ctr">
                     <a:lnL w="3810" cap="flat" cmpd="sng" algn="ctr">
                       <a:solidFill>
-                        <a:srgbClr val="CBD5E1"/>
+                        <a:srgbClr val="CBD5E0"/>
                       </a:solidFill>
                       <a:prstDash val="solid"/>
                       <a:round/>
@@ -6230,7 +7059,7 @@
                     </a:lnL>
                     <a:lnR w="3810" cap="flat" cmpd="sng" algn="ctr">
                       <a:solidFill>
-                        <a:srgbClr val="CBD5E1"/>
+                        <a:srgbClr val="CBD5E0"/>
                       </a:solidFill>
                       <a:prstDash val="solid"/>
                       <a:round/>
@@ -6239,7 +7068,7 @@
                     </a:lnR>
                     <a:lnT w="3810" cap="flat" cmpd="sng" algn="ctr">
                       <a:solidFill>
-                        <a:srgbClr val="CBD5E1"/>
+                        <a:srgbClr val="CBD5E0"/>
                       </a:solidFill>
                       <a:prstDash val="solid"/>
                       <a:round/>
@@ -6248,7 +7077,7 @@
                     </a:lnT>
                     <a:lnB w="3810" cap="flat" cmpd="sng" algn="ctr">
                       <a:solidFill>
-                        <a:srgbClr val="CBD5E1"/>
+                        <a:srgbClr val="CBD5E0"/>
                       </a:solidFill>
                       <a:prstDash val="solid"/>
                       <a:round/>
@@ -6256,7 +7085,7 @@
                       <a:tailEnd type="none" w="med" len="med"/>
                     </a:lnB>
                     <a:solidFill>
-                      <a:srgbClr val="F8FAFC"/>
+                      <a:srgbClr val="F7FAFC"/>
                     </a:solidFill>
                   </a:tcPr>
                 </a:tc>
@@ -6267,65 +7096,81 @@
       </p:graphicFrame>
       <p:sp>
         <p:nvSpPr>
-          <p:cNvPr id="6" name="Text 3"/>
-          <p:cNvSpPr/>
-          <p:nvPr/>
-        </p:nvSpPr>
-        <p:spPr>
-          <a:xfrm>
-            <a:off x="566928" y="6419088"/>
-            <a:ext cx="11057839" cy="201168"/>
-          </a:xfrm>
-          <a:prstGeom prst="rect">
-            <a:avLst/>
-          </a:prstGeom>
-          <a:noFill/>
-          <a:ln/>
-        </p:spPr>
-        <p:txBody>
-          <a:bodyPr wrap="square" lIns="0" tIns="0" rIns="0" bIns="0" rtlCol="0" anchor="ctr"/>
-          <a:lstStyle/>
-          <a:p>
-            <a:pPr algn="ctr" indent="0" marL="0">
-              <a:buNone/>
-            </a:pPr>
-            <a:r>
-              <a:rPr lang="en-US" sz="750" dirty="0">
-                <a:solidFill>
-                  <a:srgbClr val="64748B"/>
+          <p:cNvPr id="7" name="Text 4"/>
+          <p:cNvSpPr/>
+          <p:nvPr/>
+        </p:nvSpPr>
+        <p:spPr>
+          <a:xfrm>
+            <a:off x="566928" y="6382512"/>
+            <a:ext cx="7315200" cy="219456"/>
+          </a:xfrm>
+          <a:prstGeom prst="rect">
+            <a:avLst/>
+          </a:prstGeom>
+          <a:noFill/>
+          <a:ln/>
+        </p:spPr>
+        <p:txBody>
+          <a:bodyPr wrap="square" lIns="0" tIns="0" rIns="0" bIns="0" rtlCol="0" anchor="ctr"/>
+          <a:lstStyle/>
+          <a:p>
+            <a:pPr indent="0" marL="0">
+              <a:buNone/>
+            </a:pPr>
+            <a:r>
+              <a:rPr lang="en-US" sz="800" dirty="0">
+                <a:solidFill>
+                  <a:srgbClr val="718096"/>
                 </a:solidFill>
                 <a:latin typeface="Pretendard" pitchFamily="34" charset="0"/>
                 <a:ea typeface="Pretendard" pitchFamily="34" charset="-122"/>
                 <a:cs typeface="Pretendard" pitchFamily="34" charset="-120"/>
               </a:rPr>
-              <a:t>크리딜  ·    ·  5</a:t>
-            </a:r>
-            <a:endParaRPr lang="en-US" sz="750" dirty="0"/>
-          </a:p>
-        </p:txBody>
-      </p:sp>
-      <p:sp>
-        <p:nvSpPr>
-          <p:cNvPr id="7" name="Shape 4"/>
-          <p:cNvSpPr/>
-          <p:nvPr/>
-        </p:nvSpPr>
-        <p:spPr>
-          <a:xfrm>
-            <a:off x="4437172" y="6382512"/>
-            <a:ext cx="3317352" cy="0"/>
-          </a:xfrm>
-          <a:prstGeom prst="line">
-            <a:avLst/>
-          </a:prstGeom>
-          <a:noFill/>
-          <a:ln w="6350">
-            <a:solidFill>
-              <a:srgbClr val="6B8E00"/>
-            </a:solidFill>
-            <a:prstDash val="solid"/>
-          </a:ln>
-        </p:spPr>
+              <a:t>크리딜   |   </a:t>
+            </a:r>
+            <a:endParaRPr lang="en-US" sz="800" dirty="0"/>
+          </a:p>
+        </p:txBody>
+      </p:sp>
+      <p:sp>
+        <p:nvSpPr>
+          <p:cNvPr id="8" name="Text 5"/>
+          <p:cNvSpPr/>
+          <p:nvPr/>
+        </p:nvSpPr>
+        <p:spPr>
+          <a:xfrm>
+            <a:off x="10710367" y="6382512"/>
+            <a:ext cx="914400" cy="219456"/>
+          </a:xfrm>
+          <a:prstGeom prst="rect">
+            <a:avLst/>
+          </a:prstGeom>
+          <a:noFill/>
+          <a:ln/>
+        </p:spPr>
+        <p:txBody>
+          <a:bodyPr wrap="square" lIns="0" tIns="0" rIns="0" bIns="0" rtlCol="0" anchor="ctr"/>
+          <a:lstStyle/>
+          <a:p>
+            <a:pPr algn="r" indent="0" marL="0">
+              <a:buNone/>
+            </a:pPr>
+            <a:r>
+              <a:rPr lang="en-US" sz="900" b="1" dirty="0">
+                <a:solidFill>
+                  <a:srgbClr val="B98A2E"/>
+                </a:solidFill>
+                <a:latin typeface="Arial" pitchFamily="34" charset="0"/>
+                <a:ea typeface="Arial" pitchFamily="34" charset="-122"/>
+                <a:cs typeface="Arial" pitchFamily="34" charset="-120"/>
+              </a:rPr>
+              <a:t>5</a:t>
+            </a:r>
+            <a:endParaRPr lang="en-US" sz="900" dirty="0"/>
+          </a:p>
+        </p:txBody>
       </p:sp>
     </p:spTree>
   </p:cSld>
@@ -6367,14 +7212,14 @@
         </p:nvSpPr>
         <p:spPr>
           <a:xfrm>
-            <a:off x="566928" y="384048"/>
-            <a:ext cx="45720" cy="566928"/>
-          </a:xfrm>
-          <a:prstGeom prst="rect">
+            <a:off x="566928" y="457200"/>
+            <a:ext cx="384048" cy="384048"/>
+          </a:xfrm>
+          <a:prstGeom prst="ellipse">
             <a:avLst/>
           </a:prstGeom>
           <a:solidFill>
-            <a:srgbClr val="6B8E00"/>
+            <a:srgbClr val="B98A2E"/>
           </a:solidFill>
           <a:ln/>
         </p:spPr>
@@ -6387,32 +7232,71 @@
         </p:nvSpPr>
         <p:spPr>
           <a:xfrm>
-            <a:off x="749808" y="384048"/>
-            <a:ext cx="10874959" cy="182880"/>
-          </a:xfrm>
-          <a:prstGeom prst="rect">
-            <a:avLst/>
-          </a:prstGeom>
-          <a:noFill/>
-          <a:ln/>
-        </p:spPr>
-        <p:txBody>
-          <a:bodyPr wrap="square" lIns="0" tIns="0" rIns="0" bIns="0" rtlCol="0" anchor="ctr"/>
-          <a:lstStyle/>
-          <a:p>
-            <a:pPr indent="0" marL="0">
-              <a:buNone/>
-            </a:pPr>
-            <a:r>
-              <a:rPr lang="en-US" sz="950" b="1" spc="200" kern="0" dirty="0">
-                <a:solidFill>
-                  <a:srgbClr val="6B8E00"/>
+            <a:off x="566928" y="457200"/>
+            <a:ext cx="384048" cy="384048"/>
+          </a:xfrm>
+          <a:prstGeom prst="rect">
+            <a:avLst/>
+          </a:prstGeom>
+          <a:noFill/>
+          <a:ln/>
+        </p:spPr>
+        <p:txBody>
+          <a:bodyPr wrap="square" lIns="0" tIns="0" rIns="0" bIns="0" rtlCol="0" anchor="ctr"/>
+          <a:lstStyle/>
+          <a:p>
+            <a:pPr algn="ctr" indent="0" marL="0">
+              <a:buNone/>
+            </a:pPr>
+            <a:r>
+              <a:rPr lang="en-US" sz="1300" b="1" dirty="0">
+                <a:solidFill>
+                  <a:srgbClr val="FFFFFF"/>
                 </a:solidFill>
                 <a:latin typeface="Arial" pitchFamily="34" charset="0"/>
                 <a:ea typeface="Arial" pitchFamily="34" charset="-122"/>
                 <a:cs typeface="Arial" pitchFamily="34" charset="-120"/>
               </a:rPr>
-              <a:t>06  Profit</a:t>
+              <a:t>06</a:t>
+            </a:r>
+            <a:endParaRPr lang="en-US" sz="1300" dirty="0"/>
+          </a:p>
+        </p:txBody>
+      </p:sp>
+      <p:sp>
+        <p:nvSpPr>
+          <p:cNvPr id="4" name="Text 2"/>
+          <p:cNvSpPr/>
+          <p:nvPr/>
+        </p:nvSpPr>
+        <p:spPr>
+          <a:xfrm>
+            <a:off x="1133856" y="457200"/>
+            <a:ext cx="10490911" cy="182880"/>
+          </a:xfrm>
+          <a:prstGeom prst="rect">
+            <a:avLst/>
+          </a:prstGeom>
+          <a:noFill/>
+          <a:ln/>
+        </p:spPr>
+        <p:txBody>
+          <a:bodyPr wrap="square" lIns="0" tIns="0" rIns="0" bIns="0" rtlCol="0" anchor="ctr"/>
+          <a:lstStyle/>
+          <a:p>
+            <a:pPr indent="0" marL="0">
+              <a:buNone/>
+            </a:pPr>
+            <a:r>
+              <a:rPr lang="en-US" sz="950" b="1" spc="200" kern="0" dirty="0">
+                <a:solidFill>
+                  <a:srgbClr val="B98A2E"/>
+                </a:solidFill>
+                <a:latin typeface="Arial" pitchFamily="34" charset="0"/>
+                <a:ea typeface="Arial" pitchFamily="34" charset="-122"/>
+                <a:cs typeface="Arial" pitchFamily="34" charset="-120"/>
+              </a:rPr>
+              <a:t>Profit</a:t>
             </a:r>
             <a:endParaRPr lang="en-US" sz="950" dirty="0"/>
           </a:p>
@@ -6420,14 +7304,14 @@
       </p:sp>
       <p:sp>
         <p:nvSpPr>
-          <p:cNvPr id="4" name="Text 2"/>
-          <p:cNvSpPr/>
-          <p:nvPr/>
-        </p:nvSpPr>
-        <p:spPr>
-          <a:xfrm>
-            <a:off x="749808" y="566928"/>
-            <a:ext cx="10874959" cy="384048"/>
+          <p:cNvPr id="5" name="Text 3"/>
+          <p:cNvSpPr/>
+          <p:nvPr/>
+        </p:nvSpPr>
+        <p:spPr>
+          <a:xfrm>
+            <a:off x="1133856" y="640080"/>
+            <a:ext cx="10490911" cy="365760"/>
           </a:xfrm>
           <a:prstGeom prst="rect">
             <a:avLst/>
@@ -6443,9 +7327,9 @@
               <a:buNone/>
             </a:pPr>
             <a:r>
-              <a:rPr lang="en-US" sz="2200" b="1" dirty="0">
-                <a:solidFill>
-                  <a:srgbClr val="0F172A"/>
+              <a:rPr lang="en-US" sz="2300" b="1" dirty="0">
+                <a:solidFill>
+                  <a:srgbClr val="10161F"/>
                 </a:solidFill>
                 <a:latin typeface="Pretendard" pitchFamily="34" charset="0"/>
                 <a:ea typeface="Pretendard" pitchFamily="34" charset="-122"/>
@@ -6453,29 +7337,133 @@
               </a:rPr>
               <a:t>수익성 분석</a:t>
             </a:r>
-            <a:endParaRPr lang="en-US" sz="2200" dirty="0"/>
-          </a:p>
-        </p:txBody>
-      </p:sp>
-      <p:sp>
-        <p:nvSpPr>
-          <p:cNvPr id="5" name="Text 3"/>
-          <p:cNvSpPr/>
-          <p:nvPr/>
-        </p:nvSpPr>
-        <p:spPr>
-          <a:xfrm>
-            <a:off x="566928" y="1417320"/>
-            <a:ext cx="2606040" cy="402336"/>
-          </a:xfrm>
-          <a:prstGeom prst="rect">
-            <a:avLst/>
-          </a:prstGeom>
-          <a:noFill/>
-          <a:ln/>
-        </p:spPr>
-        <p:txBody>
-          <a:bodyPr wrap="square" lIns="0" tIns="0" rIns="0" bIns="0" rtlCol="0" anchor="ctr"/>
+            <a:endParaRPr lang="en-US" sz="2300" dirty="0"/>
+          </a:p>
+        </p:txBody>
+      </p:sp>
+      <p:sp>
+        <p:nvSpPr>
+          <p:cNvPr id="6" name="Shape 4"/>
+          <p:cNvSpPr/>
+          <p:nvPr/>
+        </p:nvSpPr>
+        <p:spPr>
+          <a:xfrm>
+            <a:off x="566928" y="1325880"/>
+            <a:ext cx="11057839" cy="0"/>
+          </a:xfrm>
+          <a:prstGeom prst="line">
+            <a:avLst/>
+          </a:prstGeom>
+          <a:noFill/>
+          <a:ln w="19050">
+            <a:solidFill>
+              <a:srgbClr val="B98A2E"/>
+            </a:solidFill>
+            <a:prstDash val="solid"/>
+          </a:ln>
+        </p:spPr>
+      </p:sp>
+      <p:sp>
+        <p:nvSpPr>
+          <p:cNvPr id="7" name="Shape 5"/>
+          <p:cNvSpPr/>
+          <p:nvPr/>
+        </p:nvSpPr>
+        <p:spPr>
+          <a:xfrm>
+            <a:off x="566928" y="1645920"/>
+            <a:ext cx="11057839" cy="1280160"/>
+          </a:xfrm>
+          <a:prstGeom prst="roundRect">
+            <a:avLst>
+              <a:gd name="adj" fmla="val 4286"/>
+            </a:avLst>
+          </a:prstGeom>
+          <a:solidFill>
+            <a:srgbClr val="BEE3F8"/>
+          </a:solidFill>
+          <a:ln/>
+        </p:spPr>
+      </p:sp>
+      <p:sp>
+        <p:nvSpPr>
+          <p:cNvPr id="8" name="Shape 6"/>
+          <p:cNvSpPr/>
+          <p:nvPr/>
+        </p:nvSpPr>
+        <p:spPr>
+          <a:xfrm>
+            <a:off x="566928" y="1700784"/>
+            <a:ext cx="36576" cy="1170432"/>
+          </a:xfrm>
+          <a:prstGeom prst="rect">
+            <a:avLst/>
+          </a:prstGeom>
+          <a:solidFill>
+            <a:srgbClr val="2B6CB0"/>
+          </a:solidFill>
+          <a:ln/>
+        </p:spPr>
+      </p:sp>
+      <p:sp>
+        <p:nvSpPr>
+          <p:cNvPr id="9" name="Text 7"/>
+          <p:cNvSpPr/>
+          <p:nvPr/>
+        </p:nvSpPr>
+        <p:spPr>
+          <a:xfrm>
+            <a:off x="749808" y="1755648"/>
+            <a:ext cx="10728655" cy="201168"/>
+          </a:xfrm>
+          <a:prstGeom prst="rect">
+            <a:avLst/>
+          </a:prstGeom>
+          <a:noFill/>
+          <a:ln/>
+        </p:spPr>
+        <p:txBody>
+          <a:bodyPr wrap="square" lIns="0" tIns="0" rIns="0" bIns="0" rtlCol="0" anchor="ctr"/>
+          <a:lstStyle/>
+          <a:p>
+            <a:pPr indent="0" marL="0">
+              <a:buNone/>
+            </a:pPr>
+            <a:r>
+              <a:rPr lang="en-US" sz="1050" b="1" dirty="0">
+                <a:solidFill>
+                  <a:srgbClr val="2B6CB0"/>
+                </a:solidFill>
+                <a:latin typeface="Pretendard" pitchFamily="34" charset="0"/>
+                <a:ea typeface="Pretendard" pitchFamily="34" charset="-122"/>
+                <a:cs typeface="Pretendard" pitchFamily="34" charset="-120"/>
+              </a:rPr>
+              <a:t>투자 가치 제안</a:t>
+            </a:r>
+            <a:endParaRPr lang="en-US" sz="1050" dirty="0"/>
+          </a:p>
+        </p:txBody>
+      </p:sp>
+      <p:sp>
+        <p:nvSpPr>
+          <p:cNvPr id="10" name="Text 8"/>
+          <p:cNvSpPr/>
+          <p:nvPr/>
+        </p:nvSpPr>
+        <p:spPr>
+          <a:xfrm>
+            <a:off x="749808" y="1975104"/>
+            <a:ext cx="10728655" cy="877824"/>
+          </a:xfrm>
+          <a:prstGeom prst="rect">
+            <a:avLst/>
+          </a:prstGeom>
+          <a:noFill/>
+          <a:ln/>
+        </p:spPr>
+        <p:txBody>
+          <a:bodyPr wrap="square" lIns="0" tIns="0" rIns="0" bIns="0" rtlCol="0" anchor="t"/>
           <a:lstStyle/>
           <a:p>
             <a:pPr indent="0" marL="0">
@@ -6485,9 +7473,9 @@
               <a:buNone/>
             </a:pPr>
             <a:r>
-              <a:rPr lang="en-US" sz="1300" dirty="0">
-                <a:solidFill>
-                  <a:srgbClr val="64748B"/>
+              <a:rPr lang="en-US" sz="930" dirty="0">
+                <a:solidFill>
+                  <a:srgbClr val="10161F"/>
                 </a:solidFill>
                 <a:latin typeface="Pretendard" pitchFamily="34" charset="0"/>
                 <a:ea typeface="Pretendard" pitchFamily="34" charset="-122"/>
@@ -6495,20 +7483,20 @@
               </a:rPr>
               <a:t>연 순영업소득(NOI) 약 7.14억 원, 매입 Cap Rate 4.62%입니다.</a:t>
             </a:r>
-            <a:endParaRPr lang="en-US" sz="1300" dirty="0"/>
-          </a:p>
-        </p:txBody>
-      </p:sp>
-      <p:sp>
-        <p:nvSpPr>
-          <p:cNvPr id="6" name="Text 4"/>
-          <p:cNvSpPr/>
-          <p:nvPr/>
-        </p:nvSpPr>
-        <p:spPr>
-          <a:xfrm>
-            <a:off x="3172968" y="1417320"/>
-            <a:ext cx="4251960" cy="402336"/>
+            <a:endParaRPr lang="en-US" sz="930" dirty="0"/>
+          </a:p>
+        </p:txBody>
+      </p:sp>
+      <p:sp>
+        <p:nvSpPr>
+          <p:cNvPr id="11" name="Text 9"/>
+          <p:cNvSpPr/>
+          <p:nvPr/>
+        </p:nvSpPr>
+        <p:spPr>
+          <a:xfrm>
+            <a:off x="566928" y="6382512"/>
+            <a:ext cx="7315200" cy="219456"/>
           </a:xfrm>
           <a:prstGeom prst="rect">
             <a:avLst/>
@@ -6521,184 +7509,20 @@
           <a:lstStyle/>
           <a:p>
             <a:pPr indent="0" marL="0">
-              <a:lnSpc>
-                <a:spcPct val="120000"/>
-              </a:lnSpc>
-              <a:buNone/>
-            </a:pPr>
-            <a:endParaRPr lang="en-US" sz="1300" dirty="0"/>
-          </a:p>
-        </p:txBody>
-      </p:sp>
-      <p:sp>
-        <p:nvSpPr>
-          <p:cNvPr id="7" name="Shape 5"/>
-          <p:cNvSpPr/>
-          <p:nvPr/>
-        </p:nvSpPr>
-        <p:spPr>
-          <a:xfrm>
-            <a:off x="566928" y="1819656"/>
-            <a:ext cx="6858000" cy="0"/>
-          </a:xfrm>
-          <a:prstGeom prst="line">
-            <a:avLst/>
-          </a:prstGeom>
-          <a:noFill/>
-          <a:ln w="3810">
-            <a:solidFill>
-              <a:srgbClr val="CBD5E1"/>
-            </a:solidFill>
-            <a:prstDash val="solid"/>
-          </a:ln>
-        </p:spPr>
-      </p:sp>
-      <p:sp>
-        <p:nvSpPr>
-          <p:cNvPr id="8" name="Text 6"/>
-          <p:cNvSpPr/>
-          <p:nvPr/>
-        </p:nvSpPr>
-        <p:spPr>
-          <a:xfrm>
-            <a:off x="566928" y="1819656"/>
-            <a:ext cx="2606040" cy="402336"/>
-          </a:xfrm>
-          <a:prstGeom prst="rect">
-            <a:avLst/>
-          </a:prstGeom>
-          <a:noFill/>
-          <a:ln/>
-        </p:spPr>
-        <p:txBody>
-          <a:bodyPr wrap="square" lIns="0" tIns="0" rIns="0" bIns="0" rtlCol="0" anchor="ctr"/>
-          <a:lstStyle/>
-          <a:p>
-            <a:pPr indent="0" marL="0">
-              <a:lnSpc>
-                <a:spcPct val="120000"/>
-              </a:lnSpc>
-              <a:buNone/>
-            </a:pPr>
-            <a:r>
-              <a:rPr lang="en-US" sz="1300" dirty="0">
-                <a:solidFill>
-                  <a:srgbClr val="64748B"/>
+              <a:buNone/>
+            </a:pPr>
+            <a:r>
+              <a:rPr lang="en-US" sz="800" dirty="0">
+                <a:solidFill>
+                  <a:srgbClr val="718096"/>
                 </a:solidFill>
                 <a:latin typeface="Pretendard" pitchFamily="34" charset="0"/>
                 <a:ea typeface="Pretendard" pitchFamily="34" charset="-122"/>
                 <a:cs typeface="Pretendard" pitchFamily="34" charset="-120"/>
               </a:rPr>
-              <a:t>- 실투자금</a:t>
-            </a:r>
-            <a:endParaRPr lang="en-US" sz="1300" dirty="0"/>
-          </a:p>
-        </p:txBody>
-      </p:sp>
-      <p:sp>
-        <p:nvSpPr>
-          <p:cNvPr id="9" name="Text 7"/>
-          <p:cNvSpPr/>
-          <p:nvPr/>
-        </p:nvSpPr>
-        <p:spPr>
-          <a:xfrm>
-            <a:off x="3172968" y="1819656"/>
-            <a:ext cx="4251960" cy="402336"/>
-          </a:xfrm>
-          <a:prstGeom prst="rect">
-            <a:avLst/>
-          </a:prstGeom>
-          <a:noFill/>
-          <a:ln/>
-        </p:spPr>
-        <p:txBody>
-          <a:bodyPr wrap="square" lIns="0" tIns="0" rIns="0" bIns="0" rtlCol="0" anchor="ctr"/>
-          <a:lstStyle/>
-          <a:p>
-            <a:pPr indent="0" marL="0">
-              <a:lnSpc>
-                <a:spcPct val="120000"/>
-              </a:lnSpc>
-              <a:buNone/>
-            </a:pPr>
-            <a:r>
-              <a:rPr lang="en-US" sz="1300" b="1" dirty="0">
-                <a:solidFill>
-                  <a:srgbClr val="0F172A"/>
-                </a:solidFill>
-                <a:latin typeface="Pretendard" pitchFamily="34" charset="0"/>
-                <a:ea typeface="Pretendard" pitchFamily="34" charset="-122"/>
-                <a:cs typeface="Pretendard" pitchFamily="34" charset="-120"/>
-              </a:rPr>
-              <a:t>약 69억 원</a:t>
-            </a:r>
-            <a:endParaRPr lang="en-US" sz="1300" dirty="0"/>
-          </a:p>
-        </p:txBody>
-      </p:sp>
-      <p:sp>
-        <p:nvSpPr>
-          <p:cNvPr id="10" name="Shape 8"/>
-          <p:cNvSpPr/>
-          <p:nvPr/>
-        </p:nvSpPr>
-        <p:spPr>
-          <a:xfrm>
-            <a:off x="566928" y="2221992"/>
-            <a:ext cx="6858000" cy="0"/>
-          </a:xfrm>
-          <a:prstGeom prst="line">
-            <a:avLst/>
-          </a:prstGeom>
-          <a:noFill/>
-          <a:ln w="3810">
-            <a:solidFill>
-              <a:srgbClr val="CBD5E1"/>
-            </a:solidFill>
-            <a:prstDash val="solid"/>
-          </a:ln>
-        </p:spPr>
-      </p:sp>
-      <p:sp>
-        <p:nvSpPr>
-          <p:cNvPr id="11" name="Text 9"/>
-          <p:cNvSpPr/>
-          <p:nvPr/>
-        </p:nvSpPr>
-        <p:spPr>
-          <a:xfrm>
-            <a:off x="566928" y="2221992"/>
-            <a:ext cx="2606040" cy="402336"/>
-          </a:xfrm>
-          <a:prstGeom prst="rect">
-            <a:avLst/>
-          </a:prstGeom>
-          <a:noFill/>
-          <a:ln/>
-        </p:spPr>
-        <p:txBody>
-          <a:bodyPr wrap="square" lIns="0" tIns="0" rIns="0" bIns="0" rtlCol="0" anchor="ctr"/>
-          <a:lstStyle/>
-          <a:p>
-            <a:pPr indent="0" marL="0">
-              <a:lnSpc>
-                <a:spcPct val="120000"/>
-              </a:lnSpc>
-              <a:buNone/>
-            </a:pPr>
-            <a:r>
-              <a:rPr lang="en-US" sz="1300" dirty="0">
-                <a:solidFill>
-                  <a:srgbClr val="64748B"/>
-                </a:solidFill>
-                <a:latin typeface="Pretendard" pitchFamily="34" charset="0"/>
-                <a:ea typeface="Pretendard" pitchFamily="34" charset="-122"/>
-                <a:cs typeface="Pretendard" pitchFamily="34" charset="-120"/>
-              </a:rPr>
-              <a:t>- 순수익(매월)</a:t>
-            </a:r>
-            <a:endParaRPr lang="en-US" sz="1300" dirty="0"/>
+              <a:t>크리딜   |   </a:t>
+            </a:r>
+            <a:endParaRPr lang="en-US" sz="800" dirty="0"/>
           </a:p>
         </p:txBody>
       </p:sp>
@@ -6710,231 +7534,36 @@
         </p:nvSpPr>
         <p:spPr>
           <a:xfrm>
-            <a:off x="3172968" y="2221992"/>
-            <a:ext cx="4251960" cy="402336"/>
-          </a:xfrm>
-          <a:prstGeom prst="rect">
-            <a:avLst/>
-          </a:prstGeom>
-          <a:noFill/>
-          <a:ln/>
-        </p:spPr>
-        <p:txBody>
-          <a:bodyPr wrap="square" lIns="0" tIns="0" rIns="0" bIns="0" rtlCol="0" anchor="ctr"/>
-          <a:lstStyle/>
-          <a:p>
-            <a:pPr indent="0" marL="0">
-              <a:lnSpc>
-                <a:spcPct val="120000"/>
-              </a:lnSpc>
-              <a:buNone/>
-            </a:pPr>
-            <a:r>
-              <a:rPr lang="en-US" sz="1300" b="1" dirty="0">
-                <a:solidFill>
-                  <a:srgbClr val="0F172A"/>
-                </a:solidFill>
-                <a:latin typeface="Pretendard" pitchFamily="34" charset="0"/>
-                <a:ea typeface="Pretendard" pitchFamily="34" charset="-122"/>
-                <a:cs typeface="Pretendard" pitchFamily="34" charset="-120"/>
-              </a:rPr>
-              <a:t>약 3,650만 원</a:t>
-            </a:r>
-            <a:endParaRPr lang="en-US" sz="1300" dirty="0"/>
-          </a:p>
-        </p:txBody>
-      </p:sp>
-      <p:sp>
-        <p:nvSpPr>
-          <p:cNvPr id="13" name="Shape 11"/>
-          <p:cNvSpPr/>
-          <p:nvPr/>
-        </p:nvSpPr>
-        <p:spPr>
-          <a:xfrm>
-            <a:off x="566928" y="2624328"/>
-            <a:ext cx="6858000" cy="0"/>
-          </a:xfrm>
-          <a:prstGeom prst="line">
-            <a:avLst/>
-          </a:prstGeom>
-          <a:noFill/>
-          <a:ln w="3810">
-            <a:solidFill>
-              <a:srgbClr val="CBD5E1"/>
-            </a:solidFill>
-            <a:prstDash val="solid"/>
-          </a:ln>
-        </p:spPr>
-      </p:sp>
-      <p:sp>
-        <p:nvSpPr>
-          <p:cNvPr id="14" name="Text 12"/>
-          <p:cNvSpPr/>
-          <p:nvPr/>
-        </p:nvSpPr>
-        <p:spPr>
-          <a:xfrm>
-            <a:off x="566928" y="2624328"/>
-            <a:ext cx="2606040" cy="402336"/>
-          </a:xfrm>
-          <a:prstGeom prst="rect">
-            <a:avLst/>
-          </a:prstGeom>
-          <a:noFill/>
-          <a:ln/>
-        </p:spPr>
-        <p:txBody>
-          <a:bodyPr wrap="square" lIns="0" tIns="0" rIns="0" bIns="0" rtlCol="0" anchor="ctr"/>
-          <a:lstStyle/>
-          <a:p>
-            <a:pPr indent="0" marL="0">
-              <a:lnSpc>
-                <a:spcPct val="120000"/>
-              </a:lnSpc>
-              <a:buNone/>
-            </a:pPr>
-            <a:r>
-              <a:rPr lang="en-US" sz="1300" dirty="0">
-                <a:solidFill>
-                  <a:srgbClr val="64748B"/>
-                </a:solidFill>
-                <a:latin typeface="Pretendard" pitchFamily="34" charset="0"/>
-                <a:ea typeface="Pretendard" pitchFamily="34" charset="-122"/>
-                <a:cs typeface="Pretendard" pitchFamily="34" charset="-120"/>
-              </a:rPr>
-              <a:t>- 레버리지 수익률</a:t>
-            </a:r>
-            <a:endParaRPr lang="en-US" sz="1300" dirty="0"/>
-          </a:p>
-        </p:txBody>
-      </p:sp>
-      <p:sp>
-        <p:nvSpPr>
-          <p:cNvPr id="15" name="Text 13"/>
-          <p:cNvSpPr/>
-          <p:nvPr/>
-        </p:nvSpPr>
-        <p:spPr>
-          <a:xfrm>
-            <a:off x="3172968" y="2624328"/>
-            <a:ext cx="4251960" cy="402336"/>
-          </a:xfrm>
-          <a:prstGeom prst="rect">
-            <a:avLst/>
-          </a:prstGeom>
-          <a:noFill/>
-          <a:ln/>
-        </p:spPr>
-        <p:txBody>
-          <a:bodyPr wrap="square" lIns="0" tIns="0" rIns="0" bIns="0" rtlCol="0" anchor="ctr"/>
-          <a:lstStyle/>
-          <a:p>
-            <a:pPr indent="0" marL="0">
-              <a:lnSpc>
-                <a:spcPct val="120000"/>
-              </a:lnSpc>
-              <a:buNone/>
-            </a:pPr>
-            <a:r>
-              <a:rPr lang="en-US" sz="1300" b="1" dirty="0">
-                <a:solidFill>
-                  <a:srgbClr val="0F172A"/>
-                </a:solidFill>
-                <a:latin typeface="Pretendard" pitchFamily="34" charset="0"/>
-                <a:ea typeface="Pretendard" pitchFamily="34" charset="-122"/>
-                <a:cs typeface="Pretendard" pitchFamily="34" charset="-120"/>
-              </a:rPr>
-              <a:t>약 5.8%</a:t>
-            </a:r>
-            <a:endParaRPr lang="en-US" sz="1300" dirty="0"/>
-          </a:p>
-        </p:txBody>
-      </p:sp>
-      <p:sp>
-        <p:nvSpPr>
-          <p:cNvPr id="16" name="Shape 14"/>
-          <p:cNvSpPr/>
-          <p:nvPr/>
-        </p:nvSpPr>
-        <p:spPr>
-          <a:xfrm>
-            <a:off x="7604608" y="1371600"/>
-            <a:ext cx="0" cy="4754880"/>
-          </a:xfrm>
-          <a:prstGeom prst="line">
-            <a:avLst/>
-          </a:prstGeom>
-          <a:noFill/>
-          <a:ln w="8890">
-            <a:solidFill>
-              <a:srgbClr val="6B8E00"/>
-            </a:solidFill>
-            <a:prstDash val="solid"/>
-          </a:ln>
-        </p:spPr>
-      </p:sp>
-      <p:sp>
-        <p:nvSpPr>
-          <p:cNvPr id="17" name="Text 15"/>
-          <p:cNvSpPr/>
-          <p:nvPr/>
-        </p:nvSpPr>
-        <p:spPr>
-          <a:xfrm>
-            <a:off x="566928" y="6419088"/>
-            <a:ext cx="11057839" cy="201168"/>
-          </a:xfrm>
-          <a:prstGeom prst="rect">
-            <a:avLst/>
-          </a:prstGeom>
-          <a:noFill/>
-          <a:ln/>
-        </p:spPr>
-        <p:txBody>
-          <a:bodyPr wrap="square" lIns="0" tIns="0" rIns="0" bIns="0" rtlCol="0" anchor="ctr"/>
-          <a:lstStyle/>
-          <a:p>
-            <a:pPr algn="ctr" indent="0" marL="0">
-              <a:buNone/>
-            </a:pPr>
-            <a:r>
-              <a:rPr lang="en-US" sz="750" dirty="0">
-                <a:solidFill>
-                  <a:srgbClr val="64748B"/>
-                </a:solidFill>
-                <a:latin typeface="Pretendard" pitchFamily="34" charset="0"/>
-                <a:ea typeface="Pretendard" pitchFamily="34" charset="-122"/>
-                <a:cs typeface="Pretendard" pitchFamily="34" charset="-120"/>
-              </a:rPr>
-              <a:t>크리딜  ·    ·  6</a:t>
-            </a:r>
-            <a:endParaRPr lang="en-US" sz="750" dirty="0"/>
-          </a:p>
-        </p:txBody>
-      </p:sp>
-      <p:sp>
-        <p:nvSpPr>
-          <p:cNvPr id="18" name="Shape 16"/>
-          <p:cNvSpPr/>
-          <p:nvPr/>
-        </p:nvSpPr>
-        <p:spPr>
-          <a:xfrm>
-            <a:off x="4437172" y="6382512"/>
-            <a:ext cx="3317352" cy="0"/>
-          </a:xfrm>
-          <a:prstGeom prst="line">
-            <a:avLst/>
-          </a:prstGeom>
-          <a:noFill/>
-          <a:ln w="6350">
-            <a:solidFill>
-              <a:srgbClr val="6B8E00"/>
-            </a:solidFill>
-            <a:prstDash val="solid"/>
-          </a:ln>
-        </p:spPr>
+            <a:off x="10710367" y="6382512"/>
+            <a:ext cx="914400" cy="219456"/>
+          </a:xfrm>
+          <a:prstGeom prst="rect">
+            <a:avLst/>
+          </a:prstGeom>
+          <a:noFill/>
+          <a:ln/>
+        </p:spPr>
+        <p:txBody>
+          <a:bodyPr wrap="square" lIns="0" tIns="0" rIns="0" bIns="0" rtlCol="0" anchor="ctr"/>
+          <a:lstStyle/>
+          <a:p>
+            <a:pPr algn="r" indent="0" marL="0">
+              <a:buNone/>
+            </a:pPr>
+            <a:r>
+              <a:rPr lang="en-US" sz="900" b="1" dirty="0">
+                <a:solidFill>
+                  <a:srgbClr val="B98A2E"/>
+                </a:solidFill>
+                <a:latin typeface="Arial" pitchFamily="34" charset="0"/>
+                <a:ea typeface="Arial" pitchFamily="34" charset="-122"/>
+                <a:cs typeface="Arial" pitchFamily="34" charset="-120"/>
+              </a:rPr>
+              <a:t>6</a:t>
+            </a:r>
+            <a:endParaRPr lang="en-US" sz="900" dirty="0"/>
+          </a:p>
+        </p:txBody>
       </p:sp>
     </p:spTree>
   </p:cSld>
@@ -6976,14 +7605,14 @@
         </p:nvSpPr>
         <p:spPr>
           <a:xfrm>
-            <a:off x="566928" y="384048"/>
-            <a:ext cx="45720" cy="566928"/>
-          </a:xfrm>
-          <a:prstGeom prst="rect">
+            <a:off x="566928" y="457200"/>
+            <a:ext cx="384048" cy="384048"/>
+          </a:xfrm>
+          <a:prstGeom prst="ellipse">
             <a:avLst/>
           </a:prstGeom>
           <a:solidFill>
-            <a:srgbClr val="6B8E00"/>
+            <a:srgbClr val="B98A2E"/>
           </a:solidFill>
           <a:ln/>
         </p:spPr>
@@ -6996,32 +7625,71 @@
         </p:nvSpPr>
         <p:spPr>
           <a:xfrm>
-            <a:off x="749808" y="384048"/>
-            <a:ext cx="10874959" cy="182880"/>
-          </a:xfrm>
-          <a:prstGeom prst="rect">
-            <a:avLst/>
-          </a:prstGeom>
-          <a:noFill/>
-          <a:ln/>
-        </p:spPr>
-        <p:txBody>
-          <a:bodyPr wrap="square" lIns="0" tIns="0" rIns="0" bIns="0" rtlCol="0" anchor="ctr"/>
-          <a:lstStyle/>
-          <a:p>
-            <a:pPr indent="0" marL="0">
-              <a:buNone/>
-            </a:pPr>
-            <a:r>
-              <a:rPr lang="en-US" sz="950" b="1" spc="200" kern="0" dirty="0">
-                <a:solidFill>
-                  <a:srgbClr val="6B8E00"/>
+            <a:off x="566928" y="457200"/>
+            <a:ext cx="384048" cy="384048"/>
+          </a:xfrm>
+          <a:prstGeom prst="rect">
+            <a:avLst/>
+          </a:prstGeom>
+          <a:noFill/>
+          <a:ln/>
+        </p:spPr>
+        <p:txBody>
+          <a:bodyPr wrap="square" lIns="0" tIns="0" rIns="0" bIns="0" rtlCol="0" anchor="ctr"/>
+          <a:lstStyle/>
+          <a:p>
+            <a:pPr algn="ctr" indent="0" marL="0">
+              <a:buNone/>
+            </a:pPr>
+            <a:r>
+              <a:rPr lang="en-US" sz="1300" b="1" dirty="0">
+                <a:solidFill>
+                  <a:srgbClr val="FFFFFF"/>
                 </a:solidFill>
                 <a:latin typeface="Arial" pitchFamily="34" charset="0"/>
                 <a:ea typeface="Arial" pitchFamily="34" charset="-122"/>
                 <a:cs typeface="Arial" pitchFamily="34" charset="-120"/>
               </a:rPr>
-              <a:t>07  Risk</a:t>
+              <a:t>07</a:t>
+            </a:r>
+            <a:endParaRPr lang="en-US" sz="1300" dirty="0"/>
+          </a:p>
+        </p:txBody>
+      </p:sp>
+      <p:sp>
+        <p:nvSpPr>
+          <p:cNvPr id="4" name="Text 2"/>
+          <p:cNvSpPr/>
+          <p:nvPr/>
+        </p:nvSpPr>
+        <p:spPr>
+          <a:xfrm>
+            <a:off x="1133856" y="457200"/>
+            <a:ext cx="10490911" cy="182880"/>
+          </a:xfrm>
+          <a:prstGeom prst="rect">
+            <a:avLst/>
+          </a:prstGeom>
+          <a:noFill/>
+          <a:ln/>
+        </p:spPr>
+        <p:txBody>
+          <a:bodyPr wrap="square" lIns="0" tIns="0" rIns="0" bIns="0" rtlCol="0" anchor="ctr"/>
+          <a:lstStyle/>
+          <a:p>
+            <a:pPr indent="0" marL="0">
+              <a:buNone/>
+            </a:pPr>
+            <a:r>
+              <a:rPr lang="en-US" sz="950" b="1" spc="200" kern="0" dirty="0">
+                <a:solidFill>
+                  <a:srgbClr val="B98A2E"/>
+                </a:solidFill>
+                <a:latin typeface="Arial" pitchFamily="34" charset="0"/>
+                <a:ea typeface="Arial" pitchFamily="34" charset="-122"/>
+                <a:cs typeface="Arial" pitchFamily="34" charset="-120"/>
+              </a:rPr>
+              <a:t>Risk</a:t>
             </a:r>
             <a:endParaRPr lang="en-US" sz="950" dirty="0"/>
           </a:p>
@@ -7029,14 +7697,14 @@
       </p:sp>
       <p:sp>
         <p:nvSpPr>
-          <p:cNvPr id="4" name="Text 2"/>
-          <p:cNvSpPr/>
-          <p:nvPr/>
-        </p:nvSpPr>
-        <p:spPr>
-          <a:xfrm>
-            <a:off x="749808" y="566928"/>
-            <a:ext cx="10874959" cy="384048"/>
+          <p:cNvPr id="5" name="Text 3"/>
+          <p:cNvSpPr/>
+          <p:nvPr/>
+        </p:nvSpPr>
+        <p:spPr>
+          <a:xfrm>
+            <a:off x="1133856" y="640080"/>
+            <a:ext cx="10490911" cy="365760"/>
           </a:xfrm>
           <a:prstGeom prst="rect">
             <a:avLst/>
@@ -7052,9 +7720,9 @@
               <a:buNone/>
             </a:pPr>
             <a:r>
-              <a:rPr lang="en-US" sz="2200" b="1" dirty="0">
-                <a:solidFill>
-                  <a:srgbClr val="0F172A"/>
+              <a:rPr lang="en-US" sz="2300" b="1" dirty="0">
+                <a:solidFill>
+                  <a:srgbClr val="10161F"/>
                 </a:solidFill>
                 <a:latin typeface="Pretendard" pitchFamily="34" charset="0"/>
                 <a:ea typeface="Pretendard" pitchFamily="34" charset="-122"/>
@@ -7062,30 +7730,32 @@
               </a:rPr>
               <a:t>리스크 점검</a:t>
             </a:r>
-            <a:endParaRPr lang="en-US" sz="2200" dirty="0"/>
-          </a:p>
-        </p:txBody>
-      </p:sp>
-      <p:sp>
-        <p:nvSpPr>
-          <p:cNvPr id="5" name="Shape 3"/>
+            <a:endParaRPr lang="en-US" sz="2300" dirty="0"/>
+          </a:p>
+        </p:txBody>
+      </p:sp>
+      <p:sp>
+        <p:nvSpPr>
+          <p:cNvPr id="6" name="Shape 4"/>
           <p:cNvSpPr/>
           <p:nvPr/>
         </p:nvSpPr>
         <p:spPr>
           <a:xfrm>
             <a:off x="566928" y="1417320"/>
-            <a:ext cx="3503066" cy="3611880"/>
-          </a:xfrm>
-          <a:prstGeom prst="rect">
-            <a:avLst/>
+            <a:ext cx="5391760" cy="3611880"/>
+          </a:xfrm>
+          <a:prstGeom prst="roundRect">
+            <a:avLst>
+              <a:gd name="adj" fmla="val 1519"/>
+            </a:avLst>
           </a:prstGeom>
           <a:solidFill>
-            <a:srgbClr val="F8FAFC"/>
+            <a:srgbClr val="F7FAFC"/>
           </a:solidFill>
-          <a:ln w="3810">
+          <a:ln w="6350">
             <a:solidFill>
-              <a:srgbClr val="CBD5E1"/>
+              <a:srgbClr val="CBD5E0"/>
             </a:solidFill>
             <a:prstDash val="solid"/>
           </a:ln>
@@ -7093,46 +7763,26 @@
       </p:sp>
       <p:sp>
         <p:nvSpPr>
-          <p:cNvPr id="6" name="Shape 4"/>
+          <p:cNvPr id="7" name="Shape 5"/>
           <p:cNvSpPr/>
           <p:nvPr/>
         </p:nvSpPr>
         <p:spPr>
           <a:xfrm>
             <a:off x="566928" y="1417320"/>
-            <a:ext cx="3503066" cy="36576"/>
+            <a:ext cx="5391760" cy="45720"/>
           </a:xfrm>
           <a:prstGeom prst="rect">
             <a:avLst/>
           </a:prstGeom>
           <a:solidFill>
-            <a:srgbClr val="6B8E00"/>
+            <a:srgbClr val="B98A2E"/>
           </a:solidFill>
           <a:ln/>
         </p:spPr>
       </p:sp>
       <p:sp>
         <p:nvSpPr>
-          <p:cNvPr id="7" name="Shape 5"/>
-          <p:cNvSpPr/>
-          <p:nvPr/>
-        </p:nvSpPr>
-        <p:spPr>
-          <a:xfrm>
-            <a:off x="566928" y="1417320"/>
-            <a:ext cx="3503066" cy="45720"/>
-          </a:xfrm>
-          <a:prstGeom prst="rect">
-            <a:avLst/>
-          </a:prstGeom>
-          <a:solidFill>
-            <a:srgbClr val="6B8E00"/>
-          </a:solidFill>
-          <a:ln/>
-        </p:spPr>
-      </p:sp>
-      <p:sp>
-        <p:nvSpPr>
           <p:cNvPr id="8" name="Text 6"/>
           <p:cNvSpPr/>
           <p:nvPr/>
@@ -7140,7 +7790,7 @@
         <p:spPr>
           <a:xfrm>
             <a:off x="795528" y="1618488"/>
-            <a:ext cx="3045866" cy="292608"/>
+            <a:ext cx="4934560" cy="292608"/>
           </a:xfrm>
           <a:prstGeom prst="rect">
             <a:avLst/>
@@ -7158,7 +7808,7 @@
             <a:r>
               <a:rPr lang="en-US" sz="1350" b="1" dirty="0">
                 <a:solidFill>
-                  <a:srgbClr val="4F6A00"/>
+                  <a:srgbClr val="977024"/>
                 </a:solidFill>
                 <a:latin typeface="Pretendard" pitchFamily="34" charset="0"/>
                 <a:ea typeface="Pretendard" pitchFamily="34" charset="-122"/>
@@ -7178,26 +7828,28 @@
         </p:nvSpPr>
         <p:spPr>
           <a:xfrm>
-            <a:off x="795528" y="1929384"/>
-            <a:ext cx="3045866" cy="347472"/>
-          </a:xfrm>
-          <a:prstGeom prst="rect">
-            <a:avLst/>
-          </a:prstGeom>
-          <a:noFill/>
-          <a:ln/>
-        </p:spPr>
-        <p:txBody>
-          <a:bodyPr wrap="square" lIns="0" tIns="0" rIns="0" bIns="0" rtlCol="0" anchor="ctr"/>
+            <a:off x="795528" y="1911096"/>
+            <a:ext cx="4934560" cy="402336"/>
+          </a:xfrm>
+          <a:prstGeom prst="rect">
+            <a:avLst/>
+          </a:prstGeom>
+          <a:noFill/>
+          <a:ln/>
+        </p:spPr>
+        <p:txBody>
+          <a:bodyPr wrap="square" lIns="0" tIns="0" rIns="0" bIns="0" rtlCol="0" anchor="ctr">
+            <a:normAutofit/>
+          </a:bodyPr>
           <a:lstStyle/>
           <a:p>
             <a:pPr indent="0" marL="0">
               <a:buNone/>
             </a:pPr>
             <a:r>
-              <a:rPr lang="en-US" sz="1500" b="1" dirty="0">
-                <a:solidFill>
-                  <a:srgbClr val="0F172A"/>
+              <a:rPr lang="en-US" sz="1350" b="1" dirty="0">
+                <a:solidFill>
+                  <a:srgbClr val="10161F"/>
                 </a:solidFill>
                 <a:latin typeface="Pretendard" pitchFamily="34" charset="0"/>
                 <a:ea typeface="Pretendard" pitchFamily="34" charset="-122"/>
@@ -7205,7 +7857,7 @@
               </a:rPr>
               <a:t>전층 의료</a:t>
             </a:r>
-            <a:endParaRPr lang="en-US" sz="1500" dirty="0"/>
+            <a:endParaRPr lang="en-US" sz="1350" dirty="0"/>
           </a:p>
         </p:txBody>
       </p:sp>
@@ -7217,27 +7869,32 @@
         </p:nvSpPr>
         <p:spPr>
           <a:xfrm>
-            <a:off x="795528" y="2313432"/>
-            <a:ext cx="3045866" cy="2606040"/>
-          </a:xfrm>
-          <a:prstGeom prst="rect">
-            <a:avLst/>
-          </a:prstGeom>
-          <a:noFill/>
-          <a:ln/>
-        </p:spPr>
-        <p:txBody>
-          <a:bodyPr wrap="square" lIns="0" tIns="0" rIns="0" bIns="0" rtlCol="0" anchor="t"/>
+            <a:off x="795528" y="2377440"/>
+            <a:ext cx="4934560" cy="2560320"/>
+          </a:xfrm>
+          <a:prstGeom prst="rect">
+            <a:avLst/>
+          </a:prstGeom>
+          <a:noFill/>
+          <a:ln/>
+        </p:spPr>
+        <p:txBody>
+          <a:bodyPr wrap="square" lIns="0" tIns="0" rIns="0" bIns="0" rtlCol="0" anchor="t">
+            <a:normAutofit/>
+          </a:bodyPr>
           <a:lstStyle/>
           <a:p>
             <a:pPr marL="342900" indent="-342900">
+              <a:lnSpc>
+                <a:spcPct val="125000"/>
+              </a:lnSpc>
               <a:buSzPct val="100000"/>
               <a:buChar char="•"/>
             </a:pPr>
             <a:r>
-              <a:rPr lang="en-US" sz="1250" dirty="0">
-                <a:solidFill>
-                  <a:srgbClr val="0F172A"/>
+              <a:rPr lang="en-US" sz="1200" dirty="0">
+                <a:solidFill>
+                  <a:srgbClr val="10161F"/>
                 </a:solidFill>
                 <a:latin typeface="Pretendard" pitchFamily="34" charset="0"/>
                 <a:ea typeface="Pretendard" pitchFamily="34" charset="-122"/>
@@ -7245,7 +7902,7 @@
               </a:rPr>
               <a:t>업종 다각화 검토</a:t>
             </a:r>
-            <a:endParaRPr lang="en-US" sz="1250" dirty="0"/>
+            <a:endParaRPr lang="en-US" sz="1200" dirty="0"/>
           </a:p>
         </p:txBody>
       </p:sp>
@@ -7257,18 +7914,20 @@
         </p:nvSpPr>
         <p:spPr>
           <a:xfrm>
-            <a:off x="4344314" y="1417320"/>
-            <a:ext cx="3503066" cy="3611880"/>
-          </a:xfrm>
-          <a:prstGeom prst="rect">
-            <a:avLst/>
+            <a:off x="6233008" y="1417320"/>
+            <a:ext cx="5391760" cy="3611880"/>
+          </a:xfrm>
+          <a:prstGeom prst="roundRect">
+            <a:avLst>
+              <a:gd name="adj" fmla="val 1519"/>
+            </a:avLst>
           </a:prstGeom>
           <a:solidFill>
-            <a:srgbClr val="F8FAFC"/>
+            <a:srgbClr val="F7FAFC"/>
           </a:solidFill>
-          <a:ln w="3810">
+          <a:ln w="6350">
             <a:solidFill>
-              <a:srgbClr val="CBD5E1"/>
+              <a:srgbClr val="CBD5E0"/>
             </a:solidFill>
             <a:prstDash val="solid"/>
           </a:ln>
@@ -7282,48 +7941,28 @@
         </p:nvSpPr>
         <p:spPr>
           <a:xfrm>
-            <a:off x="4344314" y="1417320"/>
-            <a:ext cx="3503066" cy="36576"/>
+            <a:off x="6233008" y="1417320"/>
+            <a:ext cx="5391760" cy="45720"/>
           </a:xfrm>
           <a:prstGeom prst="rect">
             <a:avLst/>
           </a:prstGeom>
           <a:solidFill>
-            <a:srgbClr val="6B8E00"/>
+            <a:srgbClr val="B98A2E"/>
           </a:solidFill>
           <a:ln/>
         </p:spPr>
       </p:sp>
       <p:sp>
         <p:nvSpPr>
-          <p:cNvPr id="13" name="Shape 11"/>
-          <p:cNvSpPr/>
-          <p:nvPr/>
-        </p:nvSpPr>
-        <p:spPr>
-          <a:xfrm>
-            <a:off x="4344314" y="1417320"/>
-            <a:ext cx="3503066" cy="45720"/>
-          </a:xfrm>
-          <a:prstGeom prst="rect">
-            <a:avLst/>
-          </a:prstGeom>
-          <a:solidFill>
-            <a:srgbClr val="6B8E00"/>
-          </a:solidFill>
-          <a:ln/>
-        </p:spPr>
-      </p:sp>
-      <p:sp>
-        <p:nvSpPr>
-          <p:cNvPr id="14" name="Text 12"/>
-          <p:cNvSpPr/>
-          <p:nvPr/>
-        </p:nvSpPr>
-        <p:spPr>
-          <a:xfrm>
-            <a:off x="4572914" y="1618488"/>
-            <a:ext cx="3045866" cy="292608"/>
+          <p:cNvPr id="13" name="Text 11"/>
+          <p:cNvSpPr/>
+          <p:nvPr/>
+        </p:nvSpPr>
+        <p:spPr>
+          <a:xfrm>
+            <a:off x="6461608" y="1618488"/>
+            <a:ext cx="4934560" cy="292608"/>
           </a:xfrm>
           <a:prstGeom prst="rect">
             <a:avLst/>
@@ -7341,7 +7980,7 @@
             <a:r>
               <a:rPr lang="en-US" sz="1350" b="1" dirty="0">
                 <a:solidFill>
-                  <a:srgbClr val="4F6A00"/>
+                  <a:srgbClr val="977024"/>
                 </a:solidFill>
                 <a:latin typeface="Pretendard" pitchFamily="34" charset="0"/>
                 <a:ea typeface="Pretendard" pitchFamily="34" charset="-122"/>
@@ -7355,32 +7994,34 @@
       </p:sp>
       <p:sp>
         <p:nvSpPr>
-          <p:cNvPr id="15" name="Text 13"/>
-          <p:cNvSpPr/>
-          <p:nvPr/>
-        </p:nvSpPr>
-        <p:spPr>
-          <a:xfrm>
-            <a:off x="4572914" y="1929384"/>
-            <a:ext cx="3045866" cy="347472"/>
-          </a:xfrm>
-          <a:prstGeom prst="rect">
-            <a:avLst/>
-          </a:prstGeom>
-          <a:noFill/>
-          <a:ln/>
-        </p:spPr>
-        <p:txBody>
-          <a:bodyPr wrap="square" lIns="0" tIns="0" rIns="0" bIns="0" rtlCol="0" anchor="ctr"/>
+          <p:cNvPr id="14" name="Text 12"/>
+          <p:cNvSpPr/>
+          <p:nvPr/>
+        </p:nvSpPr>
+        <p:spPr>
+          <a:xfrm>
+            <a:off x="6461608" y="1911096"/>
+            <a:ext cx="4934560" cy="402336"/>
+          </a:xfrm>
+          <a:prstGeom prst="rect">
+            <a:avLst/>
+          </a:prstGeom>
+          <a:noFill/>
+          <a:ln/>
+        </p:spPr>
+        <p:txBody>
+          <a:bodyPr wrap="square" lIns="0" tIns="0" rIns="0" bIns="0" rtlCol="0" anchor="ctr">
+            <a:normAutofit/>
+          </a:bodyPr>
           <a:lstStyle/>
           <a:p>
             <a:pPr indent="0" marL="0">
               <a:buNone/>
             </a:pPr>
             <a:r>
-              <a:rPr lang="en-US" sz="1500" b="1" dirty="0">
-                <a:solidFill>
-                  <a:srgbClr val="0F172A"/>
+              <a:rPr lang="en-US" sz="1350" b="1" dirty="0">
+                <a:solidFill>
+                  <a:srgbClr val="10161F"/>
                 </a:solidFill>
                 <a:latin typeface="Pretendard" pitchFamily="34" charset="0"/>
                 <a:ea typeface="Pretendard" pitchFamily="34" charset="-122"/>
@@ -7388,39 +8029,44 @@
               </a:rPr>
               <a:t>4.1% 고정</a:t>
             </a:r>
-            <a:endParaRPr lang="en-US" sz="1500" dirty="0"/>
-          </a:p>
-        </p:txBody>
-      </p:sp>
-      <p:sp>
-        <p:nvSpPr>
-          <p:cNvPr id="16" name="Text 14"/>
-          <p:cNvSpPr/>
-          <p:nvPr/>
-        </p:nvSpPr>
-        <p:spPr>
-          <a:xfrm>
-            <a:off x="4572914" y="2313432"/>
-            <a:ext cx="3045866" cy="2606040"/>
-          </a:xfrm>
-          <a:prstGeom prst="rect">
-            <a:avLst/>
-          </a:prstGeom>
-          <a:noFill/>
-          <a:ln/>
-        </p:spPr>
-        <p:txBody>
-          <a:bodyPr wrap="square" lIns="0" tIns="0" rIns="0" bIns="0" rtlCol="0" anchor="t"/>
+            <a:endParaRPr lang="en-US" sz="1350" dirty="0"/>
+          </a:p>
+        </p:txBody>
+      </p:sp>
+      <p:sp>
+        <p:nvSpPr>
+          <p:cNvPr id="15" name="Text 13"/>
+          <p:cNvSpPr/>
+          <p:nvPr/>
+        </p:nvSpPr>
+        <p:spPr>
+          <a:xfrm>
+            <a:off x="6461608" y="2377440"/>
+            <a:ext cx="4934560" cy="2560320"/>
+          </a:xfrm>
+          <a:prstGeom prst="rect">
+            <a:avLst/>
+          </a:prstGeom>
+          <a:noFill/>
+          <a:ln/>
+        </p:spPr>
+        <p:txBody>
+          <a:bodyPr wrap="square" lIns="0" tIns="0" rIns="0" bIns="0" rtlCol="0" anchor="t">
+            <a:normAutofit/>
+          </a:bodyPr>
           <a:lstStyle/>
           <a:p>
             <a:pPr marL="342900" indent="-342900">
+              <a:lnSpc>
+                <a:spcPct val="125000"/>
+              </a:lnSpc>
               <a:buSzPct val="100000"/>
               <a:buChar char="•"/>
             </a:pPr>
             <a:r>
-              <a:rPr lang="en-US" sz="1250" dirty="0">
-                <a:solidFill>
-                  <a:srgbClr val="0F172A"/>
+              <a:rPr lang="en-US" sz="1200" dirty="0">
+                <a:solidFill>
+                  <a:srgbClr val="10161F"/>
                 </a:solidFill>
                 <a:latin typeface="Pretendard" pitchFamily="34" charset="0"/>
                 <a:ea typeface="Pretendard" pitchFamily="34" charset="-122"/>
@@ -7428,71 +8074,87 @@
               </a:rPr>
               <a:t>승계 대출 활용</a:t>
             </a:r>
-            <a:endParaRPr lang="en-US" sz="1250" dirty="0"/>
-          </a:p>
-        </p:txBody>
-      </p:sp>
-      <p:sp>
-        <p:nvSpPr>
-          <p:cNvPr id="17" name="Text 15"/>
-          <p:cNvSpPr/>
-          <p:nvPr/>
-        </p:nvSpPr>
-        <p:spPr>
-          <a:xfrm>
-            <a:off x="566928" y="6419088"/>
-            <a:ext cx="11057839" cy="201168"/>
-          </a:xfrm>
-          <a:prstGeom prst="rect">
-            <a:avLst/>
-          </a:prstGeom>
-          <a:noFill/>
-          <a:ln/>
-        </p:spPr>
-        <p:txBody>
-          <a:bodyPr wrap="square" lIns="0" tIns="0" rIns="0" bIns="0" rtlCol="0" anchor="ctr"/>
-          <a:lstStyle/>
-          <a:p>
-            <a:pPr algn="ctr" indent="0" marL="0">
-              <a:buNone/>
-            </a:pPr>
-            <a:r>
-              <a:rPr lang="en-US" sz="750" dirty="0">
-                <a:solidFill>
-                  <a:srgbClr val="64748B"/>
+            <a:endParaRPr lang="en-US" sz="1200" dirty="0"/>
+          </a:p>
+        </p:txBody>
+      </p:sp>
+      <p:sp>
+        <p:nvSpPr>
+          <p:cNvPr id="16" name="Text 14"/>
+          <p:cNvSpPr/>
+          <p:nvPr/>
+        </p:nvSpPr>
+        <p:spPr>
+          <a:xfrm>
+            <a:off x="566928" y="6382512"/>
+            <a:ext cx="7315200" cy="219456"/>
+          </a:xfrm>
+          <a:prstGeom prst="rect">
+            <a:avLst/>
+          </a:prstGeom>
+          <a:noFill/>
+          <a:ln/>
+        </p:spPr>
+        <p:txBody>
+          <a:bodyPr wrap="square" lIns="0" tIns="0" rIns="0" bIns="0" rtlCol="0" anchor="ctr"/>
+          <a:lstStyle/>
+          <a:p>
+            <a:pPr indent="0" marL="0">
+              <a:buNone/>
+            </a:pPr>
+            <a:r>
+              <a:rPr lang="en-US" sz="800" dirty="0">
+                <a:solidFill>
+                  <a:srgbClr val="718096"/>
                 </a:solidFill>
                 <a:latin typeface="Pretendard" pitchFamily="34" charset="0"/>
                 <a:ea typeface="Pretendard" pitchFamily="34" charset="-122"/>
                 <a:cs typeface="Pretendard" pitchFamily="34" charset="-120"/>
               </a:rPr>
-              <a:t>크리딜  ·    ·  7</a:t>
-            </a:r>
-            <a:endParaRPr lang="en-US" sz="750" dirty="0"/>
-          </a:p>
-        </p:txBody>
-      </p:sp>
-      <p:sp>
-        <p:nvSpPr>
-          <p:cNvPr id="18" name="Shape 16"/>
-          <p:cNvSpPr/>
-          <p:nvPr/>
-        </p:nvSpPr>
-        <p:spPr>
-          <a:xfrm>
-            <a:off x="4437172" y="6382512"/>
-            <a:ext cx="3317352" cy="0"/>
-          </a:xfrm>
-          <a:prstGeom prst="line">
-            <a:avLst/>
-          </a:prstGeom>
-          <a:noFill/>
-          <a:ln w="6350">
-            <a:solidFill>
-              <a:srgbClr val="6B8E00"/>
-            </a:solidFill>
-            <a:prstDash val="solid"/>
-          </a:ln>
-        </p:spPr>
+              <a:t>크리딜   |   </a:t>
+            </a:r>
+            <a:endParaRPr lang="en-US" sz="800" dirty="0"/>
+          </a:p>
+        </p:txBody>
+      </p:sp>
+      <p:sp>
+        <p:nvSpPr>
+          <p:cNvPr id="17" name="Text 15"/>
+          <p:cNvSpPr/>
+          <p:nvPr/>
+        </p:nvSpPr>
+        <p:spPr>
+          <a:xfrm>
+            <a:off x="10710367" y="6382512"/>
+            <a:ext cx="914400" cy="219456"/>
+          </a:xfrm>
+          <a:prstGeom prst="rect">
+            <a:avLst/>
+          </a:prstGeom>
+          <a:noFill/>
+          <a:ln/>
+        </p:spPr>
+        <p:txBody>
+          <a:bodyPr wrap="square" lIns="0" tIns="0" rIns="0" bIns="0" rtlCol="0" anchor="ctr"/>
+          <a:lstStyle/>
+          <a:p>
+            <a:pPr algn="r" indent="0" marL="0">
+              <a:buNone/>
+            </a:pPr>
+            <a:r>
+              <a:rPr lang="en-US" sz="900" b="1" dirty="0">
+                <a:solidFill>
+                  <a:srgbClr val="B98A2E"/>
+                </a:solidFill>
+                <a:latin typeface="Arial" pitchFamily="34" charset="0"/>
+                <a:ea typeface="Arial" pitchFamily="34" charset="-122"/>
+                <a:cs typeface="Arial" pitchFamily="34" charset="-120"/>
+              </a:rPr>
+              <a:t>7</a:t>
+            </a:r>
+            <a:endParaRPr lang="en-US" sz="900" dirty="0"/>
+          </a:p>
+        </p:txBody>
       </p:sp>
     </p:spTree>
   </p:cSld>
@@ -7534,14 +8196,14 @@
         </p:nvSpPr>
         <p:spPr>
           <a:xfrm>
-            <a:off x="566928" y="384048"/>
-            <a:ext cx="45720" cy="566928"/>
-          </a:xfrm>
-          <a:prstGeom prst="rect">
+            <a:off x="566928" y="457200"/>
+            <a:ext cx="384048" cy="384048"/>
+          </a:xfrm>
+          <a:prstGeom prst="ellipse">
             <a:avLst/>
           </a:prstGeom>
           <a:solidFill>
-            <a:srgbClr val="6B8E00"/>
+            <a:srgbClr val="B98A2E"/>
           </a:solidFill>
           <a:ln/>
         </p:spPr>
@@ -7554,32 +8216,71 @@
         </p:nvSpPr>
         <p:spPr>
           <a:xfrm>
-            <a:off x="749808" y="384048"/>
-            <a:ext cx="10874959" cy="182880"/>
-          </a:xfrm>
-          <a:prstGeom prst="rect">
-            <a:avLst/>
-          </a:prstGeom>
-          <a:noFill/>
-          <a:ln/>
-        </p:spPr>
-        <p:txBody>
-          <a:bodyPr wrap="square" lIns="0" tIns="0" rIns="0" bIns="0" rtlCol="0" anchor="ctr"/>
-          <a:lstStyle/>
-          <a:p>
-            <a:pPr indent="0" marL="0">
-              <a:buNone/>
-            </a:pPr>
-            <a:r>
-              <a:rPr lang="en-US" sz="950" b="1" spc="200" kern="0" dirty="0">
-                <a:solidFill>
-                  <a:srgbClr val="6B8E00"/>
+            <a:off x="566928" y="457200"/>
+            <a:ext cx="384048" cy="384048"/>
+          </a:xfrm>
+          <a:prstGeom prst="rect">
+            <a:avLst/>
+          </a:prstGeom>
+          <a:noFill/>
+          <a:ln/>
+        </p:spPr>
+        <p:txBody>
+          <a:bodyPr wrap="square" lIns="0" tIns="0" rIns="0" bIns="0" rtlCol="0" anchor="ctr"/>
+          <a:lstStyle/>
+          <a:p>
+            <a:pPr algn="ctr" indent="0" marL="0">
+              <a:buNone/>
+            </a:pPr>
+            <a:r>
+              <a:rPr lang="en-US" sz="1300" b="1" dirty="0">
+                <a:solidFill>
+                  <a:srgbClr val="FFFFFF"/>
                 </a:solidFill>
                 <a:latin typeface="Arial" pitchFamily="34" charset="0"/>
                 <a:ea typeface="Arial" pitchFamily="34" charset="-122"/>
                 <a:cs typeface="Arial" pitchFamily="34" charset="-120"/>
               </a:rPr>
-              <a:t>08  Thesis</a:t>
+              <a:t>08</a:t>
+            </a:r>
+            <a:endParaRPr lang="en-US" sz="1300" dirty="0"/>
+          </a:p>
+        </p:txBody>
+      </p:sp>
+      <p:sp>
+        <p:nvSpPr>
+          <p:cNvPr id="4" name="Text 2"/>
+          <p:cNvSpPr/>
+          <p:nvPr/>
+        </p:nvSpPr>
+        <p:spPr>
+          <a:xfrm>
+            <a:off x="1133856" y="457200"/>
+            <a:ext cx="10490911" cy="182880"/>
+          </a:xfrm>
+          <a:prstGeom prst="rect">
+            <a:avLst/>
+          </a:prstGeom>
+          <a:noFill/>
+          <a:ln/>
+        </p:spPr>
+        <p:txBody>
+          <a:bodyPr wrap="square" lIns="0" tIns="0" rIns="0" bIns="0" rtlCol="0" anchor="ctr"/>
+          <a:lstStyle/>
+          <a:p>
+            <a:pPr indent="0" marL="0">
+              <a:buNone/>
+            </a:pPr>
+            <a:r>
+              <a:rPr lang="en-US" sz="950" b="1" spc="200" kern="0" dirty="0">
+                <a:solidFill>
+                  <a:srgbClr val="B98A2E"/>
+                </a:solidFill>
+                <a:latin typeface="Arial" pitchFamily="34" charset="0"/>
+                <a:ea typeface="Arial" pitchFamily="34" charset="-122"/>
+                <a:cs typeface="Arial" pitchFamily="34" charset="-120"/>
+              </a:rPr>
+              <a:t>Thesis</a:t>
             </a:r>
             <a:endParaRPr lang="en-US" sz="950" dirty="0"/>
           </a:p>
@@ -7587,14 +8288,14 @@
       </p:sp>
       <p:sp>
         <p:nvSpPr>
-          <p:cNvPr id="4" name="Text 2"/>
-          <p:cNvSpPr/>
-          <p:nvPr/>
-        </p:nvSpPr>
-        <p:spPr>
-          <a:xfrm>
-            <a:off x="749808" y="566928"/>
-            <a:ext cx="10874959" cy="384048"/>
+          <p:cNvPr id="5" name="Text 3"/>
+          <p:cNvSpPr/>
+          <p:nvPr/>
+        </p:nvSpPr>
+        <p:spPr>
+          <a:xfrm>
+            <a:off x="1133856" y="640080"/>
+            <a:ext cx="10490911" cy="365760"/>
           </a:xfrm>
           <a:prstGeom prst="rect">
             <a:avLst/>
@@ -7610,9 +8311,9 @@
               <a:buNone/>
             </a:pPr>
             <a:r>
-              <a:rPr lang="en-US" sz="2200" b="1" dirty="0">
-                <a:solidFill>
-                  <a:srgbClr val="0F172A"/>
+              <a:rPr lang="en-US" sz="2300" b="1" dirty="0">
+                <a:solidFill>
+                  <a:srgbClr val="10161F"/>
                 </a:solidFill>
                 <a:latin typeface="Pretendard" pitchFamily="34" charset="0"/>
                 <a:ea typeface="Pretendard" pitchFamily="34" charset="-122"/>
@@ -7620,13 +8321,13 @@
               </a:rPr>
               <a:t>투자 포인트</a:t>
             </a:r>
-            <a:endParaRPr lang="en-US" sz="2200" dirty="0"/>
-          </a:p>
-        </p:txBody>
-      </p:sp>
-      <p:sp>
-        <p:nvSpPr>
-          <p:cNvPr id="5" name="Shape 3"/>
+            <a:endParaRPr lang="en-US" sz="2300" dirty="0"/>
+          </a:p>
+        </p:txBody>
+      </p:sp>
+      <p:sp>
+        <p:nvSpPr>
+          <p:cNvPr id="6" name="Shape 4"/>
           <p:cNvSpPr/>
           <p:nvPr/>
         </p:nvSpPr>
@@ -7641,11 +8342,11 @@
             </a:avLst>
           </a:prstGeom>
           <a:solidFill>
-            <a:srgbClr val="E8F5CC"/>
+            <a:srgbClr val="F3EBDA"/>
           </a:solidFill>
           <a:ln w="10160">
             <a:solidFill>
-              <a:srgbClr val="A3D900"/>
+              <a:srgbClr val="D9B668"/>
             </a:solidFill>
             <a:prstDash val="solid"/>
           </a:ln>
@@ -7653,14 +8354,14 @@
       </p:sp>
       <p:sp>
         <p:nvSpPr>
-          <p:cNvPr id="6" name="Text 4"/>
+          <p:cNvPr id="7" name="Text 5"/>
           <p:cNvSpPr/>
           <p:nvPr/>
         </p:nvSpPr>
         <p:spPr>
           <a:xfrm>
             <a:off x="749808" y="5093208"/>
-            <a:ext cx="1645920" cy="219456"/>
+            <a:ext cx="1691640" cy="256032"/>
           </a:xfrm>
           <a:prstGeom prst="rect">
             <a:avLst/>
@@ -7676,30 +8377,30 @@
               <a:buNone/>
             </a:pPr>
             <a:r>
-              <a:rPr lang="en-US" sz="950" b="1" dirty="0">
-                <a:solidFill>
-                  <a:srgbClr val="4F6A00"/>
+              <a:rPr lang="en-US" sz="1050" b="1" dirty="0">
+                <a:solidFill>
+                  <a:srgbClr val="977024"/>
                 </a:solidFill>
                 <a:latin typeface="Pretendard" pitchFamily="34" charset="0"/>
                 <a:ea typeface="Pretendard" pitchFamily="34" charset="-122"/>
                 <a:cs typeface="Pretendard" pitchFamily="34" charset="-120"/>
               </a:rPr>
-              <a:t>💡 종합 가치 제안</a:t>
-            </a:r>
-            <a:endParaRPr lang="en-US" sz="950" dirty="0"/>
-          </a:p>
-        </p:txBody>
-      </p:sp>
-      <p:sp>
-        <p:nvSpPr>
-          <p:cNvPr id="7" name="Text 5"/>
-          <p:cNvSpPr/>
-          <p:nvPr/>
-        </p:nvSpPr>
-        <p:spPr>
-          <a:xfrm>
-            <a:off x="2441448" y="5074920"/>
-            <a:ext cx="9000439" cy="621792"/>
+              <a:t>종합 가치 제안</a:t>
+            </a:r>
+            <a:endParaRPr lang="en-US" sz="1050" dirty="0"/>
+          </a:p>
+        </p:txBody>
+      </p:sp>
+      <p:sp>
+        <p:nvSpPr>
+          <p:cNvPr id="8" name="Text 6"/>
+          <p:cNvSpPr/>
+          <p:nvPr/>
+        </p:nvSpPr>
+        <p:spPr>
+          <a:xfrm>
+            <a:off x="2487168" y="5056632"/>
+            <a:ext cx="8954719" cy="658368"/>
           </a:xfrm>
           <a:prstGeom prst="rect">
             <a:avLst/>
@@ -7713,14 +8414,14 @@
           <a:p>
             <a:pPr indent="0" marL="0">
               <a:lnSpc>
-                <a:spcPct val="120000"/>
+                <a:spcPct val="125000"/>
               </a:lnSpc>
               <a:buNone/>
             </a:pPr>
             <a:r>
-              <a:rPr lang="en-US" sz="1000" dirty="0">
-                <a:solidFill>
-                  <a:srgbClr val="334155"/>
+              <a:rPr lang="en-US" sz="1100" dirty="0">
+                <a:solidFill>
+                  <a:srgbClr val="10161F"/>
                 </a:solidFill>
                 <a:latin typeface="Pretendard" pitchFamily="34" charset="0"/>
                 <a:ea typeface="Pretendard" pitchFamily="34" charset="-122"/>
@@ -7728,71 +8429,87 @@
               </a:rPr>
               <a:t>관점에서 안정적 월 임대수익과 우량 메디컬 테넌트를 보유한 핵심 투자 자산입니다.</a:t>
             </a:r>
-            <a:endParaRPr lang="en-US" sz="1000" dirty="0"/>
-          </a:p>
-        </p:txBody>
-      </p:sp>
-      <p:sp>
-        <p:nvSpPr>
-          <p:cNvPr id="8" name="Text 6"/>
-          <p:cNvSpPr/>
-          <p:nvPr/>
-        </p:nvSpPr>
-        <p:spPr>
-          <a:xfrm>
-            <a:off x="566928" y="6419088"/>
-            <a:ext cx="11057839" cy="201168"/>
-          </a:xfrm>
-          <a:prstGeom prst="rect">
-            <a:avLst/>
-          </a:prstGeom>
-          <a:noFill/>
-          <a:ln/>
-        </p:spPr>
-        <p:txBody>
-          <a:bodyPr wrap="square" lIns="0" tIns="0" rIns="0" bIns="0" rtlCol="0" anchor="ctr"/>
-          <a:lstStyle/>
-          <a:p>
-            <a:pPr algn="ctr" indent="0" marL="0">
-              <a:buNone/>
-            </a:pPr>
-            <a:r>
-              <a:rPr lang="en-US" sz="750" dirty="0">
-                <a:solidFill>
-                  <a:srgbClr val="64748B"/>
+            <a:endParaRPr lang="en-US" sz="1100" dirty="0"/>
+          </a:p>
+        </p:txBody>
+      </p:sp>
+      <p:sp>
+        <p:nvSpPr>
+          <p:cNvPr id="9" name="Text 7"/>
+          <p:cNvSpPr/>
+          <p:nvPr/>
+        </p:nvSpPr>
+        <p:spPr>
+          <a:xfrm>
+            <a:off x="566928" y="6382512"/>
+            <a:ext cx="7315200" cy="219456"/>
+          </a:xfrm>
+          <a:prstGeom prst="rect">
+            <a:avLst/>
+          </a:prstGeom>
+          <a:noFill/>
+          <a:ln/>
+        </p:spPr>
+        <p:txBody>
+          <a:bodyPr wrap="square" lIns="0" tIns="0" rIns="0" bIns="0" rtlCol="0" anchor="ctr"/>
+          <a:lstStyle/>
+          <a:p>
+            <a:pPr indent="0" marL="0">
+              <a:buNone/>
+            </a:pPr>
+            <a:r>
+              <a:rPr lang="en-US" sz="800" dirty="0">
+                <a:solidFill>
+                  <a:srgbClr val="718096"/>
                 </a:solidFill>
                 <a:latin typeface="Pretendard" pitchFamily="34" charset="0"/>
                 <a:ea typeface="Pretendard" pitchFamily="34" charset="-122"/>
                 <a:cs typeface="Pretendard" pitchFamily="34" charset="-120"/>
               </a:rPr>
-              <a:t>크리딜  ·    ·  8</a:t>
-            </a:r>
-            <a:endParaRPr lang="en-US" sz="750" dirty="0"/>
-          </a:p>
-        </p:txBody>
-      </p:sp>
-      <p:sp>
-        <p:nvSpPr>
-          <p:cNvPr id="9" name="Shape 7"/>
-          <p:cNvSpPr/>
-          <p:nvPr/>
-        </p:nvSpPr>
-        <p:spPr>
-          <a:xfrm>
-            <a:off x="4437172" y="6382512"/>
-            <a:ext cx="3317352" cy="0"/>
-          </a:xfrm>
-          <a:prstGeom prst="line">
-            <a:avLst/>
-          </a:prstGeom>
-          <a:noFill/>
-          <a:ln w="6350">
-            <a:solidFill>
-              <a:srgbClr val="6B8E00"/>
-            </a:solidFill>
-            <a:prstDash val="solid"/>
-          </a:ln>
-        </p:spPr>
+              <a:t>크리딜   |   </a:t>
+            </a:r>
+            <a:endParaRPr lang="en-US" sz="800" dirty="0"/>
+          </a:p>
+        </p:txBody>
+      </p:sp>
+      <p:sp>
+        <p:nvSpPr>
+          <p:cNvPr id="10" name="Text 8"/>
+          <p:cNvSpPr/>
+          <p:nvPr/>
+        </p:nvSpPr>
+        <p:spPr>
+          <a:xfrm>
+            <a:off x="10710367" y="6382512"/>
+            <a:ext cx="914400" cy="219456"/>
+          </a:xfrm>
+          <a:prstGeom prst="rect">
+            <a:avLst/>
+          </a:prstGeom>
+          <a:noFill/>
+          <a:ln/>
+        </p:spPr>
+        <p:txBody>
+          <a:bodyPr wrap="square" lIns="0" tIns="0" rIns="0" bIns="0" rtlCol="0" anchor="ctr"/>
+          <a:lstStyle/>
+          <a:p>
+            <a:pPr algn="r" indent="0" marL="0">
+              <a:buNone/>
+            </a:pPr>
+            <a:r>
+              <a:rPr lang="en-US" sz="900" b="1" dirty="0">
+                <a:solidFill>
+                  <a:srgbClr val="B98A2E"/>
+                </a:solidFill>
+                <a:latin typeface="Arial" pitchFamily="34" charset="0"/>
+                <a:ea typeface="Arial" pitchFamily="34" charset="-122"/>
+                <a:cs typeface="Arial" pitchFamily="34" charset="-120"/>
+              </a:rPr>
+              <a:t>8</a:t>
+            </a:r>
+            <a:endParaRPr lang="en-US" sz="900" dirty="0"/>
+          </a:p>
+        </p:txBody>
       </p:sp>
     </p:spTree>
   </p:cSld>
@@ -7834,14 +8551,14 @@
         </p:nvSpPr>
         <p:spPr>
           <a:xfrm>
-            <a:off x="566928" y="384048"/>
-            <a:ext cx="45720" cy="566928"/>
-          </a:xfrm>
-          <a:prstGeom prst="rect">
+            <a:off x="566928" y="457200"/>
+            <a:ext cx="384048" cy="384048"/>
+          </a:xfrm>
+          <a:prstGeom prst="ellipse">
             <a:avLst/>
           </a:prstGeom>
           <a:solidFill>
-            <a:srgbClr val="6B8E00"/>
+            <a:srgbClr val="B98A2E"/>
           </a:solidFill>
           <a:ln/>
         </p:spPr>
@@ -7854,32 +8571,71 @@
         </p:nvSpPr>
         <p:spPr>
           <a:xfrm>
-            <a:off x="749808" y="384048"/>
-            <a:ext cx="10874959" cy="182880"/>
-          </a:xfrm>
-          <a:prstGeom prst="rect">
-            <a:avLst/>
-          </a:prstGeom>
-          <a:noFill/>
-          <a:ln/>
-        </p:spPr>
-        <p:txBody>
-          <a:bodyPr wrap="square" lIns="0" tIns="0" rIns="0" bIns="0" rtlCol="0" anchor="ctr"/>
-          <a:lstStyle/>
-          <a:p>
-            <a:pPr indent="0" marL="0">
-              <a:buNone/>
-            </a:pPr>
-            <a:r>
-              <a:rPr lang="en-US" sz="950" b="1" spc="200" kern="0" dirty="0">
-                <a:solidFill>
-                  <a:srgbClr val="6B8E00"/>
+            <a:off x="566928" y="457200"/>
+            <a:ext cx="384048" cy="384048"/>
+          </a:xfrm>
+          <a:prstGeom prst="rect">
+            <a:avLst/>
+          </a:prstGeom>
+          <a:noFill/>
+          <a:ln/>
+        </p:spPr>
+        <p:txBody>
+          <a:bodyPr wrap="square" lIns="0" tIns="0" rIns="0" bIns="0" rtlCol="0" anchor="ctr"/>
+          <a:lstStyle/>
+          <a:p>
+            <a:pPr algn="ctr" indent="0" marL="0">
+              <a:buNone/>
+            </a:pPr>
+            <a:r>
+              <a:rPr lang="en-US" sz="1300" b="1" dirty="0">
+                <a:solidFill>
+                  <a:srgbClr val="FFFFFF"/>
                 </a:solidFill>
                 <a:latin typeface="Arial" pitchFamily="34" charset="0"/>
                 <a:ea typeface="Arial" pitchFamily="34" charset="-122"/>
                 <a:cs typeface="Arial" pitchFamily="34" charset="-120"/>
               </a:rPr>
-              <a:t>09  Process</a:t>
+              <a:t>09</a:t>
+            </a:r>
+            <a:endParaRPr lang="en-US" sz="1300" dirty="0"/>
+          </a:p>
+        </p:txBody>
+      </p:sp>
+      <p:sp>
+        <p:nvSpPr>
+          <p:cNvPr id="4" name="Text 2"/>
+          <p:cNvSpPr/>
+          <p:nvPr/>
+        </p:nvSpPr>
+        <p:spPr>
+          <a:xfrm>
+            <a:off x="1133856" y="457200"/>
+            <a:ext cx="10490911" cy="182880"/>
+          </a:xfrm>
+          <a:prstGeom prst="rect">
+            <a:avLst/>
+          </a:prstGeom>
+          <a:noFill/>
+          <a:ln/>
+        </p:spPr>
+        <p:txBody>
+          <a:bodyPr wrap="square" lIns="0" tIns="0" rIns="0" bIns="0" rtlCol="0" anchor="ctr"/>
+          <a:lstStyle/>
+          <a:p>
+            <a:pPr indent="0" marL="0">
+              <a:buNone/>
+            </a:pPr>
+            <a:r>
+              <a:rPr lang="en-US" sz="950" b="1" spc="200" kern="0" dirty="0">
+                <a:solidFill>
+                  <a:srgbClr val="B98A2E"/>
+                </a:solidFill>
+                <a:latin typeface="Arial" pitchFamily="34" charset="0"/>
+                <a:ea typeface="Arial" pitchFamily="34" charset="-122"/>
+                <a:cs typeface="Arial" pitchFamily="34" charset="-120"/>
+              </a:rPr>
+              <a:t>Process</a:t>
             </a:r>
             <a:endParaRPr lang="en-US" sz="950" dirty="0"/>
           </a:p>
@@ -7887,14 +8643,14 @@
       </p:sp>
       <p:sp>
         <p:nvSpPr>
-          <p:cNvPr id="4" name="Text 2"/>
-          <p:cNvSpPr/>
-          <p:nvPr/>
-        </p:nvSpPr>
-        <p:spPr>
-          <a:xfrm>
-            <a:off x="749808" y="566928"/>
-            <a:ext cx="10874959" cy="384048"/>
+          <p:cNvPr id="5" name="Text 3"/>
+          <p:cNvSpPr/>
+          <p:nvPr/>
+        </p:nvSpPr>
+        <p:spPr>
+          <a:xfrm>
+            <a:off x="1133856" y="640080"/>
+            <a:ext cx="10490911" cy="365760"/>
           </a:xfrm>
           <a:prstGeom prst="rect">
             <a:avLst/>
@@ -7910,9 +8666,9 @@
               <a:buNone/>
             </a:pPr>
             <a:r>
-              <a:rPr lang="en-US" sz="2200" b="1" dirty="0">
-                <a:solidFill>
-                  <a:srgbClr val="0F172A"/>
+              <a:rPr lang="en-US" sz="2300" b="1" dirty="0">
+                <a:solidFill>
+                  <a:srgbClr val="10161F"/>
                 </a:solidFill>
                 <a:latin typeface="Pretendard" pitchFamily="34" charset="0"/>
                 <a:ea typeface="Pretendard" pitchFamily="34" charset="-122"/>
@@ -7920,13 +8676,13 @@
               </a:rPr>
               <a:t>다음 단계</a:t>
             </a:r>
-            <a:endParaRPr lang="en-US" sz="2200" dirty="0"/>
-          </a:p>
-        </p:txBody>
-      </p:sp>
-      <p:sp>
-        <p:nvSpPr>
-          <p:cNvPr id="5" name="Shape 3"/>
+            <a:endParaRPr lang="en-US" sz="2300" dirty="0"/>
+          </a:p>
+        </p:txBody>
+      </p:sp>
+      <p:sp>
+        <p:nvSpPr>
+          <p:cNvPr id="6" name="Shape 4"/>
           <p:cNvSpPr/>
           <p:nvPr/>
         </p:nvSpPr>
@@ -7935,15 +8691,17 @@
             <a:off x="566928" y="1572768"/>
             <a:ext cx="11057839" cy="3200400"/>
           </a:xfrm>
-          <a:prstGeom prst="rect">
-            <a:avLst/>
+          <a:prstGeom prst="roundRect">
+            <a:avLst>
+              <a:gd name="adj" fmla="val 1714"/>
+            </a:avLst>
           </a:prstGeom>
           <a:solidFill>
-            <a:srgbClr val="F8FAFC"/>
+            <a:srgbClr val="F7FAFC"/>
           </a:solidFill>
-          <a:ln w="3810">
+          <a:ln w="6350">
             <a:solidFill>
-              <a:srgbClr val="CBD5E1"/>
+              <a:srgbClr val="CBD5E0"/>
             </a:solidFill>
             <a:prstDash val="solid"/>
           </a:ln>
@@ -7951,26 +8709,6 @@
       </p:sp>
       <p:sp>
         <p:nvSpPr>
-          <p:cNvPr id="6" name="Shape 4"/>
-          <p:cNvSpPr/>
-          <p:nvPr/>
-        </p:nvSpPr>
-        <p:spPr>
-          <a:xfrm>
-            <a:off x="566928" y="1572768"/>
-            <a:ext cx="11057839" cy="36576"/>
-          </a:xfrm>
-          <a:prstGeom prst="rect">
-            <a:avLst/>
-          </a:prstGeom>
-          <a:solidFill>
-            <a:srgbClr val="6B8E00"/>
-          </a:solidFill>
-          <a:ln/>
-        </p:spPr>
-      </p:sp>
-      <p:sp>
-        <p:nvSpPr>
           <p:cNvPr id="7" name="Shape 5"/>
           <p:cNvSpPr/>
           <p:nvPr/>
@@ -7984,7 +8722,7 @@
             <a:avLst/>
           </a:prstGeom>
           <a:solidFill>
-            <a:srgbClr val="6B8E00"/>
+            <a:srgbClr val="B98A2E"/>
           </a:solidFill>
           <a:ln/>
         </p:spPr>
@@ -8055,7 +8793,7 @@
             <a:r>
               <a:rPr lang="en-US" sz="1600" b="1" dirty="0">
                 <a:solidFill>
-                  <a:srgbClr val="0F172A"/>
+                  <a:srgbClr val="10161F"/>
                 </a:solidFill>
                 <a:latin typeface="Pretendard" pitchFamily="34" charset="0"/>
                 <a:ea typeface="Pretendard" pitchFamily="34" charset="-122"/>
@@ -8094,7 +8832,7 @@
             <a:r>
               <a:rPr lang="en-US" sz="1100" dirty="0">
                 <a:solidFill>
-                  <a:srgbClr val="0F172A"/>
+                  <a:srgbClr val="10161F"/>
                 </a:solidFill>
                 <a:latin typeface="Pretendard" pitchFamily="34" charset="0"/>
                 <a:ea typeface="Pretendard" pitchFamily="34" charset="-122"/>
@@ -8114,59 +8852,75 @@
         </p:nvSpPr>
         <p:spPr>
           <a:xfrm>
-            <a:off x="566928" y="6419088"/>
-            <a:ext cx="11057839" cy="201168"/>
-          </a:xfrm>
-          <a:prstGeom prst="rect">
-            <a:avLst/>
-          </a:prstGeom>
-          <a:noFill/>
-          <a:ln/>
-        </p:spPr>
-        <p:txBody>
-          <a:bodyPr wrap="square" lIns="0" tIns="0" rIns="0" bIns="0" rtlCol="0" anchor="ctr"/>
-          <a:lstStyle/>
-          <a:p>
-            <a:pPr algn="ctr" indent="0" marL="0">
-              <a:buNone/>
-            </a:pPr>
-            <a:r>
-              <a:rPr lang="en-US" sz="750" dirty="0">
-                <a:solidFill>
-                  <a:srgbClr val="64748B"/>
+            <a:off x="566928" y="6382512"/>
+            <a:ext cx="7315200" cy="219456"/>
+          </a:xfrm>
+          <a:prstGeom prst="rect">
+            <a:avLst/>
+          </a:prstGeom>
+          <a:noFill/>
+          <a:ln/>
+        </p:spPr>
+        <p:txBody>
+          <a:bodyPr wrap="square" lIns="0" tIns="0" rIns="0" bIns="0" rtlCol="0" anchor="ctr"/>
+          <a:lstStyle/>
+          <a:p>
+            <a:pPr indent="0" marL="0">
+              <a:buNone/>
+            </a:pPr>
+            <a:r>
+              <a:rPr lang="en-US" sz="800" dirty="0">
+                <a:solidFill>
+                  <a:srgbClr val="718096"/>
                 </a:solidFill>
                 <a:latin typeface="Pretendard" pitchFamily="34" charset="0"/>
                 <a:ea typeface="Pretendard" pitchFamily="34" charset="-122"/>
                 <a:cs typeface="Pretendard" pitchFamily="34" charset="-120"/>
               </a:rPr>
-              <a:t>크리딜  ·    ·  9</a:t>
-            </a:r>
-            <a:endParaRPr lang="en-US" sz="750" dirty="0"/>
-          </a:p>
-        </p:txBody>
-      </p:sp>
-      <p:sp>
-        <p:nvSpPr>
-          <p:cNvPr id="12" name="Shape 10"/>
-          <p:cNvSpPr/>
-          <p:nvPr/>
-        </p:nvSpPr>
-        <p:spPr>
-          <a:xfrm>
-            <a:off x="4437172" y="6382512"/>
-            <a:ext cx="3317352" cy="0"/>
-          </a:xfrm>
-          <a:prstGeom prst="line">
-            <a:avLst/>
-          </a:prstGeom>
-          <a:noFill/>
-          <a:ln w="6350">
-            <a:solidFill>
-              <a:srgbClr val="6B8E00"/>
-            </a:solidFill>
-            <a:prstDash val="solid"/>
-          </a:ln>
-        </p:spPr>
+              <a:t>크리딜   |   </a:t>
+            </a:r>
+            <a:endParaRPr lang="en-US" sz="800" dirty="0"/>
+          </a:p>
+        </p:txBody>
+      </p:sp>
+      <p:sp>
+        <p:nvSpPr>
+          <p:cNvPr id="12" name="Text 10"/>
+          <p:cNvSpPr/>
+          <p:nvPr/>
+        </p:nvSpPr>
+        <p:spPr>
+          <a:xfrm>
+            <a:off x="10710367" y="6382512"/>
+            <a:ext cx="914400" cy="219456"/>
+          </a:xfrm>
+          <a:prstGeom prst="rect">
+            <a:avLst/>
+          </a:prstGeom>
+          <a:noFill/>
+          <a:ln/>
+        </p:spPr>
+        <p:txBody>
+          <a:bodyPr wrap="square" lIns="0" tIns="0" rIns="0" bIns="0" rtlCol="0" anchor="ctr"/>
+          <a:lstStyle/>
+          <a:p>
+            <a:pPr algn="r" indent="0" marL="0">
+              <a:buNone/>
+            </a:pPr>
+            <a:r>
+              <a:rPr lang="en-US" sz="900" b="1" dirty="0">
+                <a:solidFill>
+                  <a:srgbClr val="B98A2E"/>
+                </a:solidFill>
+                <a:latin typeface="Arial" pitchFamily="34" charset="0"/>
+                <a:ea typeface="Arial" pitchFamily="34" charset="-122"/>
+                <a:cs typeface="Arial" pitchFamily="34" charset="-120"/>
+              </a:rPr>
+              <a:t>9</a:t>
+            </a:r>
+            <a:endParaRPr lang="en-US" sz="900" dirty="0"/>
+          </a:p>
+        </p:txBody>
       </p:sp>
     </p:spTree>
   </p:cSld>

--- a/docs/test/stress/e2e-outputs/income_no_photos_pr09.pptx
+++ b/docs/test/stress/e2e-outputs/income_no_photos_pr09.pptx
@@ -6268,7 +6268,7 @@
                 <a:gridCol w="3071622"/>
                 <a:gridCol w="3071622"/>
               </a:tblGrid>
-              <a:tr h="457200">
+              <a:tr h="438912">
                 <a:tc>
                   <a:txBody>
                     <a:bodyPr/>
@@ -6542,7 +6542,7 @@
                   </a:tcPr>
                 </a:tc>
               </a:tr>
-              <a:tr h="457200">
+              <a:tr h="438912">
                 <a:tc>
                   <a:txBody>
                     <a:bodyPr/>
@@ -6816,7 +6816,7 @@
                   </a:tcPr>
                 </a:tc>
               </a:tr>
-              <a:tr h="457200">
+              <a:tr h="438912">
                 <a:tc>
                   <a:txBody>
                     <a:bodyPr/>
@@ -7743,11 +7743,11 @@
         <p:spPr>
           <a:xfrm>
             <a:off x="566928" y="1417320"/>
-            <a:ext cx="5391760" cy="3611880"/>
+            <a:ext cx="5400904" cy="3657600"/>
           </a:xfrm>
           <a:prstGeom prst="roundRect">
             <a:avLst>
-              <a:gd name="adj" fmla="val 1519"/>
+              <a:gd name="adj" fmla="val 1500"/>
             </a:avLst>
           </a:prstGeom>
           <a:solidFill>
@@ -7770,7 +7770,7 @@
         <p:spPr>
           <a:xfrm>
             <a:off x="566928" y="1417320"/>
-            <a:ext cx="5391760" cy="45720"/>
+            <a:ext cx="5400904" cy="45720"/>
           </a:xfrm>
           <a:prstGeom prst="rect">
             <a:avLst/>
@@ -7790,7 +7790,7 @@
         <p:spPr>
           <a:xfrm>
             <a:off x="795528" y="1618488"/>
-            <a:ext cx="4934560" cy="292608"/>
+            <a:ext cx="4943704" cy="292608"/>
           </a:xfrm>
           <a:prstGeom prst="rect">
             <a:avLst/>
@@ -7828,8 +7828,8 @@
         </p:nvSpPr>
         <p:spPr>
           <a:xfrm>
-            <a:off x="795528" y="1911096"/>
-            <a:ext cx="4934560" cy="402336"/>
+            <a:off x="795528" y="1947672"/>
+            <a:ext cx="4943704" cy="365760"/>
           </a:xfrm>
           <a:prstGeom prst="rect">
             <a:avLst/>
@@ -7847,7 +7847,7 @@
               <a:buNone/>
             </a:pPr>
             <a:r>
-              <a:rPr lang="en-US" sz="1350" b="1" dirty="0">
+              <a:rPr lang="en-US" sz="1250" b="1" dirty="0">
                 <a:solidFill>
                   <a:srgbClr val="10161F"/>
                 </a:solidFill>
@@ -7857,7 +7857,7 @@
               </a:rPr>
               <a:t>전층 의료</a:t>
             </a:r>
-            <a:endParaRPr lang="en-US" sz="1350" dirty="0"/>
+            <a:endParaRPr lang="en-US" sz="1250" dirty="0"/>
           </a:p>
         </p:txBody>
       </p:sp>
@@ -7870,7 +7870,7 @@
         <p:spPr>
           <a:xfrm>
             <a:off x="795528" y="2377440"/>
-            <a:ext cx="4934560" cy="2560320"/>
+            <a:ext cx="4943704" cy="2606040"/>
           </a:xfrm>
           <a:prstGeom prst="rect">
             <a:avLst/>
@@ -7892,7 +7892,7 @@
               <a:buChar char="•"/>
             </a:pPr>
             <a:r>
-              <a:rPr lang="en-US" sz="1200" dirty="0">
+              <a:rPr lang="en-US" sz="1100" dirty="0">
                 <a:solidFill>
                   <a:srgbClr val="10161F"/>
                 </a:solidFill>
@@ -7902,7 +7902,7 @@
               </a:rPr>
               <a:t>업종 다각화 검토</a:t>
             </a:r>
-            <a:endParaRPr lang="en-US" sz="1200" dirty="0"/>
+            <a:endParaRPr lang="en-US" sz="1100" dirty="0"/>
           </a:p>
         </p:txBody>
       </p:sp>
@@ -7914,12 +7914,12 @@
         </p:nvSpPr>
         <p:spPr>
           <a:xfrm>
-            <a:off x="6233008" y="1417320"/>
-            <a:ext cx="5391760" cy="3611880"/>
+            <a:off x="6223864" y="1417320"/>
+            <a:ext cx="5400904" cy="3657600"/>
           </a:xfrm>
           <a:prstGeom prst="roundRect">
             <a:avLst>
-              <a:gd name="adj" fmla="val 1519"/>
+              <a:gd name="adj" fmla="val 1500"/>
             </a:avLst>
           </a:prstGeom>
           <a:solidFill>
@@ -7941,8 +7941,8 @@
         </p:nvSpPr>
         <p:spPr>
           <a:xfrm>
-            <a:off x="6233008" y="1417320"/>
-            <a:ext cx="5391760" cy="45720"/>
+            <a:off x="6223864" y="1417320"/>
+            <a:ext cx="5400904" cy="45720"/>
           </a:xfrm>
           <a:prstGeom prst="rect">
             <a:avLst/>
@@ -7961,8 +7961,8 @@
         </p:nvSpPr>
         <p:spPr>
           <a:xfrm>
-            <a:off x="6461608" y="1618488"/>
-            <a:ext cx="4934560" cy="292608"/>
+            <a:off x="6452464" y="1618488"/>
+            <a:ext cx="4943704" cy="292608"/>
           </a:xfrm>
           <a:prstGeom prst="rect">
             <a:avLst/>
@@ -8000,8 +8000,8 @@
         </p:nvSpPr>
         <p:spPr>
           <a:xfrm>
-            <a:off x="6461608" y="1911096"/>
-            <a:ext cx="4934560" cy="402336"/>
+            <a:off x="6452464" y="1947672"/>
+            <a:ext cx="4943704" cy="365760"/>
           </a:xfrm>
           <a:prstGeom prst="rect">
             <a:avLst/>
@@ -8019,7 +8019,7 @@
               <a:buNone/>
             </a:pPr>
             <a:r>
-              <a:rPr lang="en-US" sz="1350" b="1" dirty="0">
+              <a:rPr lang="en-US" sz="1250" b="1" dirty="0">
                 <a:solidFill>
                   <a:srgbClr val="10161F"/>
                 </a:solidFill>
@@ -8029,7 +8029,7 @@
               </a:rPr>
               <a:t>4.1% 고정</a:t>
             </a:r>
-            <a:endParaRPr lang="en-US" sz="1350" dirty="0"/>
+            <a:endParaRPr lang="en-US" sz="1250" dirty="0"/>
           </a:p>
         </p:txBody>
       </p:sp>
@@ -8041,8 +8041,8 @@
         </p:nvSpPr>
         <p:spPr>
           <a:xfrm>
-            <a:off x="6461608" y="2377440"/>
-            <a:ext cx="4934560" cy="2560320"/>
+            <a:off x="6452464" y="2377440"/>
+            <a:ext cx="4943704" cy="2606040"/>
           </a:xfrm>
           <a:prstGeom prst="rect">
             <a:avLst/>
@@ -8064,7 +8064,7 @@
               <a:buChar char="•"/>
             </a:pPr>
             <a:r>
-              <a:rPr lang="en-US" sz="1200" dirty="0">
+              <a:rPr lang="en-US" sz="1100" dirty="0">
                 <a:solidFill>
                   <a:srgbClr val="10161F"/>
                 </a:solidFill>
@@ -8074,20 +8074,47 @@
               </a:rPr>
               <a:t>승계 대출 활용</a:t>
             </a:r>
-            <a:endParaRPr lang="en-US" sz="1200" dirty="0"/>
-          </a:p>
-        </p:txBody>
-      </p:sp>
-      <p:sp>
-        <p:nvSpPr>
-          <p:cNvPr id="16" name="Text 14"/>
-          <p:cNvSpPr/>
-          <p:nvPr/>
-        </p:nvSpPr>
-        <p:spPr>
-          <a:xfrm>
-            <a:off x="566928" y="6382512"/>
-            <a:ext cx="7315200" cy="219456"/>
+            <a:endParaRPr lang="en-US" sz="1100" dirty="0"/>
+          </a:p>
+        </p:txBody>
+      </p:sp>
+      <p:sp>
+        <p:nvSpPr>
+          <p:cNvPr id="16" name="Shape 14"/>
+          <p:cNvSpPr/>
+          <p:nvPr/>
+        </p:nvSpPr>
+        <p:spPr>
+          <a:xfrm>
+            <a:off x="566928" y="5193792"/>
+            <a:ext cx="11057839" cy="621792"/>
+          </a:xfrm>
+          <a:prstGeom prst="roundRect">
+            <a:avLst>
+              <a:gd name="adj" fmla="val 8824"/>
+            </a:avLst>
+          </a:prstGeom>
+          <a:solidFill>
+            <a:srgbClr val="F7FAFC"/>
+          </a:solidFill>
+          <a:ln w="6350">
+            <a:solidFill>
+              <a:srgbClr val="CBD5E0"/>
+            </a:solidFill>
+            <a:prstDash val="solid"/>
+          </a:ln>
+        </p:spPr>
+      </p:sp>
+      <p:sp>
+        <p:nvSpPr>
+          <p:cNvPr id="17" name="Text 15"/>
+          <p:cNvSpPr/>
+          <p:nvPr/>
+        </p:nvSpPr>
+        <p:spPr>
+          <a:xfrm>
+            <a:off x="795528" y="5193792"/>
+            <a:ext cx="10600639" cy="621792"/>
           </a:xfrm>
           <a:prstGeom prst="rect">
             <a:avLst/>
@@ -8103,14 +8130,53 @@
               <a:buNone/>
             </a:pPr>
             <a:r>
-              <a:rPr lang="en-US" sz="800" dirty="0">
-                <a:solidFill>
-                  <a:srgbClr val="718096"/>
+              <a:rPr lang="en-US" sz="1100" dirty="0">
+                <a:solidFill>
+                  <a:srgbClr val="10161F"/>
                 </a:solidFill>
                 <a:latin typeface="Pretendard" pitchFamily="34" charset="0"/>
                 <a:ea typeface="Pretendard" pitchFamily="34" charset="-122"/>
                 <a:cs typeface="Pretendard" pitchFamily="34" charset="-120"/>
               </a:rPr>
+              <a:t>※ 본 리스크 체크는 공부 및 브로커 확인 기반이며, 매수 전 전문 실사팀(변호사/건축사)을 통한 정밀 실사가 필요합니다.</a:t>
+            </a:r>
+            <a:endParaRPr lang="en-US" sz="1100" dirty="0"/>
+          </a:p>
+        </p:txBody>
+      </p:sp>
+      <p:sp>
+        <p:nvSpPr>
+          <p:cNvPr id="18" name="Text 16"/>
+          <p:cNvSpPr/>
+          <p:nvPr/>
+        </p:nvSpPr>
+        <p:spPr>
+          <a:xfrm>
+            <a:off x="566928" y="6382512"/>
+            <a:ext cx="7315200" cy="219456"/>
+          </a:xfrm>
+          <a:prstGeom prst="rect">
+            <a:avLst/>
+          </a:prstGeom>
+          <a:noFill/>
+          <a:ln/>
+        </p:spPr>
+        <p:txBody>
+          <a:bodyPr wrap="square" lIns="0" tIns="0" rIns="0" bIns="0" rtlCol="0" anchor="ctr"/>
+          <a:lstStyle/>
+          <a:p>
+            <a:pPr indent="0" marL="0">
+              <a:buNone/>
+            </a:pPr>
+            <a:r>
+              <a:rPr lang="en-US" sz="800" dirty="0">
+                <a:solidFill>
+                  <a:srgbClr val="718096"/>
+                </a:solidFill>
+                <a:latin typeface="Pretendard" pitchFamily="34" charset="0"/>
+                <a:ea typeface="Pretendard" pitchFamily="34" charset="-122"/>
+                <a:cs typeface="Pretendard" pitchFamily="34" charset="-120"/>
+              </a:rPr>
               <a:t>크리딜   |   </a:t>
             </a:r>
             <a:endParaRPr lang="en-US" sz="800" dirty="0"/>
@@ -8119,7 +8185,7 @@
       </p:sp>
       <p:sp>
         <p:nvSpPr>
-          <p:cNvPr id="17" name="Text 15"/>
+          <p:cNvPr id="19" name="Text 17"/>
           <p:cNvSpPr/>
           <p:nvPr/>
         </p:nvSpPr>

--- a/docs/test/stress/e2e-outputs/income_no_photos_pr09.pptx
+++ b/docs/test/stress/e2e-outputs/income_no_photos_pr09.pptx
@@ -1905,7 +1905,7 @@
                 <a:ea typeface="Arial" pitchFamily="34" charset="-122"/>
                 <a:cs typeface="Arial" pitchFamily="34" charset="-120"/>
               </a:rPr>
-              <a:t>BASIC IM</a:t>
+              <a:t>INVESTMENT MEMORANDUM</a:t>
             </a:r>
             <a:endParaRPr lang="en-US" sz="1000" dirty="0"/>
           </a:p>
@@ -4610,7 +4610,7 @@
                 <a:ea typeface="Pretendard" pitchFamily="34" charset="-122"/>
                 <a:cs typeface="Pretendard" pitchFamily="34" charset="-120"/>
               </a:rPr>
-              <a:t>원금 안전판: 핵심권역 핵심 입지 및 우량 대지 지분 가치로 하방 경직성 확보</a:t>
+              <a:t>입지 분석: 핵심권역 소재 자산의 입지 특성 및 대지 지분 가치 확인 필요</a:t>
             </a:r>
             <a:endParaRPr lang="en-US" sz="1150" dirty="0"/>
           </a:p>
@@ -4742,7 +4742,7 @@
                 <a:ea typeface="Pretendard" pitchFamily="34" charset="-122"/>
                 <a:cs typeface="Pretendard" pitchFamily="34" charset="-120"/>
               </a:rPr>
-              <a:t>수익 안정성: 매매 시장 적정가 수준 대비 안정적 월 임대수익 창출 기반</a:t>
+              <a:t>수익 구조: 매매 시장 적정가 수준 대비 임대수익 현황 분석 필요</a:t>
             </a:r>
             <a:endParaRPr lang="en-US" sz="1150" dirty="0"/>
           </a:p>
@@ -4874,7 +4874,7 @@
                 <a:ea typeface="Pretendard" pitchFamily="34" charset="-122"/>
                 <a:cs typeface="Pretendard" pitchFamily="34" charset="-120"/>
               </a:rPr>
-              <a:t>미래 가치: 향후 권역 지가 상승 및 공법상 밸류업을 통한 자본이득 실현 가능</a:t>
+              <a:t>향후 검토: 권역 개발 동향 및 공법상 변경 가능성 확인 필요</a:t>
             </a:r>
             <a:endParaRPr lang="en-US" sz="1150" dirty="0"/>
           </a:p>
@@ -8782,7 +8782,7 @@
         <p:spPr>
           <a:xfrm>
             <a:off x="786384" y="1792224"/>
-            <a:ext cx="384048" cy="384048"/>
+            <a:ext cx="438912" cy="438912"/>
           </a:xfrm>
           <a:prstGeom prst="ellipse">
             <a:avLst/>
@@ -8802,7 +8802,7 @@
         <p:spPr>
           <a:xfrm>
             <a:off x="786384" y="1792224"/>
-            <a:ext cx="384048" cy="384048"/>
+            <a:ext cx="438912" cy="438912"/>
           </a:xfrm>
           <a:prstGeom prst="rect">
             <a:avLst/>
@@ -8818,7 +8818,7 @@
               <a:buNone/>
             </a:pPr>
             <a:r>
-              <a:rPr lang="en-US" sz="1300" b="1" dirty="0">
+              <a:rPr lang="en-US" sz="1400" b="1" dirty="0">
                 <a:solidFill>
                   <a:srgbClr val="FFFFFF"/>
                 </a:solidFill>
@@ -8826,9 +8826,9 @@
                 <a:ea typeface="Arial" pitchFamily="34" charset="-122"/>
                 <a:cs typeface="Arial" pitchFamily="34" charset="-120"/>
               </a:rPr>
-              <a:t>STEP 1</a:t>
-            </a:r>
-            <a:endParaRPr lang="en-US" sz="1300" dirty="0"/>
+              <a:t>01</a:t>
+            </a:r>
+            <a:endParaRPr lang="en-US" sz="1400" dirty="0"/>
           </a:p>
         </p:txBody>
       </p:sp>
@@ -8865,7 +8865,7 @@
                 <a:ea typeface="Pretendard" pitchFamily="34" charset="-122"/>
                 <a:cs typeface="Pretendard" pitchFamily="34" charset="-120"/>
               </a:rPr>
-              <a:t>현장 실사 및 임대차계약서 원본 확인을 권장합니다.</a:t>
+              <a:t>1단계</a:t>
             </a:r>
             <a:endParaRPr lang="en-US" sz="1600" dirty="0"/>
           </a:p>
@@ -8891,6 +8891,23 @@
         <p:txBody>
           <a:bodyPr wrap="square" rtlCol="0" anchor="t"/>
           <a:lstStyle/>
+          <a:p>
+            <a:pPr indent="0" marL="0">
+              <a:buNone/>
+            </a:pPr>
+            <a:r>
+              <a:rPr lang="en-US" sz="1100" dirty="0">
+                <a:solidFill>
+                  <a:srgbClr val="10161F"/>
+                </a:solidFill>
+                <a:latin typeface="Pretendard" pitchFamily="34" charset="0"/>
+                <a:ea typeface="Pretendard" pitchFamily="34" charset="-122"/>
+                <a:cs typeface="Pretendard" pitchFamily="34" charset="-120"/>
+              </a:rPr>
+              <a:t>현장 실사 및 임대차계약서 원본 확인을 권장합니다.</a:t>
+            </a:r>
+            <a:endParaRPr lang="en-US" sz="1100" dirty="0"/>
+          </a:p>
           <a:p>
             <a:pPr indent="0" marL="0">
               <a:buNone/>

--- a/docs/test/stress/e2e-outputs/income_no_photos_pr09.pptx
+++ b/docs/test/stress/e2e-outputs/income_no_photos_pr09.pptx
@@ -14827,7 +14827,7 @@
                 <a:ea typeface="Pretendard" pitchFamily="34" charset="-122"/>
                 <a:cs typeface="Pretendard" pitchFamily="34" charset="-120"/>
               </a:rPr>
-              <a:t>연 순영업소득(NOI) 약 7.14억 원, 매입 Cap Rate 4.62%입니다. 실투자금: 약 69억 원</a:t>
+              <a:t>연 순영업소득(NOI) 약 7.14억 원, 매입 Cap Rate 4.62%입니다.</a:t>
             </a:r>
             <a:endParaRPr lang="en-US" sz="930" dirty="0"/>
           </a:p>
